--- a/training/Account-Health-Training.pptx
+++ b/training/Account-Health-Training.pptx
@@ -5,46 +5,46 @@
     <p:sldMasterId id="2147483648" r:id="rId1"/>
   </p:sldMasterIdLst>
   <p:sldIdLst>
-    <p:sldId id="256" r:id="rId7"/>
-    <p:sldId id="257" r:id="rId8"/>
-    <p:sldId id="258" r:id="rId9"/>
-    <p:sldId id="259" r:id="rId10"/>
-    <p:sldId id="260" r:id="rId11"/>
-    <p:sldId id="261" r:id="rId12"/>
-    <p:sldId id="262" r:id="rId13"/>
-    <p:sldId id="263" r:id="rId14"/>
-    <p:sldId id="264" r:id="rId15"/>
-    <p:sldId id="265" r:id="rId16"/>
-    <p:sldId id="266" r:id="rId17"/>
-    <p:sldId id="267" r:id="rId18"/>
-    <p:sldId id="268" r:id="rId19"/>
-    <p:sldId id="269" r:id="rId20"/>
-    <p:sldId id="270" r:id="rId21"/>
-    <p:sldId id="271" r:id="rId22"/>
-    <p:sldId id="272" r:id="rId23"/>
-    <p:sldId id="273" r:id="rId24"/>
-    <p:sldId id="274" r:id="rId25"/>
-    <p:sldId id="275" r:id="rId26"/>
-    <p:sldId id="276" r:id="rId27"/>
-    <p:sldId id="277" r:id="rId28"/>
-    <p:sldId id="278" r:id="rId29"/>
-    <p:sldId id="279" r:id="rId30"/>
-    <p:sldId id="280" r:id="rId31"/>
-    <p:sldId id="281" r:id="rId32"/>
-    <p:sldId id="282" r:id="rId33"/>
-    <p:sldId id="283" r:id="rId34"/>
-    <p:sldId id="284" r:id="rId35"/>
-    <p:sldId id="285" r:id="rId36"/>
-    <p:sldId id="286" r:id="rId37"/>
-    <p:sldId id="287" r:id="rId38"/>
-    <p:sldId id="288" r:id="rId39"/>
-    <p:sldId id="289" r:id="rId40"/>
-    <p:sldId id="290" r:id="rId41"/>
-    <p:sldId id="291" r:id="rId42"/>
-    <p:sldId id="292" r:id="rId43"/>
-    <p:sldId id="293" r:id="rId44"/>
+    <p:sldId id="256" r:id="rId2"/>
+    <p:sldId id="257" r:id="rId3"/>
+    <p:sldId id="258" r:id="rId4"/>
+    <p:sldId id="259" r:id="rId5"/>
+    <p:sldId id="260" r:id="rId6"/>
+    <p:sldId id="261" r:id="rId7"/>
+    <p:sldId id="262" r:id="rId8"/>
+    <p:sldId id="263" r:id="rId9"/>
+    <p:sldId id="264" r:id="rId10"/>
+    <p:sldId id="265" r:id="rId11"/>
+    <p:sldId id="266" r:id="rId12"/>
+    <p:sldId id="267" r:id="rId13"/>
+    <p:sldId id="268" r:id="rId14"/>
+    <p:sldId id="269" r:id="rId15"/>
+    <p:sldId id="270" r:id="rId16"/>
+    <p:sldId id="271" r:id="rId17"/>
+    <p:sldId id="272" r:id="rId18"/>
+    <p:sldId id="273" r:id="rId19"/>
+    <p:sldId id="274" r:id="rId20"/>
+    <p:sldId id="275" r:id="rId21"/>
+    <p:sldId id="276" r:id="rId22"/>
+    <p:sldId id="277" r:id="rId23"/>
+    <p:sldId id="278" r:id="rId24"/>
+    <p:sldId id="279" r:id="rId25"/>
+    <p:sldId id="280" r:id="rId26"/>
+    <p:sldId id="281" r:id="rId27"/>
+    <p:sldId id="282" r:id="rId28"/>
+    <p:sldId id="283" r:id="rId29"/>
+    <p:sldId id="284" r:id="rId30"/>
+    <p:sldId id="285" r:id="rId31"/>
+    <p:sldId id="286" r:id="rId32"/>
+    <p:sldId id="287" r:id="rId33"/>
+    <p:sldId id="288" r:id="rId34"/>
+    <p:sldId id="289" r:id="rId35"/>
+    <p:sldId id="290" r:id="rId36"/>
+    <p:sldId id="291" r:id="rId37"/>
+    <p:sldId id="292" r:id="rId38"/>
+    <p:sldId id="293" r:id="rId39"/>
   </p:sldIdLst>
-  <p:sldSz cx="12191695" cy="6858000" type="screen4x3"/>
+  <p:sldSz cx="12192000" cy="6858000"/>
   <p:notesSz cx="6858000" cy="9144000"/>
   <p:defaultTextStyle>
     <a:defPPr>
@@ -141,6 +141,22 @@
       </a:defRPr>
     </a:lvl9pPr>
   </p:defaultTextStyle>
+  <p:extLst>
+    <p:ext uri="{EFAFB233-063F-42B5-8137-9DF3F51BA10A}">
+      <p15:sldGuideLst xmlns:p15="http://schemas.microsoft.com/office/powerpoint/2012/main">
+        <p15:guide id="1" orient="horz" pos="2160">
+          <p15:clr>
+            <a:srgbClr val="A4A3A4"/>
+          </p15:clr>
+        </p15:guide>
+        <p15:guide id="2" pos="2880">
+          <p15:clr>
+            <a:srgbClr val="A4A3A4"/>
+          </p15:clr>
+        </p15:guide>
+      </p15:sldGuideLst>
+    </p:ext>
+  </p:extLst>
 </p:presentation>
 </file>
 
@@ -182,10 +198,9 @@
           <a:lstStyle/>
           <a:p>
             <a:r>
-              <a:rPr lang="en-US" smtClean="0"/>
+              <a:rPr lang="en-US"/>
               <a:t>Click to edit Master title style</a:t>
             </a:r>
-            <a:endParaRPr lang="en-US"/>
           </a:p>
         </p:txBody>
       </p:sp>
@@ -301,10 +316,9 @@
           </a:lstStyle>
           <a:p>
             <a:r>
-              <a:rPr lang="en-US" smtClean="0"/>
+              <a:rPr lang="en-US"/>
               <a:t>Click to edit Master subtitle style</a:t>
             </a:r>
-            <a:endParaRPr lang="en-US"/>
           </a:p>
         </p:txBody>
       </p:sp>
@@ -325,7 +339,7 @@
           <a:p>
             <a:fld id="{5BCAD085-E8A6-8845-BD4E-CB4CCA059FC4}" type="datetimeFigureOut">
               <a:rPr lang="en-US" smtClean="0"/>
-              <a:t>1/27/13</a:t>
+              <a:t>9/3/26</a:t>
             </a:fld>
             <a:endParaRPr lang="en-US"/>
           </a:p>
@@ -419,10 +433,9 @@
           <a:lstStyle/>
           <a:p>
             <a:r>
-              <a:rPr lang="en-US" smtClean="0"/>
+              <a:rPr lang="en-US"/>
               <a:t>Click to edit Master title style</a:t>
             </a:r>
-            <a:endParaRPr lang="en-US"/>
           </a:p>
         </p:txBody>
       </p:sp>
@@ -443,38 +456,37 @@
           <a:p>
             <a:pPr lvl="0"/>
             <a:r>
-              <a:rPr lang="en-US" smtClean="0"/>
+              <a:rPr lang="en-US"/>
               <a:t>Click to edit Master text styles</a:t>
             </a:r>
           </a:p>
           <a:p>
             <a:pPr lvl="1"/>
             <a:r>
-              <a:rPr lang="en-US" smtClean="0"/>
+              <a:rPr lang="en-US"/>
               <a:t>Second level</a:t>
             </a:r>
           </a:p>
           <a:p>
             <a:pPr lvl="2"/>
             <a:r>
-              <a:rPr lang="en-US" smtClean="0"/>
+              <a:rPr lang="en-US"/>
               <a:t>Third level</a:t>
             </a:r>
           </a:p>
           <a:p>
             <a:pPr lvl="3"/>
             <a:r>
-              <a:rPr lang="en-US" smtClean="0"/>
+              <a:rPr lang="en-US"/>
               <a:t>Fourth level</a:t>
             </a:r>
           </a:p>
           <a:p>
             <a:pPr lvl="4"/>
             <a:r>
-              <a:rPr lang="en-US" smtClean="0"/>
+              <a:rPr lang="en-US"/>
               <a:t>Fifth level</a:t>
             </a:r>
-            <a:endParaRPr lang="en-US"/>
           </a:p>
         </p:txBody>
       </p:sp>
@@ -495,7 +507,7 @@
           <a:p>
             <a:fld id="{5BCAD085-E8A6-8845-BD4E-CB4CCA059FC4}" type="datetimeFigureOut">
               <a:rPr lang="en-US" smtClean="0"/>
-              <a:t>1/27/13</a:t>
+              <a:t>9/3/26</a:t>
             </a:fld>
             <a:endParaRPr lang="en-US"/>
           </a:p>
@@ -594,10 +606,9 @@
           <a:lstStyle/>
           <a:p>
             <a:r>
-              <a:rPr lang="en-US" smtClean="0"/>
+              <a:rPr lang="en-US"/>
               <a:t>Click to edit Master title style</a:t>
             </a:r>
-            <a:endParaRPr lang="en-US"/>
           </a:p>
         </p:txBody>
       </p:sp>
@@ -623,38 +634,37 @@
           <a:p>
             <a:pPr lvl="0"/>
             <a:r>
-              <a:rPr lang="en-US" smtClean="0"/>
+              <a:rPr lang="en-US"/>
               <a:t>Click to edit Master text styles</a:t>
             </a:r>
           </a:p>
           <a:p>
             <a:pPr lvl="1"/>
             <a:r>
-              <a:rPr lang="en-US" smtClean="0"/>
+              <a:rPr lang="en-US"/>
               <a:t>Second level</a:t>
             </a:r>
           </a:p>
           <a:p>
             <a:pPr lvl="2"/>
             <a:r>
-              <a:rPr lang="en-US" smtClean="0"/>
+              <a:rPr lang="en-US"/>
               <a:t>Third level</a:t>
             </a:r>
           </a:p>
           <a:p>
             <a:pPr lvl="3"/>
             <a:r>
-              <a:rPr lang="en-US" smtClean="0"/>
+              <a:rPr lang="en-US"/>
               <a:t>Fourth level</a:t>
             </a:r>
           </a:p>
           <a:p>
             <a:pPr lvl="4"/>
             <a:r>
-              <a:rPr lang="en-US" smtClean="0"/>
+              <a:rPr lang="en-US"/>
               <a:t>Fifth level</a:t>
             </a:r>
-            <a:endParaRPr lang="en-US"/>
           </a:p>
         </p:txBody>
       </p:sp>
@@ -675,7 +685,7 @@
           <a:p>
             <a:fld id="{5BCAD085-E8A6-8845-BD4E-CB4CCA059FC4}" type="datetimeFigureOut">
               <a:rPr lang="en-US" smtClean="0"/>
-              <a:t>1/27/13</a:t>
+              <a:t>9/3/26</a:t>
             </a:fld>
             <a:endParaRPr lang="en-US"/>
           </a:p>
@@ -769,10 +779,9 @@
           <a:lstStyle/>
           <a:p>
             <a:r>
-              <a:rPr lang="en-US" smtClean="0"/>
+              <a:rPr lang="en-US"/>
               <a:t>Click to edit Master title style</a:t>
             </a:r>
-            <a:endParaRPr lang="en-US"/>
           </a:p>
         </p:txBody>
       </p:sp>
@@ -793,38 +802,37 @@
           <a:p>
             <a:pPr lvl="0"/>
             <a:r>
-              <a:rPr lang="en-US" smtClean="0"/>
+              <a:rPr lang="en-US"/>
               <a:t>Click to edit Master text styles</a:t>
             </a:r>
           </a:p>
           <a:p>
             <a:pPr lvl="1"/>
             <a:r>
-              <a:rPr lang="en-US" smtClean="0"/>
+              <a:rPr lang="en-US"/>
               <a:t>Second level</a:t>
             </a:r>
           </a:p>
           <a:p>
             <a:pPr lvl="2"/>
             <a:r>
-              <a:rPr lang="en-US" smtClean="0"/>
+              <a:rPr lang="en-US"/>
               <a:t>Third level</a:t>
             </a:r>
           </a:p>
           <a:p>
             <a:pPr lvl="3"/>
             <a:r>
-              <a:rPr lang="en-US" smtClean="0"/>
+              <a:rPr lang="en-US"/>
               <a:t>Fourth level</a:t>
             </a:r>
           </a:p>
           <a:p>
             <a:pPr lvl="4"/>
             <a:r>
-              <a:rPr lang="en-US" smtClean="0"/>
+              <a:rPr lang="en-US"/>
               <a:t>Fifth level</a:t>
             </a:r>
-            <a:endParaRPr lang="en-US"/>
           </a:p>
         </p:txBody>
       </p:sp>
@@ -845,7 +853,7 @@
           <a:p>
             <a:fld id="{5BCAD085-E8A6-8845-BD4E-CB4CCA059FC4}" type="datetimeFigureOut">
               <a:rPr lang="en-US" smtClean="0"/>
-              <a:t>1/27/13</a:t>
+              <a:t>9/3/26</a:t>
             </a:fld>
             <a:endParaRPr lang="en-US"/>
           </a:p>
@@ -948,10 +956,9 @@
           </a:lstStyle>
           <a:p>
             <a:r>
-              <a:rPr lang="en-US" smtClean="0"/>
+              <a:rPr lang="en-US"/>
               <a:t>Click to edit Master title style</a:t>
             </a:r>
-            <a:endParaRPr lang="en-US"/>
           </a:p>
         </p:txBody>
       </p:sp>
@@ -1068,7 +1075,7 @@
           <a:p>
             <a:pPr lvl="0"/>
             <a:r>
-              <a:rPr lang="en-US" smtClean="0"/>
+              <a:rPr lang="en-US"/>
               <a:t>Click to edit Master text styles</a:t>
             </a:r>
           </a:p>
@@ -1091,7 +1098,7 @@
           <a:p>
             <a:fld id="{5BCAD085-E8A6-8845-BD4E-CB4CCA059FC4}" type="datetimeFigureOut">
               <a:rPr lang="en-US" smtClean="0"/>
-              <a:t>1/27/13</a:t>
+              <a:t>9/3/26</a:t>
             </a:fld>
             <a:endParaRPr lang="en-US"/>
           </a:p>
@@ -1185,10 +1192,9 @@
           <a:lstStyle/>
           <a:p>
             <a:r>
-              <a:rPr lang="en-US" smtClean="0"/>
+              <a:rPr lang="en-US"/>
               <a:t>Click to edit Master title style</a:t>
             </a:r>
-            <a:endParaRPr lang="en-US"/>
           </a:p>
         </p:txBody>
       </p:sp>
@@ -1242,38 +1248,37 @@
           <a:p>
             <a:pPr lvl="0"/>
             <a:r>
-              <a:rPr lang="en-US" smtClean="0"/>
+              <a:rPr lang="en-US"/>
               <a:t>Click to edit Master text styles</a:t>
             </a:r>
           </a:p>
           <a:p>
             <a:pPr lvl="1"/>
             <a:r>
-              <a:rPr lang="en-US" smtClean="0"/>
+              <a:rPr lang="en-US"/>
               <a:t>Second level</a:t>
             </a:r>
           </a:p>
           <a:p>
             <a:pPr lvl="2"/>
             <a:r>
-              <a:rPr lang="en-US" smtClean="0"/>
+              <a:rPr lang="en-US"/>
               <a:t>Third level</a:t>
             </a:r>
           </a:p>
           <a:p>
             <a:pPr lvl="3"/>
             <a:r>
-              <a:rPr lang="en-US" smtClean="0"/>
+              <a:rPr lang="en-US"/>
               <a:t>Fourth level</a:t>
             </a:r>
           </a:p>
           <a:p>
             <a:pPr lvl="4"/>
             <a:r>
-              <a:rPr lang="en-US" smtClean="0"/>
+              <a:rPr lang="en-US"/>
               <a:t>Fifth level</a:t>
             </a:r>
-            <a:endParaRPr lang="en-US"/>
           </a:p>
         </p:txBody>
       </p:sp>
@@ -1327,38 +1332,37 @@
           <a:p>
             <a:pPr lvl="0"/>
             <a:r>
-              <a:rPr lang="en-US" smtClean="0"/>
+              <a:rPr lang="en-US"/>
               <a:t>Click to edit Master text styles</a:t>
             </a:r>
           </a:p>
           <a:p>
             <a:pPr lvl="1"/>
             <a:r>
-              <a:rPr lang="en-US" smtClean="0"/>
+              <a:rPr lang="en-US"/>
               <a:t>Second level</a:t>
             </a:r>
           </a:p>
           <a:p>
             <a:pPr lvl="2"/>
             <a:r>
-              <a:rPr lang="en-US" smtClean="0"/>
+              <a:rPr lang="en-US"/>
               <a:t>Third level</a:t>
             </a:r>
           </a:p>
           <a:p>
             <a:pPr lvl="3"/>
             <a:r>
-              <a:rPr lang="en-US" smtClean="0"/>
+              <a:rPr lang="en-US"/>
               <a:t>Fourth level</a:t>
             </a:r>
           </a:p>
           <a:p>
             <a:pPr lvl="4"/>
             <a:r>
-              <a:rPr lang="en-US" smtClean="0"/>
+              <a:rPr lang="en-US"/>
               <a:t>Fifth level</a:t>
             </a:r>
-            <a:endParaRPr lang="en-US"/>
           </a:p>
         </p:txBody>
       </p:sp>
@@ -1379,7 +1383,7 @@
           <a:p>
             <a:fld id="{5BCAD085-E8A6-8845-BD4E-CB4CCA059FC4}" type="datetimeFigureOut">
               <a:rPr lang="en-US" smtClean="0"/>
-              <a:t>1/27/13</a:t>
+              <a:t>9/3/26</a:t>
             </a:fld>
             <a:endParaRPr lang="en-US"/>
           </a:p>
@@ -1477,10 +1481,9 @@
           </a:lstStyle>
           <a:p>
             <a:r>
-              <a:rPr lang="en-US" smtClean="0"/>
+              <a:rPr lang="en-US"/>
               <a:t>Click to edit Master title style</a:t>
             </a:r>
-            <a:endParaRPr lang="en-US"/>
           </a:p>
         </p:txBody>
       </p:sp>
@@ -1543,7 +1546,7 @@
           <a:p>
             <a:pPr lvl="0"/>
             <a:r>
-              <a:rPr lang="en-US" smtClean="0"/>
+              <a:rPr lang="en-US"/>
               <a:t>Click to edit Master text styles</a:t>
             </a:r>
           </a:p>
@@ -1599,38 +1602,37 @@
           <a:p>
             <a:pPr lvl="0"/>
             <a:r>
-              <a:rPr lang="en-US" smtClean="0"/>
+              <a:rPr lang="en-US"/>
               <a:t>Click to edit Master text styles</a:t>
             </a:r>
           </a:p>
           <a:p>
             <a:pPr lvl="1"/>
             <a:r>
-              <a:rPr lang="en-US" smtClean="0"/>
+              <a:rPr lang="en-US"/>
               <a:t>Second level</a:t>
             </a:r>
           </a:p>
           <a:p>
             <a:pPr lvl="2"/>
             <a:r>
-              <a:rPr lang="en-US" smtClean="0"/>
+              <a:rPr lang="en-US"/>
               <a:t>Third level</a:t>
             </a:r>
           </a:p>
           <a:p>
             <a:pPr lvl="3"/>
             <a:r>
-              <a:rPr lang="en-US" smtClean="0"/>
+              <a:rPr lang="en-US"/>
               <a:t>Fourth level</a:t>
             </a:r>
           </a:p>
           <a:p>
             <a:pPr lvl="4"/>
             <a:r>
-              <a:rPr lang="en-US" smtClean="0"/>
+              <a:rPr lang="en-US"/>
               <a:t>Fifth level</a:t>
             </a:r>
-            <a:endParaRPr lang="en-US"/>
           </a:p>
         </p:txBody>
       </p:sp>
@@ -1693,7 +1695,7 @@
           <a:p>
             <a:pPr lvl="0"/>
             <a:r>
-              <a:rPr lang="en-US" smtClean="0"/>
+              <a:rPr lang="en-US"/>
               <a:t>Click to edit Master text styles</a:t>
             </a:r>
           </a:p>
@@ -1749,38 +1751,37 @@
           <a:p>
             <a:pPr lvl="0"/>
             <a:r>
-              <a:rPr lang="en-US" smtClean="0"/>
+              <a:rPr lang="en-US"/>
               <a:t>Click to edit Master text styles</a:t>
             </a:r>
           </a:p>
           <a:p>
             <a:pPr lvl="1"/>
             <a:r>
-              <a:rPr lang="en-US" smtClean="0"/>
+              <a:rPr lang="en-US"/>
               <a:t>Second level</a:t>
             </a:r>
           </a:p>
           <a:p>
             <a:pPr lvl="2"/>
             <a:r>
-              <a:rPr lang="en-US" smtClean="0"/>
+              <a:rPr lang="en-US"/>
               <a:t>Third level</a:t>
             </a:r>
           </a:p>
           <a:p>
             <a:pPr lvl="3"/>
             <a:r>
-              <a:rPr lang="en-US" smtClean="0"/>
+              <a:rPr lang="en-US"/>
               <a:t>Fourth level</a:t>
             </a:r>
           </a:p>
           <a:p>
             <a:pPr lvl="4"/>
             <a:r>
-              <a:rPr lang="en-US" smtClean="0"/>
+              <a:rPr lang="en-US"/>
               <a:t>Fifth level</a:t>
             </a:r>
-            <a:endParaRPr lang="en-US"/>
           </a:p>
         </p:txBody>
       </p:sp>
@@ -1801,7 +1802,7 @@
           <a:p>
             <a:fld id="{5BCAD085-E8A6-8845-BD4E-CB4CCA059FC4}" type="datetimeFigureOut">
               <a:rPr lang="en-US" smtClean="0"/>
-              <a:t>1/27/13</a:t>
+              <a:t>9/3/26</a:t>
             </a:fld>
             <a:endParaRPr lang="en-US"/>
           </a:p>
@@ -1895,10 +1896,9 @@
           <a:lstStyle/>
           <a:p>
             <a:r>
-              <a:rPr lang="en-US" smtClean="0"/>
+              <a:rPr lang="en-US"/>
               <a:t>Click to edit Master title style</a:t>
             </a:r>
-            <a:endParaRPr lang="en-US"/>
           </a:p>
         </p:txBody>
       </p:sp>
@@ -1919,7 +1919,7 @@
           <a:p>
             <a:fld id="{5BCAD085-E8A6-8845-BD4E-CB4CCA059FC4}" type="datetimeFigureOut">
               <a:rPr lang="en-US" smtClean="0"/>
-              <a:t>1/27/13</a:t>
+              <a:t>9/3/26</a:t>
             </a:fld>
             <a:endParaRPr lang="en-US"/>
           </a:p>
@@ -2014,7 +2014,7 @@
           <a:p>
             <a:fld id="{5BCAD085-E8A6-8845-BD4E-CB4CCA059FC4}" type="datetimeFigureOut">
               <a:rPr lang="en-US" smtClean="0"/>
-              <a:t>1/27/13</a:t>
+              <a:t>9/3/26</a:t>
             </a:fld>
             <a:endParaRPr lang="en-US"/>
           </a:p>
@@ -2117,10 +2117,9 @@
           </a:lstStyle>
           <a:p>
             <a:r>
-              <a:rPr lang="en-US" smtClean="0"/>
+              <a:rPr lang="en-US"/>
               <a:t>Click to edit Master title style</a:t>
             </a:r>
-            <a:endParaRPr lang="en-US"/>
           </a:p>
         </p:txBody>
       </p:sp>
@@ -2174,38 +2173,37 @@
           <a:p>
             <a:pPr lvl="0"/>
             <a:r>
-              <a:rPr lang="en-US" smtClean="0"/>
+              <a:rPr lang="en-US"/>
               <a:t>Click to edit Master text styles</a:t>
             </a:r>
           </a:p>
           <a:p>
             <a:pPr lvl="1"/>
             <a:r>
-              <a:rPr lang="en-US" smtClean="0"/>
+              <a:rPr lang="en-US"/>
               <a:t>Second level</a:t>
             </a:r>
           </a:p>
           <a:p>
             <a:pPr lvl="2"/>
             <a:r>
-              <a:rPr lang="en-US" smtClean="0"/>
+              <a:rPr lang="en-US"/>
               <a:t>Third level</a:t>
             </a:r>
           </a:p>
           <a:p>
             <a:pPr lvl="3"/>
             <a:r>
-              <a:rPr lang="en-US" smtClean="0"/>
+              <a:rPr lang="en-US"/>
               <a:t>Fourth level</a:t>
             </a:r>
           </a:p>
           <a:p>
             <a:pPr lvl="4"/>
             <a:r>
-              <a:rPr lang="en-US" smtClean="0"/>
+              <a:rPr lang="en-US"/>
               <a:t>Fifth level</a:t>
             </a:r>
-            <a:endParaRPr lang="en-US"/>
           </a:p>
         </p:txBody>
       </p:sp>
@@ -2268,7 +2266,7 @@
           <a:p>
             <a:pPr lvl="0"/>
             <a:r>
-              <a:rPr lang="en-US" smtClean="0"/>
+              <a:rPr lang="en-US"/>
               <a:t>Click to edit Master text styles</a:t>
             </a:r>
           </a:p>
@@ -2291,7 +2289,7 @@
           <a:p>
             <a:fld id="{5BCAD085-E8A6-8845-BD4E-CB4CCA059FC4}" type="datetimeFigureOut">
               <a:rPr lang="en-US" smtClean="0"/>
-              <a:t>1/27/13</a:t>
+              <a:t>9/3/26</a:t>
             </a:fld>
             <a:endParaRPr lang="en-US"/>
           </a:p>
@@ -2394,10 +2392,9 @@
           </a:lstStyle>
           <a:p>
             <a:r>
-              <a:rPr lang="en-US" smtClean="0"/>
+              <a:rPr lang="en-US"/>
               <a:t>Click to edit Master title style</a:t>
             </a:r>
-            <a:endParaRPr lang="en-US"/>
           </a:p>
         </p:txBody>
       </p:sp>
@@ -2521,7 +2518,7 @@
           <a:p>
             <a:pPr lvl="0"/>
             <a:r>
-              <a:rPr lang="en-US" smtClean="0"/>
+              <a:rPr lang="en-US"/>
               <a:t>Click to edit Master text styles</a:t>
             </a:r>
           </a:p>
@@ -2544,7 +2541,7 @@
           <a:p>
             <a:fld id="{5BCAD085-E8A6-8845-BD4E-CB4CCA059FC4}" type="datetimeFigureOut">
               <a:rPr lang="en-US" smtClean="0"/>
-              <a:t>1/27/13</a:t>
+              <a:t>9/3/26</a:t>
             </a:fld>
             <a:endParaRPr lang="en-US"/>
           </a:p>
@@ -2653,10 +2650,9 @@
           <a:lstStyle/>
           <a:p>
             <a:r>
-              <a:rPr lang="en-US" smtClean="0"/>
+              <a:rPr lang="en-US"/>
               <a:t>Click to edit Master title style</a:t>
             </a:r>
-            <a:endParaRPr lang="en-US"/>
           </a:p>
         </p:txBody>
       </p:sp>
@@ -2687,38 +2683,37 @@
           <a:p>
             <a:pPr lvl="0"/>
             <a:r>
-              <a:rPr lang="en-US" smtClean="0"/>
+              <a:rPr lang="en-US"/>
               <a:t>Click to edit Master text styles</a:t>
             </a:r>
           </a:p>
           <a:p>
             <a:pPr lvl="1"/>
             <a:r>
-              <a:rPr lang="en-US" smtClean="0"/>
+              <a:rPr lang="en-US"/>
               <a:t>Second level</a:t>
             </a:r>
           </a:p>
           <a:p>
             <a:pPr lvl="2"/>
             <a:r>
-              <a:rPr lang="en-US" smtClean="0"/>
+              <a:rPr lang="en-US"/>
               <a:t>Third level</a:t>
             </a:r>
           </a:p>
           <a:p>
             <a:pPr lvl="3"/>
             <a:r>
-              <a:rPr lang="en-US" smtClean="0"/>
+              <a:rPr lang="en-US"/>
               <a:t>Fourth level</a:t>
             </a:r>
           </a:p>
           <a:p>
             <a:pPr lvl="4"/>
             <a:r>
-              <a:rPr lang="en-US" smtClean="0"/>
+              <a:rPr lang="en-US"/>
               <a:t>Fifth level</a:t>
             </a:r>
-            <a:endParaRPr lang="en-US"/>
           </a:p>
         </p:txBody>
       </p:sp>
@@ -2757,7 +2752,7 @@
           <a:p>
             <a:fld id="{5BCAD085-E8A6-8845-BD4E-CB4CCA059FC4}" type="datetimeFigureOut">
               <a:rPr lang="en-US" smtClean="0"/>
-              <a:t>1/27/13</a:t>
+              <a:t>9/3/26</a:t>
             </a:fld>
             <a:endParaRPr lang="en-US"/>
           </a:p>
@@ -3116,7 +3111,7 @@
 </file>
 
 <file path=ppt/slides/slide1.xml><?xml version="1.0" encoding="utf-8"?>
-<p:sld xmlns:a="http://schemas.openxmlformats.org/drawingml/2006/main" xmlns:p="http://schemas.openxmlformats.org/presentationml/2006/main" xmlns:r="http://schemas.openxmlformats.org/officeDocument/2006/relationships">
+<p:sld xmlns:a="http://schemas.openxmlformats.org/drawingml/2006/main" xmlns:r="http://schemas.openxmlformats.org/officeDocument/2006/relationships" xmlns:p="http://schemas.openxmlformats.org/presentationml/2006/main">
   <p:cSld>
     <p:spTree>
       <p:nvGrpSpPr>
@@ -3124,7 +3119,14 @@
         <p:cNvGrpSpPr/>
         <p:nvPr/>
       </p:nvGrpSpPr>
-      <p:grpSpPr/>
+      <p:grpSpPr>
+        <a:xfrm>
+          <a:off x="0" y="0"/>
+          <a:ext cx="0" cy="0"/>
+          <a:chOff x="0" y="0"/>
+          <a:chExt cx="0" cy="0"/>
+        </a:xfrm>
+      </p:grpSpPr>
       <p:sp>
         <p:nvSpPr>
           <p:cNvPr id="2" name="Rectangle 1"/>
@@ -3166,6 +3168,7 @@
           <a:lstStyle/>
           <a:p>
             <a:pPr algn="ctr"/>
+            <a:endParaRPr/>
           </a:p>
         </p:txBody>
       </p:sp>
@@ -3209,6 +3212,7 @@
           <a:lstStyle/>
           <a:p>
             <a:pPr algn="ctr"/>
+            <a:endParaRPr/>
           </a:p>
         </p:txBody>
       </p:sp>
@@ -3361,7 +3365,7 @@
 </file>
 
 <file path=ppt/slides/slide10.xml><?xml version="1.0" encoding="utf-8"?>
-<p:sld xmlns:a="http://schemas.openxmlformats.org/drawingml/2006/main" xmlns:p="http://schemas.openxmlformats.org/presentationml/2006/main" xmlns:r="http://schemas.openxmlformats.org/officeDocument/2006/relationships">
+<p:sld xmlns:a="http://schemas.openxmlformats.org/drawingml/2006/main" xmlns:r="http://schemas.openxmlformats.org/officeDocument/2006/relationships" xmlns:p="http://schemas.openxmlformats.org/presentationml/2006/main">
   <p:cSld>
     <p:spTree>
       <p:nvGrpSpPr>
@@ -3369,7 +3373,14 @@
         <p:cNvGrpSpPr/>
         <p:nvPr/>
       </p:nvGrpSpPr>
-      <p:grpSpPr/>
+      <p:grpSpPr>
+        <a:xfrm>
+          <a:off x="0" y="0"/>
+          <a:ext cx="0" cy="0"/>
+          <a:chOff x="0" y="0"/>
+          <a:chExt cx="0" cy="0"/>
+        </a:xfrm>
+      </p:grpSpPr>
       <p:sp>
         <p:nvSpPr>
           <p:cNvPr id="2" name="Rectangle 1"/>
@@ -3411,6 +3422,7 @@
           <a:lstStyle/>
           <a:p>
             <a:pPr algn="ctr"/>
+            <a:endParaRPr/>
           </a:p>
         </p:txBody>
       </p:sp>
@@ -3524,6 +3536,7 @@
           <a:lstStyle/>
           <a:p>
             <a:pPr algn="ctr"/>
+            <a:endParaRPr/>
           </a:p>
         </p:txBody>
       </p:sp>
@@ -3565,9 +3578,6 @@
               </a:rPr>
               <a:t>▸ Deep dive for a single account: hero metrics, health highlights, recommended actions, and 5 operational "pillars"</a:t>
             </a:r>
-            <a:r>
-              <a:t/>
-            </a:r>
           </a:p>
           <a:p>
             <a:pPr algn="l">
@@ -3586,9 +3596,6 @@
               </a:rPr>
               <a:t>▸ Data source: fetchNsAccountDashboardData(accountId, archive) → NetStorage account_&lt;csvAccountDir&gt;_summary.json, same NetStorage-first/Google-fallback pattern as the Summary page</a:t>
             </a:r>
-            <a:r>
-              <a:t/>
-            </a:r>
           </a:p>
           <a:p>
             <a:pPr algn="l">
@@ -3607,9 +3614,6 @@
               </a:rPr>
               <a:t>▸ Hostname coverage widget: live call to fetchAccountHostnameCoverage — hits the real Akamai AppSec API (not NetStorage) via EdgeGrid auth</a:t>
             </a:r>
-            <a:r>
-              <a:t/>
-            </a:r>
           </a:p>
           <a:p>
             <a:pPr algn="l">
@@ -3628,9 +3632,6 @@
               </a:rPr>
               <a:t>▸ "Health Diagnosis &amp; Surgical Tool Box" section: HealthWidgetLink cards grouped by theme (Hostname/CNAME pulse, Feature heartbeat, Traffic DNA scan, Performance stethoscope, Security pulse, WSA alert scan) linking into the six Matrix feature families</a:t>
             </a:r>
-            <a:r>
-              <a:t/>
-            </a:r>
           </a:p>
           <a:p>
             <a:pPr algn="l">
@@ -3648,9 +3649,6 @@
                 </a:solidFill>
               </a:rPr>
               <a:t>▸ Archive selection made on the Summary page (or anywhere) is preserved automatically when navigating here — no manual re-entry of the archive value</a:t>
-            </a:r>
-            <a:r>
-              <a:t/>
             </a:r>
           </a:p>
         </p:txBody>
@@ -3664,7 +3662,7 @@
 </file>
 
 <file path=ppt/slides/slide11.xml><?xml version="1.0" encoding="utf-8"?>
-<p:sld xmlns:a="http://schemas.openxmlformats.org/drawingml/2006/main" xmlns:p="http://schemas.openxmlformats.org/presentationml/2006/main" xmlns:r="http://schemas.openxmlformats.org/officeDocument/2006/relationships">
+<p:sld xmlns:a="http://schemas.openxmlformats.org/drawingml/2006/main" xmlns:r="http://schemas.openxmlformats.org/officeDocument/2006/relationships" xmlns:p="http://schemas.openxmlformats.org/presentationml/2006/main">
   <p:cSld>
     <p:spTree>
       <p:nvGrpSpPr>
@@ -3672,7 +3670,14 @@
         <p:cNvGrpSpPr/>
         <p:nvPr/>
       </p:nvGrpSpPr>
-      <p:grpSpPr/>
+      <p:grpSpPr>
+        <a:xfrm>
+          <a:off x="0" y="0"/>
+          <a:ext cx="0" cy="0"/>
+          <a:chOff x="0" y="0"/>
+          <a:chExt cx="0" cy="0"/>
+        </a:xfrm>
+      </p:grpSpPr>
       <p:sp>
         <p:nvSpPr>
           <p:cNvPr id="2" name="Rectangle 1"/>
@@ -3714,6 +3719,7 @@
           <a:lstStyle/>
           <a:p>
             <a:pPr algn="ctr"/>
+            <a:endParaRPr/>
           </a:p>
         </p:txBody>
       </p:sp>
@@ -3827,6 +3833,7 @@
           <a:lstStyle/>
           <a:p>
             <a:pPr algn="ctr"/>
+            <a:endParaRPr/>
           </a:p>
         </p:txBody>
       </p:sp>
@@ -3868,9 +3875,6 @@
               </a:rPr>
               <a:t>▸ Every technical dimension (features, hostnames, traffic, performance, security host coverage, WSA alerts) ships as the SAME 3-page shape:</a:t>
             </a:r>
-            <a:r>
-              <a:t/>
-            </a:r>
           </a:p>
         </p:txBody>
       </p:sp>
@@ -3912,7 +3916,7 @@
           </a:fontRef>
         </p:style>
         <p:txBody>
-          <a:bodyPr rtlCol="0" anchor="ctr" wrap="square"/>
+          <a:bodyPr wrap="square" rtlCol="0" anchor="ctr"/>
           <a:lstStyle/>
           <a:p>
             <a:pPr algn="ctr"/>
@@ -3968,6 +3972,7 @@
           <a:lstStyle/>
           <a:p>
             <a:pPr algn="ctr"/>
+            <a:endParaRPr/>
           </a:p>
         </p:txBody>
       </p:sp>
@@ -4009,7 +4014,7 @@
           </a:fontRef>
         </p:style>
         <p:txBody>
-          <a:bodyPr rtlCol="0" anchor="ctr" wrap="square"/>
+          <a:bodyPr wrap="square" rtlCol="0" anchor="ctr"/>
           <a:lstStyle/>
           <a:p>
             <a:pPr algn="ctr"/>
@@ -4065,6 +4070,7 @@
           <a:lstStyle/>
           <a:p>
             <a:pPr algn="ctr"/>
+            <a:endParaRPr/>
           </a:p>
         </p:txBody>
       </p:sp>
@@ -4106,7 +4112,7 @@
           </a:fontRef>
         </p:style>
         <p:txBody>
-          <a:bodyPr rtlCol="0" anchor="ctr" wrap="square"/>
+          <a:bodyPr wrap="square" rtlCol="0" anchor="ctr"/>
           <a:lstStyle/>
           <a:p>
             <a:pPr algn="ctr"/>
@@ -4160,9 +4166,6 @@
               </a:rPr>
               <a:t>▸ All three pages for a feature share one background job pipeline (CSV → parse → transform), started once and re-used via cross-links</a:t>
             </a:r>
-            <a:r>
-              <a:t/>
-            </a:r>
           </a:p>
           <a:p>
             <a:pPr algn="l">
@@ -4181,9 +4184,6 @@
               </a:rPr>
               <a:t>▸ All three read the SAME data mode (csv_data_remote — always NetStorage) and the SAME inherited Context (NS base path)</a:t>
             </a:r>
-            <a:r>
-              <a:t/>
-            </a:r>
           </a:p>
           <a:p>
             <a:pPr algn="l">
@@ -4201,9 +4201,6 @@
                 </a:solidFill>
               </a:rPr>
               <a:t>▸ Consistency payoff: once you understand ONE Matrix family (e.g. Feature Matrix), you understand all six — the only thing that changes is the CSV schema and the domain-specific columns</a:t>
-            </a:r>
-            <a:r>
-              <a:t/>
             </a:r>
           </a:p>
         </p:txBody>
@@ -4217,7 +4214,7 @@
 </file>
 
 <file path=ppt/slides/slide12.xml><?xml version="1.0" encoding="utf-8"?>
-<p:sld xmlns:a="http://schemas.openxmlformats.org/drawingml/2006/main" xmlns:p="http://schemas.openxmlformats.org/presentationml/2006/main" xmlns:r="http://schemas.openxmlformats.org/officeDocument/2006/relationships">
+<p:sld xmlns:a="http://schemas.openxmlformats.org/drawingml/2006/main" xmlns:r="http://schemas.openxmlformats.org/officeDocument/2006/relationships" xmlns:p="http://schemas.openxmlformats.org/presentationml/2006/main">
   <p:cSld>
     <p:spTree>
       <p:nvGrpSpPr>
@@ -4225,7 +4222,14 @@
         <p:cNvGrpSpPr/>
         <p:nvPr/>
       </p:nvGrpSpPr>
-      <p:grpSpPr/>
+      <p:grpSpPr>
+        <a:xfrm>
+          <a:off x="0" y="0"/>
+          <a:ext cx="0" cy="0"/>
+          <a:chOff x="0" y="0"/>
+          <a:chExt cx="0" cy="0"/>
+        </a:xfrm>
+      </p:grpSpPr>
       <p:sp>
         <p:nvSpPr>
           <p:cNvPr id="2" name="Rectangle 1"/>
@@ -4267,6 +4271,7 @@
           <a:lstStyle/>
           <a:p>
             <a:pPr algn="ctr"/>
+            <a:endParaRPr/>
           </a:p>
         </p:txBody>
       </p:sp>
@@ -4380,6 +4385,7 @@
           <a:lstStyle/>
           <a:p>
             <a:pPr algn="ctr"/>
+            <a:endParaRPr/>
           </a:p>
         </p:txBody>
       </p:sp>
@@ -4402,9 +4408,27 @@
                 <a:tableStyleId>{5C22544A-7EE6-4342-B048-85BDC9FD1C3A}</a:tableStyleId>
               </a:tblPr>
               <a:tblGrid>
-                <a:gridCol w="2400300"/>
-                <a:gridCol w="3600450"/>
-                <a:gridCol w="5200650"/>
+                <a:gridCol w="2400300">
+                  <a:extLst>
+                    <a:ext uri="{9D8B030D-6E8A-4147-A177-3AD203B41FA5}">
+                      <a16:colId xmlns:a16="http://schemas.microsoft.com/office/drawing/2014/main" val="20000"/>
+                    </a:ext>
+                  </a:extLst>
+                </a:gridCol>
+                <a:gridCol w="3600450">
+                  <a:extLst>
+                    <a:ext uri="{9D8B030D-6E8A-4147-A177-3AD203B41FA5}">
+                      <a16:colId xmlns:a16="http://schemas.microsoft.com/office/drawing/2014/main" val="20001"/>
+                    </a:ext>
+                  </a:extLst>
+                </a:gridCol>
+                <a:gridCol w="5200650">
+                  <a:extLst>
+                    <a:ext uri="{9D8B030D-6E8A-4147-A177-3AD203B41FA5}">
+                      <a16:colId xmlns:a16="http://schemas.microsoft.com/office/drawing/2014/main" val="20002"/>
+                    </a:ext>
+                  </a:extLst>
+                </a:gridCol>
               </a:tblGrid>
               <a:tr h="724988">
                 <a:tc>
@@ -4414,7 +4438,7 @@
                     <a:p>
                       <a:pPr algn="l"/>
                       <a:r>
-                        <a:rPr b="1" sz="1300">
+                        <a:rPr sz="1300" b="1">
                           <a:solidFill>
                             <a:srgbClr val="FFFFFF"/>
                           </a:solidFill>
@@ -4436,7 +4460,7 @@
                     <a:p>
                       <a:pPr algn="l"/>
                       <a:r>
-                        <a:rPr b="1" sz="1300">
+                        <a:rPr sz="1300" b="1">
                           <a:solidFill>
                             <a:srgbClr val="FFFFFF"/>
                           </a:solidFill>
@@ -4458,7 +4482,7 @@
                     <a:p>
                       <a:pPr algn="l"/>
                       <a:r>
-                        <a:rPr b="1" sz="1300">
+                        <a:rPr sz="1300" b="1">
                           <a:solidFill>
                             <a:srgbClr val="FFFFFF"/>
                           </a:solidFill>
@@ -4473,6 +4497,11 @@
                     </a:solidFill>
                   </a:tcPr>
                 </a:tc>
+                <a:extLst>
+                  <a:ext uri="{0D108BD9-81ED-4DB2-BD59-A6C34878D82A}">
+                    <a16:rowId xmlns:a16="http://schemas.microsoft.com/office/drawing/2014/main" val="10000"/>
+                  </a:ext>
+                </a:extLst>
               </a:tr>
               <a:tr h="724988">
                 <a:tc>
@@ -4538,6 +4567,11 @@
                     </a:solidFill>
                   </a:tcPr>
                 </a:tc>
+                <a:extLst>
+                  <a:ext uri="{0D108BD9-81ED-4DB2-BD59-A6C34878D82A}">
+                    <a16:rowId xmlns:a16="http://schemas.microsoft.com/office/drawing/2014/main" val="10001"/>
+                  </a:ext>
+                </a:extLst>
               </a:tr>
               <a:tr h="724988">
                 <a:tc>
@@ -4603,6 +4637,11 @@
                     </a:solidFill>
                   </a:tcPr>
                 </a:tc>
+                <a:extLst>
+                  <a:ext uri="{0D108BD9-81ED-4DB2-BD59-A6C34878D82A}">
+                    <a16:rowId xmlns:a16="http://schemas.microsoft.com/office/drawing/2014/main" val="10002"/>
+                  </a:ext>
+                </a:extLst>
               </a:tr>
               <a:tr h="724988">
                 <a:tc>
@@ -4668,6 +4707,11 @@
                     </a:solidFill>
                   </a:tcPr>
                 </a:tc>
+                <a:extLst>
+                  <a:ext uri="{0D108BD9-81ED-4DB2-BD59-A6C34878D82A}">
+                    <a16:rowId xmlns:a16="http://schemas.microsoft.com/office/drawing/2014/main" val="10003"/>
+                  </a:ext>
+                </a:extLst>
               </a:tr>
               <a:tr h="724988">
                 <a:tc>
@@ -4733,6 +4777,11 @@
                     </a:solidFill>
                   </a:tcPr>
                 </a:tc>
+                <a:extLst>
+                  <a:ext uri="{0D108BD9-81ED-4DB2-BD59-A6C34878D82A}">
+                    <a16:rowId xmlns:a16="http://schemas.microsoft.com/office/drawing/2014/main" val="10004"/>
+                  </a:ext>
+                </a:extLst>
               </a:tr>
               <a:tr h="724988">
                 <a:tc>
@@ -4798,6 +4847,11 @@
                     </a:solidFill>
                   </a:tcPr>
                 </a:tc>
+                <a:extLst>
+                  <a:ext uri="{0D108BD9-81ED-4DB2-BD59-A6C34878D82A}">
+                    <a16:rowId xmlns:a16="http://schemas.microsoft.com/office/drawing/2014/main" val="10005"/>
+                  </a:ext>
+                </a:extLst>
               </a:tr>
               <a:tr h="724992">
                 <a:tc>
@@ -4863,6 +4917,11 @@
                     </a:solidFill>
                   </a:tcPr>
                 </a:tc>
+                <a:extLst>
+                  <a:ext uri="{0D108BD9-81ED-4DB2-BD59-A6C34878D82A}">
+                    <a16:rowId xmlns:a16="http://schemas.microsoft.com/office/drawing/2014/main" val="10006"/>
+                  </a:ext>
+                </a:extLst>
               </a:tr>
             </a:tbl>
           </a:graphicData>
@@ -4877,7 +4936,7 @@
 </file>
 
 <file path=ppt/slides/slide13.xml><?xml version="1.0" encoding="utf-8"?>
-<p:sld xmlns:a="http://schemas.openxmlformats.org/drawingml/2006/main" xmlns:p="http://schemas.openxmlformats.org/presentationml/2006/main" xmlns:r="http://schemas.openxmlformats.org/officeDocument/2006/relationships">
+<p:sld xmlns:a="http://schemas.openxmlformats.org/drawingml/2006/main" xmlns:r="http://schemas.openxmlformats.org/officeDocument/2006/relationships" xmlns:p="http://schemas.openxmlformats.org/presentationml/2006/main">
   <p:cSld>
     <p:spTree>
       <p:nvGrpSpPr>
@@ -4885,7 +4944,14 @@
         <p:cNvGrpSpPr/>
         <p:nvPr/>
       </p:nvGrpSpPr>
-      <p:grpSpPr/>
+      <p:grpSpPr>
+        <a:xfrm>
+          <a:off x="0" y="0"/>
+          <a:ext cx="0" cy="0"/>
+          <a:chOff x="0" y="0"/>
+          <a:chExt cx="0" cy="0"/>
+        </a:xfrm>
+      </p:grpSpPr>
       <p:sp>
         <p:nvSpPr>
           <p:cNvPr id="2" name="Rectangle 1"/>
@@ -4927,6 +4993,7 @@
           <a:lstStyle/>
           <a:p>
             <a:pPr algn="ctr"/>
+            <a:endParaRPr/>
           </a:p>
         </p:txBody>
       </p:sp>
@@ -5040,6 +5107,7 @@
           <a:lstStyle/>
           <a:p>
             <a:pPr algn="ctr"/>
+            <a:endParaRPr/>
           </a:p>
         </p:txBody>
       </p:sp>
@@ -5081,9 +5149,6 @@
               </a:rPr>
               <a:t>▸ Backend: get_account_feature_matrix() downloads config-audit.csv from NetStorage, parses rows into property × feature columns</a:t>
             </a:r>
-            <a:r>
-              <a:t/>
-            </a:r>
           </a:p>
           <a:p>
             <a:pPr algn="l">
@@ -5102,9 +5167,6 @@
               </a:rPr>
               <a:t>▸ Frontend: runFeatureMatrixJob() streams progress via SSE while the CSV downloads/parses server-side</a:t>
             </a:r>
-            <a:r>
-              <a:t/>
-            </a:r>
           </a:p>
           <a:p>
             <a:pPr algn="l">
@@ -5123,9 +5185,6 @@
               </a:rPr>
               <a:t>▸ Multi-select property filter + per-column value filters (checkbox dropdown) combine client-side over the already-fetched rows</a:t>
             </a:r>
-            <a:r>
-              <a:t/>
-            </a:r>
           </a:p>
           <a:p>
             <a:pPr algn="l">
@@ -5144,9 +5203,6 @@
               </a:rPr>
               <a:t>▸ Deep-link support: /featureMatrix/:propIdOrFeature pre-selects a property OR pre-filters a feature column to "Enabled" — used by HealthWidgetLink and cross-links from other pages</a:t>
             </a:r>
-            <a:r>
-              <a:t/>
-            </a:r>
           </a:p>
           <a:p>
             <a:pPr algn="l">
@@ -5165,9 +5221,6 @@
               </a:rPr>
               <a:t>▸ Summary variant aggregates Enabled/Disabled totals + per-column breakdowns for a pie chart</a:t>
             </a:r>
-            <a:r>
-              <a:t/>
-            </a:r>
           </a:p>
           <a:p>
             <a:pPr algn="l">
@@ -5186,9 +5239,6 @@
               </a:rPr>
               <a:t>▸ ScoreCard variant regroups by feature name → property count, with an expandable raw-JSON view for power users/debugging</a:t>
             </a:r>
-            <a:r>
-              <a:t/>
-            </a:r>
           </a:p>
           <a:p>
             <a:pPr algn="l">
@@ -5206,9 +5256,6 @@
                 </a:solidFill>
               </a:rPr>
               <a:t>▸ "Download CSV" link re-downloads the exact same file NetStorage served (no caching — always fresh)</a:t>
-            </a:r>
-            <a:r>
-              <a:t/>
             </a:r>
           </a:p>
         </p:txBody>
@@ -5222,7 +5269,7 @@
 </file>
 
 <file path=ppt/slides/slide14.xml><?xml version="1.0" encoding="utf-8"?>
-<p:sld xmlns:a="http://schemas.openxmlformats.org/drawingml/2006/main" xmlns:p="http://schemas.openxmlformats.org/presentationml/2006/main" xmlns:r="http://schemas.openxmlformats.org/officeDocument/2006/relationships">
+<p:sld xmlns:a="http://schemas.openxmlformats.org/drawingml/2006/main" xmlns:r="http://schemas.openxmlformats.org/officeDocument/2006/relationships" xmlns:p="http://schemas.openxmlformats.org/presentationml/2006/main">
   <p:cSld>
     <p:spTree>
       <p:nvGrpSpPr>
@@ -5230,7 +5277,14 @@
         <p:cNvGrpSpPr/>
         <p:nvPr/>
       </p:nvGrpSpPr>
-      <p:grpSpPr/>
+      <p:grpSpPr>
+        <a:xfrm>
+          <a:off x="0" y="0"/>
+          <a:ext cx="0" cy="0"/>
+          <a:chOff x="0" y="0"/>
+          <a:chExt cx="0" cy="0"/>
+        </a:xfrm>
+      </p:grpSpPr>
       <p:sp>
         <p:nvSpPr>
           <p:cNvPr id="2" name="Rectangle 1"/>
@@ -5272,6 +5326,7 @@
           <a:lstStyle/>
           <a:p>
             <a:pPr algn="ctr"/>
+            <a:endParaRPr/>
           </a:p>
         </p:txBody>
       </p:sp>
@@ -5385,6 +5440,7 @@
           <a:lstStyle/>
           <a:p>
             <a:pPr algn="ctr"/>
+            <a:endParaRPr/>
           </a:p>
         </p:txBody>
       </p:sp>
@@ -5426,9 +5482,6 @@
               </a:rPr>
               <a:t>▸ Cost-control design: live CrUX/PSI lookups are expensive, so this feature only tests the top 10 hostnames by 7-day edge hits (from the Traffic Matrix CSV) instead of every hostname</a:t>
             </a:r>
-            <a:r>
-              <a:t/>
-            </a:r>
           </a:p>
           <a:p>
             <a:pPr algn="l">
@@ -5447,9 +5500,6 @@
               </a:rPr>
               <a:t>▸ get_hostname_core_web_vitals(): tries Chrome UX Report (CrUX) records:queryRecord first (real user field data)</a:t>
             </a:r>
-            <a:r>
-              <a:t/>
-            </a:r>
           </a:p>
           <a:p>
             <a:pPr algn="l">
@@ -5468,9 +5518,6 @@
               </a:rPr>
               <a:t>▸ On CrUX 404 (insufficient real-user traffic) → falls back to PageSpeed Insights runPagespeed (synthetic Lighthouse lab run, mobile strategy)</a:t>
             </a:r>
-            <a:r>
-              <a:t/>
-            </a:r>
           </a:p>
           <a:p>
             <a:pPr algn="l">
@@ -5489,9 +5536,6 @@
               </a:rPr>
               <a:t>▸ Metrics: LCP, INP, CLS — each classified good / needs-improvement / poor against Google's published thresholds</a:t>
             </a:r>
-            <a:r>
-              <a:t/>
-            </a:r>
           </a:p>
           <a:p>
             <a:pPr algn="l">
@@ -5510,9 +5554,6 @@
               </a:rPr>
               <a:t>▸ Gotcha we hit in production: CrUX returns LCP/INP percentiles as numbers but CLS as a numeric STRING — _coerce_metric_value() safely float()-casts every metric instead of assuming type</a:t>
             </a:r>
-            <a:r>
-              <a:t/>
-            </a:r>
           </a:p>
           <a:p>
             <a:pPr algn="l">
@@ -5531,9 +5572,6 @@
               </a:rPr>
               <a:t>▸ Hostnames are fetched concurrently via a ThreadPoolExecutor (default 5 workers) with live progress logged per hostname</a:t>
             </a:r>
-            <a:r>
-              <a:t/>
-            </a:r>
           </a:p>
           <a:p>
             <a:pPr algn="l">
@@ -5551,9 +5589,6 @@
                 </a:solidFill>
               </a:rPr>
               <a:t>▸ History endpoint (queryHistoryRecord) is fetched best-effort for the trend line chart; failures there don't fail the whole request</a:t>
-            </a:r>
-            <a:r>
-              <a:t/>
             </a:r>
           </a:p>
         </p:txBody>
@@ -5567,7 +5602,7 @@
 </file>
 
 <file path=ppt/slides/slide15.xml><?xml version="1.0" encoding="utf-8"?>
-<p:sld xmlns:a="http://schemas.openxmlformats.org/drawingml/2006/main" xmlns:p="http://schemas.openxmlformats.org/presentationml/2006/main" xmlns:r="http://schemas.openxmlformats.org/officeDocument/2006/relationships">
+<p:sld xmlns:a="http://schemas.openxmlformats.org/drawingml/2006/main" xmlns:r="http://schemas.openxmlformats.org/officeDocument/2006/relationships" xmlns:p="http://schemas.openxmlformats.org/presentationml/2006/main">
   <p:cSld>
     <p:spTree>
       <p:nvGrpSpPr>
@@ -5575,7 +5610,14 @@
         <p:cNvGrpSpPr/>
         <p:nvPr/>
       </p:nvGrpSpPr>
-      <p:grpSpPr/>
+      <p:grpSpPr>
+        <a:xfrm>
+          <a:off x="0" y="0"/>
+          <a:ext cx="0" cy="0"/>
+          <a:chOff x="0" y="0"/>
+          <a:chExt cx="0" cy="0"/>
+        </a:xfrm>
+      </p:grpSpPr>
       <p:sp>
         <p:nvSpPr>
           <p:cNvPr id="2" name="Rectangle 1"/>
@@ -5617,6 +5659,7 @@
           <a:lstStyle/>
           <a:p>
             <a:pPr algn="ctr"/>
+            <a:endParaRPr/>
           </a:p>
         </p:txBody>
       </p:sp>
@@ -5730,6 +5773,7 @@
           <a:lstStyle/>
           <a:p>
             <a:pPr algn="ctr"/>
+            <a:endParaRPr/>
           </a:p>
         </p:txBody>
       </p:sp>
@@ -5771,9 +5815,6 @@
               </a:rPr>
               <a:t>▸ The only page NOT following the Matrix 3-page pattern — a single interactive chart page instead</a:t>
             </a:r>
-            <a:r>
-              <a:t/>
-            </a:r>
           </a:p>
           <a:p>
             <a:pPr algn="l">
@@ -5792,9 +5833,6 @@
               </a:rPr>
               <a:t>▸ User picks a start/end date range + account name, then triggers a background job</a:t>
             </a:r>
-            <a:r>
-              <a:t/>
-            </a:r>
           </a:p>
           <a:p>
             <a:pPr algn="l">
@@ -5813,9 +5851,6 @@
               </a:rPr>
               <a:t>▸ Backend calls Grover's security-trends API (api.grover.akamai.com) with an X-API-Key header (X_API_KEY env var)</a:t>
             </a:r>
-            <a:r>
-              <a:t/>
-            </a:r>
           </a:p>
           <a:p>
             <a:pPr algn="l">
@@ -5834,9 +5869,6 @@
               </a:rPr>
               <a:t>▸ extract_security_trend_series() normalizes whatever shape the API returns (bare list, or wrapped in data/results/records/trends/series) into per-dimension time series, auto-detecting the date field from a candidate-key list</a:t>
             </a:r>
-            <a:r>
-              <a:t/>
-            </a:r>
           </a:p>
           <a:p>
             <a:pPr algn="l">
@@ -5855,9 +5887,6 @@
               </a:rPr>
               <a:t>▸ Same defensive numeric coercion pattern as CrUX: metric values may arrive as numeric strings</a:t>
             </a:r>
-            <a:r>
-              <a:t/>
-            </a:r>
           </a:p>
           <a:p>
             <a:pPr algn="l">
@@ -5875,9 +5904,6 @@
                 </a:solidFill>
               </a:rPr>
               <a:t>▸ Frontend renders each numeric dimension as a toggle-able line on SecurityTrendLineChart; unrecognized shapes still show the raw JSON so nothing is silently lost</a:t>
-            </a:r>
-            <a:r>
-              <a:t/>
             </a:r>
           </a:p>
         </p:txBody>
@@ -5891,7 +5917,7 @@
 </file>
 
 <file path=ppt/slides/slide16.xml><?xml version="1.0" encoding="utf-8"?>
-<p:sld xmlns:a="http://schemas.openxmlformats.org/drawingml/2006/main" xmlns:p="http://schemas.openxmlformats.org/presentationml/2006/main" xmlns:r="http://schemas.openxmlformats.org/officeDocument/2006/relationships">
+<p:sld xmlns:a="http://schemas.openxmlformats.org/drawingml/2006/main" xmlns:r="http://schemas.openxmlformats.org/officeDocument/2006/relationships" xmlns:p="http://schemas.openxmlformats.org/presentationml/2006/main">
   <p:cSld>
     <p:spTree>
       <p:nvGrpSpPr>
@@ -5899,7 +5925,14 @@
         <p:cNvGrpSpPr/>
         <p:nvPr/>
       </p:nvGrpSpPr>
-      <p:grpSpPr/>
+      <p:grpSpPr>
+        <a:xfrm>
+          <a:off x="0" y="0"/>
+          <a:ext cx="0" cy="0"/>
+          <a:chOff x="0" y="0"/>
+          <a:chExt cx="0" cy="0"/>
+        </a:xfrm>
+      </p:grpSpPr>
       <p:sp>
         <p:nvSpPr>
           <p:cNvPr id="2" name="Rectangle 1"/>
@@ -5941,6 +5974,7 @@
           <a:lstStyle/>
           <a:p>
             <a:pPr algn="ctr"/>
+            <a:endParaRPr/>
           </a:p>
         </p:txBody>
       </p:sp>
@@ -6054,6 +6088,7 @@
           <a:lstStyle/>
           <a:p>
             <a:pPr algn="ctr"/>
+            <a:endParaRPr/>
           </a:p>
         </p:txBody>
       </p:sp>
@@ -6095,7 +6130,7 @@
           </a:fontRef>
         </p:style>
         <p:txBody>
-          <a:bodyPr rtlCol="0" anchor="ctr" wrap="square"/>
+          <a:bodyPr wrap="square" rtlCol="0" anchor="ctr"/>
           <a:lstStyle/>
           <a:p>
             <a:pPr algn="ctr"/>
@@ -6151,6 +6186,7 @@
           <a:lstStyle/>
           <a:p>
             <a:pPr algn="ctr"/>
+            <a:endParaRPr/>
           </a:p>
         </p:txBody>
       </p:sp>
@@ -6192,7 +6228,7 @@
           </a:fontRef>
         </p:style>
         <p:txBody>
-          <a:bodyPr rtlCol="0" anchor="ctr" wrap="square"/>
+          <a:bodyPr wrap="square" rtlCol="0" anchor="ctr"/>
           <a:lstStyle/>
           <a:p>
             <a:pPr algn="ctr"/>
@@ -6249,6 +6285,7 @@
           <a:lstStyle/>
           <a:p>
             <a:pPr algn="ctr"/>
+            <a:endParaRPr/>
           </a:p>
         </p:txBody>
       </p:sp>
@@ -6290,7 +6327,7 @@
           </a:fontRef>
         </p:style>
         <p:txBody>
-          <a:bodyPr rtlCol="0" anchor="ctr" wrap="square"/>
+          <a:bodyPr wrap="square" rtlCol="0" anchor="ctr"/>
           <a:lstStyle/>
           <a:p>
             <a:pPr algn="ctr"/>
@@ -6347,6 +6384,7 @@
           <a:lstStyle/>
           <a:p>
             <a:pPr algn="ctr"/>
+            <a:endParaRPr/>
           </a:p>
         </p:txBody>
       </p:sp>
@@ -6388,7 +6426,7 @@
           </a:fontRef>
         </p:style>
         <p:txBody>
-          <a:bodyPr rtlCol="0" anchor="ctr" wrap="square"/>
+          <a:bodyPr wrap="square" rtlCol="0" anchor="ctr"/>
           <a:lstStyle/>
           <a:p>
             <a:pPr algn="ctr"/>
@@ -6444,6 +6482,7 @@
           <a:lstStyle/>
           <a:p>
             <a:pPr algn="ctr"/>
+            <a:endParaRPr/>
           </a:p>
         </p:txBody>
       </p:sp>
@@ -6485,7 +6524,7 @@
           </a:fontRef>
         </p:style>
         <p:txBody>
-          <a:bodyPr rtlCol="0" anchor="ctr" wrap="square"/>
+          <a:bodyPr wrap="square" rtlCol="0" anchor="ctr"/>
           <a:lstStyle/>
           <a:p>
             <a:pPr algn="ctr"/>
@@ -6540,9 +6579,6 @@
               </a:rPr>
               <a:t>▸ Job (job_manager.py): tracks status (running/completed/failed), percent, message history, and a list of subscriber Queues</a:t>
             </a:r>
-            <a:r>
-              <a:t/>
-            </a:r>
           </a:p>
           <a:p>
             <a:pPr algn="l">
@@ -6561,9 +6597,6 @@
               </a:rPr>
               <a:t>▸ Every .log() call appends to history AND pushes to any live subscribers — new SSE connections get instant replay of everything so far</a:t>
             </a:r>
-            <a:r>
-              <a:t/>
-            </a:r>
           </a:p>
           <a:p>
             <a:pPr algn="l">
@@ -6582,9 +6615,6 @@
               </a:rPr>
               <a:t>▸ Client-side runJobWithRetry() (sseJobClient.ts) is the single retry engine used by ALL six Matrix families: auto-retries the whole start+stream sequence on 404/connection failure with exponential backoff (capped at 15s)</a:t>
             </a:r>
-            <a:r>
-              <a:t/>
-            </a:r>
           </a:p>
           <a:p>
             <a:pPr algn="l">
@@ -6603,9 +6633,6 @@
               </a:rPr>
               <a:t>▸ Why 404 matters: jobs live in memory only — a backend restart mid-scan loses in-flight jobs, so the client transparently restarts the job rather than getting stuck</a:t>
             </a:r>
-            <a:r>
-              <a:t/>
-            </a:r>
           </a:p>
           <a:p>
             <a:pPr algn="l">
@@ -6623,9 +6650,6 @@
                 </a:solidFill>
               </a:rPr>
               <a:t>▸ Every Matrix feature also exposes a synchronous, non-SSE JSON variant of summary/scoreCard endpoints for simple direct consumption</a:t>
-            </a:r>
-            <a:r>
-              <a:t/>
             </a:r>
           </a:p>
         </p:txBody>
@@ -6639,7 +6663,7 @@
 </file>
 
 <file path=ppt/slides/slide17.xml><?xml version="1.0" encoding="utf-8"?>
-<p:sld xmlns:a="http://schemas.openxmlformats.org/drawingml/2006/main" xmlns:p="http://schemas.openxmlformats.org/presentationml/2006/main" xmlns:r="http://schemas.openxmlformats.org/officeDocument/2006/relationships">
+<p:sld xmlns:a="http://schemas.openxmlformats.org/drawingml/2006/main" xmlns:r="http://schemas.openxmlformats.org/officeDocument/2006/relationships" xmlns:p="http://schemas.openxmlformats.org/presentationml/2006/main">
   <p:cSld>
     <p:spTree>
       <p:nvGrpSpPr>
@@ -6647,7 +6671,14 @@
         <p:cNvGrpSpPr/>
         <p:nvPr/>
       </p:nvGrpSpPr>
-      <p:grpSpPr/>
+      <p:grpSpPr>
+        <a:xfrm>
+          <a:off x="0" y="0"/>
+          <a:ext cx="0" cy="0"/>
+          <a:chOff x="0" y="0"/>
+          <a:chExt cx="0" cy="0"/>
+        </a:xfrm>
+      </p:grpSpPr>
       <p:sp>
         <p:nvSpPr>
           <p:cNvPr id="2" name="Rectangle 1"/>
@@ -6689,6 +6720,7 @@
           <a:lstStyle/>
           <a:p>
             <a:pPr algn="ctr"/>
+            <a:endParaRPr/>
           </a:p>
         </p:txBody>
       </p:sp>
@@ -6806,7 +6838,7 @@
 </file>
 
 <file path=ppt/slides/slide18.xml><?xml version="1.0" encoding="utf-8"?>
-<p:sld xmlns:a="http://schemas.openxmlformats.org/drawingml/2006/main" xmlns:p="http://schemas.openxmlformats.org/presentationml/2006/main" xmlns:r="http://schemas.openxmlformats.org/officeDocument/2006/relationships">
+<p:sld xmlns:a="http://schemas.openxmlformats.org/drawingml/2006/main" xmlns:r="http://schemas.openxmlformats.org/officeDocument/2006/relationships" xmlns:p="http://schemas.openxmlformats.org/presentationml/2006/main">
   <p:cSld>
     <p:spTree>
       <p:nvGrpSpPr>
@@ -6814,7 +6846,14 @@
         <p:cNvGrpSpPr/>
         <p:nvPr/>
       </p:nvGrpSpPr>
-      <p:grpSpPr/>
+      <p:grpSpPr>
+        <a:xfrm>
+          <a:off x="0" y="0"/>
+          <a:ext cx="0" cy="0"/>
+          <a:chOff x="0" y="0"/>
+          <a:chExt cx="0" cy="0"/>
+        </a:xfrm>
+      </p:grpSpPr>
       <p:sp>
         <p:nvSpPr>
           <p:cNvPr id="2" name="Rectangle 1"/>
@@ -6856,6 +6895,7 @@
           <a:lstStyle/>
           <a:p>
             <a:pPr algn="ctr"/>
+            <a:endParaRPr/>
           </a:p>
         </p:txBody>
       </p:sp>
@@ -6969,6 +7009,7 @@
           <a:lstStyle/>
           <a:p>
             <a:pPr algn="ctr"/>
+            <a:endParaRPr/>
           </a:p>
         </p:txBody>
       </p:sp>
@@ -7010,9 +7051,6 @@
               </a:rPr>
               <a:t>▸ Problem it replaced: every page had a free-text "Archive(s):" box, plus every Matrix page had ITS OWN separately-typed "Context (NS base path):" box — easy to get out of sync, and the value never carried over between pages</a:t>
             </a:r>
-            <a:r>
-              <a:t/>
-            </a:r>
           </a:p>
           <a:p>
             <a:pPr algn="l">
@@ -7031,9 +7069,6 @@
               </a:rPr>
               <a:t>▸ New behavior: one searchable dropdown/combobox in the header (DashboardLayout), fed by the REAL list of archive folders in NetStorage</a:t>
             </a:r>
-            <a:r>
-              <a:t/>
-            </a:r>
           </a:p>
           <a:p>
             <a:pPr algn="l">
@@ -7052,9 +7087,6 @@
               </a:rPr>
               <a:t>▸ Selecting an archive is now a single global action that persists across the entire app — Summary, Account Detail, and all 18 Matrix/Summary/ScoreCard pages automatically inherit it</a:t>
             </a:r>
-            <a:r>
-              <a:t/>
-            </a:r>
           </a:p>
           <a:p>
             <a:pPr algn="l">
@@ -7073,9 +7105,6 @@
               </a:rPr>
               <a:t>▸ Default value is LIVE (staticSiteContent) until the user explicitly picks a snapshot</a:t>
             </a:r>
-            <a:r>
-              <a:t/>
-            </a:r>
           </a:p>
           <a:p>
             <a:pPr algn="l">
@@ -7094,9 +7123,6 @@
               </a:rPr>
               <a:t>▸ "Context (NS base path):" on every Matrix page is now READ-ONLY — it always mirrors the global Archive(s) selection; users only ever change it in one place</a:t>
             </a:r>
-            <a:r>
-              <a:t/>
-            </a:r>
           </a:p>
           <a:p>
             <a:pPr algn="l">
@@ -7114,9 +7140,6 @@
                 </a:solidFill>
               </a:rPr>
               <a:t>▸ CSV/JSON fetch logic itself was intentionally left untouched — this feature only changes WHERE the context value comes from, not how it's used to fetch data</a:t>
-            </a:r>
-            <a:r>
-              <a:t/>
             </a:r>
           </a:p>
         </p:txBody>
@@ -7130,7 +7153,7 @@
 </file>
 
 <file path=ppt/slides/slide19.xml><?xml version="1.0" encoding="utf-8"?>
-<p:sld xmlns:a="http://schemas.openxmlformats.org/drawingml/2006/main" xmlns:p="http://schemas.openxmlformats.org/presentationml/2006/main" xmlns:r="http://schemas.openxmlformats.org/officeDocument/2006/relationships">
+<p:sld xmlns:a="http://schemas.openxmlformats.org/drawingml/2006/main" xmlns:r="http://schemas.openxmlformats.org/officeDocument/2006/relationships" xmlns:p="http://schemas.openxmlformats.org/presentationml/2006/main">
   <p:cSld>
     <p:spTree>
       <p:nvGrpSpPr>
@@ -7138,7 +7161,14 @@
         <p:cNvGrpSpPr/>
         <p:nvPr/>
       </p:nvGrpSpPr>
-      <p:grpSpPr/>
+      <p:grpSpPr>
+        <a:xfrm>
+          <a:off x="0" y="0"/>
+          <a:ext cx="0" cy="0"/>
+          <a:chOff x="0" y="0"/>
+          <a:chExt cx="0" cy="0"/>
+        </a:xfrm>
+      </p:grpSpPr>
       <p:sp>
         <p:nvSpPr>
           <p:cNvPr id="2" name="Rectangle 1"/>
@@ -7180,6 +7210,7 @@
           <a:lstStyle/>
           <a:p>
             <a:pPr algn="ctr"/>
+            <a:endParaRPr/>
           </a:p>
         </p:txBody>
       </p:sp>
@@ -7293,6 +7324,7 @@
           <a:lstStyle/>
           <a:p>
             <a:pPr algn="ctr"/>
+            <a:endParaRPr/>
           </a:p>
         </p:txBody>
       </p:sp>
@@ -7334,7 +7366,7 @@
           </a:fontRef>
         </p:style>
         <p:txBody>
-          <a:bodyPr rtlCol="0" anchor="ctr" wrap="square"/>
+          <a:bodyPr wrap="square" rtlCol="0" anchor="ctr"/>
           <a:lstStyle/>
           <a:p>
             <a:pPr algn="ctr"/>
@@ -7390,6 +7422,7 @@
           <a:lstStyle/>
           <a:p>
             <a:pPr algn="ctr"/>
+            <a:endParaRPr/>
           </a:p>
         </p:txBody>
       </p:sp>
@@ -7431,7 +7464,7 @@
           </a:fontRef>
         </p:style>
         <p:txBody>
-          <a:bodyPr rtlCol="0" anchor="ctr" wrap="square"/>
+          <a:bodyPr wrap="square" rtlCol="0" anchor="ctr"/>
           <a:lstStyle/>
           <a:p>
             <a:pPr algn="ctr"/>
@@ -7487,6 +7520,7 @@
           <a:lstStyle/>
           <a:p>
             <a:pPr algn="ctr"/>
+            <a:endParaRPr/>
           </a:p>
         </p:txBody>
       </p:sp>
@@ -7528,7 +7562,7 @@
           </a:fontRef>
         </p:style>
         <p:txBody>
-          <a:bodyPr rtlCol="0" anchor="ctr" wrap="square"/>
+          <a:bodyPr wrap="square" rtlCol="0" anchor="ctr"/>
           <a:lstStyle/>
           <a:p>
             <a:pPr algn="ctr"/>
@@ -7584,6 +7618,7 @@
           <a:lstStyle/>
           <a:p>
             <a:pPr algn="ctr"/>
+            <a:endParaRPr/>
           </a:p>
         </p:txBody>
       </p:sp>
@@ -7625,7 +7660,7 @@
           </a:fontRef>
         </p:style>
         <p:txBody>
-          <a:bodyPr rtlCol="0" anchor="ctr" wrap="square"/>
+          <a:bodyPr wrap="square" rtlCol="0" anchor="ctr"/>
           <a:lstStyle/>
           <a:p>
             <a:pPr algn="ctr"/>
@@ -7681,6 +7716,7 @@
           <a:lstStyle/>
           <a:p>
             <a:pPr algn="ctr"/>
+            <a:endParaRPr/>
           </a:p>
         </p:txBody>
       </p:sp>
@@ -7722,7 +7758,7 @@
           </a:fontRef>
         </p:style>
         <p:txBody>
-          <a:bodyPr rtlCol="0" anchor="ctr" wrap="square"/>
+          <a:bodyPr wrap="square" rtlCol="0" anchor="ctr"/>
           <a:lstStyle/>
           <a:p>
             <a:pPr algn="ctr"/>
@@ -7776,9 +7812,6 @@
               </a:rPr>
               <a:t>▸ ArchiveProvider wraps &lt;Routes&gt; (inside BrowserRouter) → survives client-side navigation without re-fetching or resetting</a:t>
             </a:r>
-            <a:r>
-              <a:t/>
-            </a:r>
           </a:p>
           <a:p>
             <a:pPr algn="l">
@@ -7797,9 +7830,6 @@
               </a:rPr>
               <a:t>▸ State also mirrors to localStorage (survives full page reloads, e.g. the account-search full-navigation flow) and to the current route's ?archive= query param (shareable URLs)</a:t>
             </a:r>
-            <a:r>
-              <a:t/>
-            </a:r>
           </a:p>
           <a:p>
             <a:pPr algn="l">
@@ -7818,9 +7848,6 @@
               </a:rPr>
               <a:t>▸ Every Matrix/Summary/ScoreCard page just calls useArchive() and reads contextPath instead of maintaining its own local state — 17 pages refactored to this one pattern</a:t>
             </a:r>
-            <a:r>
-              <a:t/>
-            </a:r>
           </a:p>
           <a:p>
             <a:pPr algn="l">
@@ -7838,9 +7865,6 @@
                 </a:solidFill>
               </a:rPr>
               <a:t>▸ Backend: list_ns_archive_folders() lists CPCODE/archive via the NetStorage "dir" action, returns ["archive/20260901", ...] newest-first</a:t>
-            </a:r>
-            <a:r>
-              <a:t/>
             </a:r>
           </a:p>
         </p:txBody>
@@ -7854,7 +7878,7 @@
 </file>
 
 <file path=ppt/slides/slide2.xml><?xml version="1.0" encoding="utf-8"?>
-<p:sld xmlns:a="http://schemas.openxmlformats.org/drawingml/2006/main" xmlns:p="http://schemas.openxmlformats.org/presentationml/2006/main" xmlns:r="http://schemas.openxmlformats.org/officeDocument/2006/relationships">
+<p:sld xmlns:a="http://schemas.openxmlformats.org/drawingml/2006/main" xmlns:r="http://schemas.openxmlformats.org/officeDocument/2006/relationships" xmlns:p="http://schemas.openxmlformats.org/presentationml/2006/main">
   <p:cSld>
     <p:spTree>
       <p:nvGrpSpPr>
@@ -7862,7 +7886,14 @@
         <p:cNvGrpSpPr/>
         <p:nvPr/>
       </p:nvGrpSpPr>
-      <p:grpSpPr/>
+      <p:grpSpPr>
+        <a:xfrm>
+          <a:off x="0" y="0"/>
+          <a:ext cx="0" cy="0"/>
+          <a:chOff x="0" y="0"/>
+          <a:chExt cx="0" cy="0"/>
+        </a:xfrm>
+      </p:grpSpPr>
       <p:sp>
         <p:nvSpPr>
           <p:cNvPr id="2" name="Rectangle 1"/>
@@ -7904,6 +7935,7 @@
           <a:lstStyle/>
           <a:p>
             <a:pPr algn="ctr"/>
+            <a:endParaRPr/>
           </a:p>
         </p:txBody>
       </p:sp>
@@ -8017,6 +8049,7 @@
           <a:lstStyle/>
           <a:p>
             <a:pPr algn="ctr"/>
+            <a:endParaRPr/>
           </a:p>
         </p:txBody>
       </p:sp>
@@ -8058,9 +8091,6 @@
               </a:rPr>
               <a:t>▸ Product overview &amp; who this dashboard serves</a:t>
             </a:r>
-            <a:r>
-              <a:t/>
-            </a:r>
           </a:p>
           <a:p>
             <a:pPr algn="l">
@@ -8079,9 +8109,6 @@
               </a:rPr>
               <a:t>▸ Tech stack, repository layout &amp; architecture</a:t>
             </a:r>
-            <a:r>
-              <a:t/>
-            </a:r>
           </a:p>
           <a:p>
             <a:pPr algn="l">
@@ -8100,9 +8127,6 @@
               </a:rPr>
               <a:t>▸ Frontend walkthrough: Summary page, Account Detail page, and the "Matrix family"</a:t>
             </a:r>
-            <a:r>
-              <a:t/>
-            </a:r>
           </a:p>
           <a:p>
             <a:pPr algn="l">
@@ -8121,9 +8145,6 @@
               </a:rPr>
               <a:t>▸ Real-time background jobs (SSE) — how long-running scans stream progress to the UI</a:t>
             </a:r>
-            <a:r>
-              <a:t/>
-            </a:r>
           </a:p>
           <a:p>
             <a:pPr algn="l">
@@ -8142,9 +8163,6 @@
               </a:rPr>
               <a:t>▸ Deep dive: the new Archive(s) picker &amp; NetStorage snapshot browsing</a:t>
             </a:r>
-            <a:r>
-              <a:t/>
-            </a:r>
           </a:p>
           <a:p>
             <a:pPr algn="l">
@@ -8163,9 +8181,6 @@
               </a:rPr>
               <a:t>▸ NetStorage data flow — CP codes, LIVE vs archive paths, credentials</a:t>
             </a:r>
-            <a:r>
-              <a:t/>
-            </a:r>
           </a:p>
           <a:p>
             <a:pPr algn="l">
@@ -8184,9 +8199,6 @@
               </a:rPr>
               <a:t>▸ Other integrations: Google Sheets/Docs, Akamai identity/AppSec, CrUX/PSI, Grover</a:t>
             </a:r>
-            <a:r>
-              <a:t/>
-            </a:r>
           </a:p>
           <a:p>
             <a:pPr algn="l">
@@ -8205,9 +8217,6 @@
               </a:rPr>
               <a:t>▸ Environment configuration, Docker deployment &amp; CI/CD status</a:t>
             </a:r>
-            <a:r>
-              <a:t/>
-            </a:r>
           </a:p>
           <a:p>
             <a:pPr algn="l">
@@ -8225,9 +8234,6 @@
                 </a:solidFill>
               </a:rPr>
               <a:t>▸ Hands-on: how to add a brand-new Matrix feature</a:t>
-            </a:r>
-            <a:r>
-              <a:t/>
             </a:r>
           </a:p>
         </p:txBody>
@@ -8241,7 +8247,7 @@
 </file>
 
 <file path=ppt/slides/slide20.xml><?xml version="1.0" encoding="utf-8"?>
-<p:sld xmlns:a="http://schemas.openxmlformats.org/drawingml/2006/main" xmlns:p="http://schemas.openxmlformats.org/presentationml/2006/main" xmlns:r="http://schemas.openxmlformats.org/officeDocument/2006/relationships">
+<p:sld xmlns:a="http://schemas.openxmlformats.org/drawingml/2006/main" xmlns:r="http://schemas.openxmlformats.org/officeDocument/2006/relationships" xmlns:p="http://schemas.openxmlformats.org/presentationml/2006/main">
   <p:cSld>
     <p:spTree>
       <p:nvGrpSpPr>
@@ -8249,7 +8255,14 @@
         <p:cNvGrpSpPr/>
         <p:nvPr/>
       </p:nvGrpSpPr>
-      <p:grpSpPr/>
+      <p:grpSpPr>
+        <a:xfrm>
+          <a:off x="0" y="0"/>
+          <a:ext cx="0" cy="0"/>
+          <a:chOff x="0" y="0"/>
+          <a:chExt cx="0" cy="0"/>
+        </a:xfrm>
+      </p:grpSpPr>
       <p:sp>
         <p:nvSpPr>
           <p:cNvPr id="2" name="Rectangle 1"/>
@@ -8291,6 +8304,7 @@
           <a:lstStyle/>
           <a:p>
             <a:pPr algn="ctr"/>
+            <a:endParaRPr/>
           </a:p>
         </p:txBody>
       </p:sp>
@@ -8404,6 +8418,7 @@
           <a:lstStyle/>
           <a:p>
             <a:pPr algn="ctr"/>
+            <a:endParaRPr/>
           </a:p>
         </p:txBody>
       </p:sp>
@@ -8445,9 +8460,6 @@
               </a:rPr>
               <a:t>▸ Symptom: GET /api/dashboard/ns/archives returned an empty list with "NetStorage stat failed for '/CPCODE/archive': status=404, reason='Not Found'" — even though archive/20260810, /20260819, /20260901 clearly existed and were being used successfully for CSV/JSON fetches</a:t>
             </a:r>
-            <a:r>
-              <a:t/>
-            </a:r>
           </a:p>
           <a:p>
             <a:pPr algn="l">
@@ -8466,9 +8478,6 @@
               </a:rPr>
               <a:t>▸ Root cause: NetStorage's stat action only returns information about the exact object requested. Directories like /CPCODE/archive are "implicit" — they have no real directory-marker object, they're inferred purely from the paths of files underneath them — so stat() 404s on them</a:t>
             </a:r>
-            <a:r>
-              <a:t/>
-            </a:r>
           </a:p>
           <a:p>
             <a:pPr algn="l">
@@ -8487,9 +8496,6 @@
               </a:rPr>
               <a:t>▸ The dir (or list) action, by contrast, lists a path's children by prefix and works fine on implicit directories</a:t>
             </a:r>
-            <a:r>
-              <a:t/>
-            </a:r>
           </a:p>
           <a:p>
             <a:pPr algn="l">
@@ -8508,9 +8514,6 @@
               </a:rPr>
               <a:t>▸ Fix: switched netstorage.stat(remote_dir) → netstorage.dir(remote_dir) in list_ns_archive_folders()</a:t>
             </a:r>
-            <a:r>
-              <a:t/>
-            </a:r>
           </a:p>
           <a:p>
             <a:pPr algn="l">
@@ -8529,9 +8532,6 @@
               </a:rPr>
               <a:t>▸ Verified live against the real NetStorage account: confirmed real layout is /CPCODE/archive/&lt;YYYYMMDD&gt;/... alongside /CPCODE/staticSiteContent/... (LIVE) and /CPCODE/demo/...</a:t>
             </a:r>
-            <a:r>
-              <a:t/>
-            </a:r>
           </a:p>
           <a:p>
             <a:pPr algn="l">
@@ -8549,9 +8549,6 @@
                 </a:solidFill>
               </a:rPr>
               <a:t>▸ Takeaway for the team: when scripting against NetStorage, use dir/list to enumerate a folder's contents — reserve stat for confirming a single known object exists</a:t>
-            </a:r>
-            <a:r>
-              <a:t/>
             </a:r>
           </a:p>
         </p:txBody>
@@ -8565,7 +8562,7 @@
 </file>
 
 <file path=ppt/slides/slide21.xml><?xml version="1.0" encoding="utf-8"?>
-<p:sld xmlns:a="http://schemas.openxmlformats.org/drawingml/2006/main" xmlns:p="http://schemas.openxmlformats.org/presentationml/2006/main" xmlns:r="http://schemas.openxmlformats.org/officeDocument/2006/relationships">
+<p:sld xmlns:a="http://schemas.openxmlformats.org/drawingml/2006/main" xmlns:r="http://schemas.openxmlformats.org/officeDocument/2006/relationships" xmlns:p="http://schemas.openxmlformats.org/presentationml/2006/main">
   <p:cSld>
     <p:spTree>
       <p:nvGrpSpPr>
@@ -8573,7 +8570,14 @@
         <p:cNvGrpSpPr/>
         <p:nvPr/>
       </p:nvGrpSpPr>
-      <p:grpSpPr/>
+      <p:grpSpPr>
+        <a:xfrm>
+          <a:off x="0" y="0"/>
+          <a:ext cx="0" cy="0"/>
+          <a:chOff x="0" y="0"/>
+          <a:chExt cx="0" cy="0"/>
+        </a:xfrm>
+      </p:grpSpPr>
       <p:sp>
         <p:nvSpPr>
           <p:cNvPr id="2" name="Rectangle 1"/>
@@ -8615,6 +8619,7 @@
           <a:lstStyle/>
           <a:p>
             <a:pPr algn="ctr"/>
+            <a:endParaRPr/>
           </a:p>
         </p:txBody>
       </p:sp>
@@ -8732,7 +8737,7 @@
 </file>
 
 <file path=ppt/slides/slide22.xml><?xml version="1.0" encoding="utf-8"?>
-<p:sld xmlns:a="http://schemas.openxmlformats.org/drawingml/2006/main" xmlns:p="http://schemas.openxmlformats.org/presentationml/2006/main" xmlns:r="http://schemas.openxmlformats.org/officeDocument/2006/relationships">
+<p:sld xmlns:a="http://schemas.openxmlformats.org/drawingml/2006/main" xmlns:r="http://schemas.openxmlformats.org/officeDocument/2006/relationships" xmlns:p="http://schemas.openxmlformats.org/presentationml/2006/main">
   <p:cSld>
     <p:spTree>
       <p:nvGrpSpPr>
@@ -8740,7 +8745,14 @@
         <p:cNvGrpSpPr/>
         <p:nvPr/>
       </p:nvGrpSpPr>
-      <p:grpSpPr/>
+      <p:grpSpPr>
+        <a:xfrm>
+          <a:off x="0" y="0"/>
+          <a:ext cx="0" cy="0"/>
+          <a:chOff x="0" y="0"/>
+          <a:chExt cx="0" cy="0"/>
+        </a:xfrm>
+      </p:grpSpPr>
       <p:sp>
         <p:nvSpPr>
           <p:cNvPr id="2" name="Rectangle 1"/>
@@ -8782,6 +8794,7 @@
           <a:lstStyle/>
           <a:p>
             <a:pPr algn="ctr"/>
+            <a:endParaRPr/>
           </a:p>
         </p:txBody>
       </p:sp>
@@ -8895,6 +8908,7 @@
           <a:lstStyle/>
           <a:p>
             <a:pPr algn="ctr"/>
+            <a:endParaRPr/>
           </a:p>
         </p:txBody>
       </p:sp>
@@ -8936,9 +8950,6 @@
               </a:rPr>
               <a:t>▸ Every NetStorage object lives at /{NS_CP_CODE}/{base_path}/{relative_path}</a:t>
             </a:r>
-            <a:r>
-              <a:t/>
-            </a:r>
           </a:p>
           <a:p>
             <a:pPr algn="l">
@@ -8957,9 +8968,6 @@
               </a:rPr>
               <a:t>▸ NS_CP_CODE — the Akamai NetStorage CP code (account-specific numeric ID), e.g. 2052217</a:t>
             </a:r>
-            <a:r>
-              <a:t/>
-            </a:r>
           </a:p>
           <a:p>
             <a:pPr algn="l">
@@ -8978,9 +8986,6 @@
               </a:rPr>
               <a:t>▸ base_path — normally NS_BASE_PATH env var ("staticSiteContent" = the LIVE folder); can be OVERRIDDEN per-request by a "context" query param</a:t>
             </a:r>
-            <a:r>
-              <a:t/>
-            </a:r>
           </a:p>
           <a:p>
             <a:pPr algn="l">
@@ -8999,9 +9004,6 @@
               </a:rPr>
               <a:t>▸ Real top-level layout for this account (confirmed live): staticSiteContent/ (LIVE), archive/ (dated snapshots), demo/</a:t>
             </a:r>
-            <a:r>
-              <a:t/>
-            </a:r>
           </a:p>
           <a:p>
             <a:pPr algn="l">
@@ -9020,9 +9022,6 @@
               </a:rPr>
               <a:t>▸ context="archive/20260901" → base_path becomes "archive/20260901" for that one request only — nothing else in the app changes</a:t>
             </a:r>
-            <a:r>
-              <a:t/>
-            </a:r>
           </a:p>
           <a:p>
             <a:pPr algn="l">
@@ -9041,9 +9040,6 @@
               </a:rPr>
               <a:t>▸ context=None/empty ("" ) → falls back to NS_BASE_PATH (LIVE) — this is the default on every page until a user picks an archive</a:t>
             </a:r>
-            <a:r>
-              <a:t/>
-            </a:r>
           </a:p>
           <a:p>
             <a:pPr algn="l">
@@ -9061,9 +9057,6 @@
                 </a:solidFill>
               </a:rPr>
               <a:t>▸ This single override mechanism is what powers BOTH the old free-text box AND the new Archive(s) dropdown — the UI changed, the underlying fetch contract did not</a:t>
-            </a:r>
-            <a:r>
-              <a:t/>
             </a:r>
           </a:p>
         </p:txBody>
@@ -9077,7 +9070,7 @@
 </file>
 
 <file path=ppt/slides/slide23.xml><?xml version="1.0" encoding="utf-8"?>
-<p:sld xmlns:a="http://schemas.openxmlformats.org/drawingml/2006/main" xmlns:p="http://schemas.openxmlformats.org/presentationml/2006/main" xmlns:r="http://schemas.openxmlformats.org/officeDocument/2006/relationships">
+<p:sld xmlns:a="http://schemas.openxmlformats.org/drawingml/2006/main" xmlns:r="http://schemas.openxmlformats.org/officeDocument/2006/relationships" xmlns:p="http://schemas.openxmlformats.org/presentationml/2006/main">
   <p:cSld>
     <p:spTree>
       <p:nvGrpSpPr>
@@ -9085,7 +9078,14 @@
         <p:cNvGrpSpPr/>
         <p:nvPr/>
       </p:nvGrpSpPr>
-      <p:grpSpPr/>
+      <p:grpSpPr>
+        <a:xfrm>
+          <a:off x="0" y="0"/>
+          <a:ext cx="0" cy="0"/>
+          <a:chOff x="0" y="0"/>
+          <a:chExt cx="0" cy="0"/>
+        </a:xfrm>
+      </p:grpSpPr>
       <p:sp>
         <p:nvSpPr>
           <p:cNvPr id="2" name="Rectangle 1"/>
@@ -9127,6 +9127,7 @@
           <a:lstStyle/>
           <a:p>
             <a:pPr algn="ctr"/>
+            <a:endParaRPr/>
           </a:p>
         </p:txBody>
       </p:sp>
@@ -9240,6 +9241,7 @@
           <a:lstStyle/>
           <a:p>
             <a:pPr algn="ctr"/>
+            <a:endParaRPr/>
           </a:p>
         </p:txBody>
       </p:sp>
@@ -9281,9 +9283,6 @@
               </a:rPr>
               <a:t>▸ download_csv_from_netstorage(remote_path, local_path) — the one low-level function every fetch goes through: builds an akamai.netstorage.Netstorage client from env creds, calls .download(), verifies the file actually landed on disk</a:t>
             </a:r>
-            <a:r>
-              <a:t/>
-            </a:r>
           </a:p>
           <a:p>
             <a:pPr algn="l">
@@ -9302,9 +9301,6 @@
               </a:rPr>
               <a:t>▸ Rich diagnostics on failure: captures status code, reason, response headers/body snippet, and adds a hint for common codes (404 → wrong path/CP code, 403 → bad credentials/ACL)</a:t>
             </a:r>
-            <a:r>
-              <a:t/>
-            </a:r>
           </a:p>
           <a:p>
             <a:pPr algn="l">
@@ -9323,9 +9319,6 @@
               </a:rPr>
               <a:t>▸ resolve_report_csv_path() — per-account CSV reports (config-audit.csv, traffic CSVs, etc.), keyed by csvAccountDir from account_id_map</a:t>
             </a:r>
-            <a:r>
-              <a:t/>
-            </a:r>
           </a:p>
           <a:p>
             <a:pPr algn="l">
@@ -9344,9 +9337,6 @@
               </a:rPr>
               <a:t>▸ download_ns_json() — JSON snapshots (all_accounts_summary.json, account_&lt;dir&gt;_summary.json, account_mapping.json)</a:t>
             </a:r>
-            <a:r>
-              <a:t/>
-            </a:r>
           </a:p>
           <a:p>
             <a:pPr algn="l">
@@ -9365,9 +9355,6 @@
               </a:rPr>
               <a:t>▸ Design decision: NO local caching for report downloads — every request re-downloads fresh from NetStorage, so the dashboard never shows stale data (account-mapping and archive-list ARE cached briefly: 30s / 60s TTL, since they change rarely)</a:t>
             </a:r>
-            <a:r>
-              <a:t/>
-            </a:r>
           </a:p>
           <a:p>
             <a:pPr algn="l">
@@ -9385,9 +9372,6 @@
                 </a:solidFill>
               </a:rPr>
               <a:t>▸ Every one of the 6 Matrix families' job functions calls resolve_report_csv_path() with its own relative CSV path constant</a:t>
-            </a:r>
-            <a:r>
-              <a:t/>
             </a:r>
           </a:p>
         </p:txBody>
@@ -9401,7 +9385,7 @@
 </file>
 
 <file path=ppt/slides/slide24.xml><?xml version="1.0" encoding="utf-8"?>
-<p:sld xmlns:a="http://schemas.openxmlformats.org/drawingml/2006/main" xmlns:p="http://schemas.openxmlformats.org/presentationml/2006/main" xmlns:r="http://schemas.openxmlformats.org/officeDocument/2006/relationships">
+<p:sld xmlns:a="http://schemas.openxmlformats.org/drawingml/2006/main" xmlns:r="http://schemas.openxmlformats.org/officeDocument/2006/relationships" xmlns:p="http://schemas.openxmlformats.org/presentationml/2006/main">
   <p:cSld>
     <p:spTree>
       <p:nvGrpSpPr>
@@ -9409,7 +9393,14 @@
         <p:cNvGrpSpPr/>
         <p:nvPr/>
       </p:nvGrpSpPr>
-      <p:grpSpPr/>
+      <p:grpSpPr>
+        <a:xfrm>
+          <a:off x="0" y="0"/>
+          <a:ext cx="0" cy="0"/>
+          <a:chOff x="0" y="0"/>
+          <a:chExt cx="0" cy="0"/>
+        </a:xfrm>
+      </p:grpSpPr>
       <p:sp>
         <p:nvSpPr>
           <p:cNvPr id="2" name="Rectangle 1"/>
@@ -9451,6 +9442,7 @@
           <a:lstStyle/>
           <a:p>
             <a:pPr algn="ctr"/>
+            <a:endParaRPr/>
           </a:p>
         </p:txBody>
       </p:sp>
@@ -9564,6 +9556,7 @@
           <a:lstStyle/>
           <a:p>
             <a:pPr algn="ctr"/>
+            <a:endParaRPr/>
           </a:p>
         </p:txBody>
       </p:sp>
@@ -9586,9 +9579,27 @@
                 <a:tableStyleId>{5C22544A-7EE6-4342-B048-85BDC9FD1C3A}</a:tableStyleId>
               </a:tblPr>
               <a:tblGrid>
-                <a:gridCol w="3136392"/>
-                <a:gridCol w="5376672"/>
-                <a:gridCol w="2688336"/>
+                <a:gridCol w="3136392">
+                  <a:extLst>
+                    <a:ext uri="{9D8B030D-6E8A-4147-A177-3AD203B41FA5}">
+                      <a16:colId xmlns:a16="http://schemas.microsoft.com/office/drawing/2014/main" val="20000"/>
+                    </a:ext>
+                  </a:extLst>
+                </a:gridCol>
+                <a:gridCol w="5376672">
+                  <a:extLst>
+                    <a:ext uri="{9D8B030D-6E8A-4147-A177-3AD203B41FA5}">
+                      <a16:colId xmlns:a16="http://schemas.microsoft.com/office/drawing/2014/main" val="20001"/>
+                    </a:ext>
+                  </a:extLst>
+                </a:gridCol>
+                <a:gridCol w="2688336">
+                  <a:extLst>
+                    <a:ext uri="{9D8B030D-6E8A-4147-A177-3AD203B41FA5}">
+                      <a16:colId xmlns:a16="http://schemas.microsoft.com/office/drawing/2014/main" val="20002"/>
+                    </a:ext>
+                  </a:extLst>
+                </a:gridCol>
               </a:tblGrid>
               <a:tr h="845820">
                 <a:tc>
@@ -9598,7 +9609,7 @@
                     <a:p>
                       <a:pPr algn="l"/>
                       <a:r>
-                        <a:rPr b="1" sz="1300">
+                        <a:rPr sz="1300" b="1">
                           <a:solidFill>
                             <a:srgbClr val="FFFFFF"/>
                           </a:solidFill>
@@ -9620,7 +9631,7 @@
                     <a:p>
                       <a:pPr algn="l"/>
                       <a:r>
-                        <a:rPr b="1" sz="1300">
+                        <a:rPr sz="1300" b="1">
                           <a:solidFill>
                             <a:srgbClr val="FFFFFF"/>
                           </a:solidFill>
@@ -9642,7 +9653,7 @@
                     <a:p>
                       <a:pPr algn="l"/>
                       <a:r>
-                        <a:rPr b="1" sz="1300">
+                        <a:rPr sz="1300" b="1">
                           <a:solidFill>
                             <a:srgbClr val="FFFFFF"/>
                           </a:solidFill>
@@ -9657,6 +9668,11 @@
                     </a:solidFill>
                   </a:tcPr>
                 </a:tc>
+                <a:extLst>
+                  <a:ext uri="{0D108BD9-81ED-4DB2-BD59-A6C34878D82A}">
+                    <a16:rowId xmlns:a16="http://schemas.microsoft.com/office/drawing/2014/main" val="10000"/>
+                  </a:ext>
+                </a:extLst>
               </a:tr>
               <a:tr h="845820">
                 <a:tc>
@@ -9722,6 +9738,11 @@
                     </a:solidFill>
                   </a:tcPr>
                 </a:tc>
+                <a:extLst>
+                  <a:ext uri="{0D108BD9-81ED-4DB2-BD59-A6C34878D82A}">
+                    <a16:rowId xmlns:a16="http://schemas.microsoft.com/office/drawing/2014/main" val="10001"/>
+                  </a:ext>
+                </a:extLst>
               </a:tr>
               <a:tr h="845820">
                 <a:tc>
@@ -9787,6 +9808,11 @@
                     </a:solidFill>
                   </a:tcPr>
                 </a:tc>
+                <a:extLst>
+                  <a:ext uri="{0D108BD9-81ED-4DB2-BD59-A6C34878D82A}">
+                    <a16:rowId xmlns:a16="http://schemas.microsoft.com/office/drawing/2014/main" val="10002"/>
+                  </a:ext>
+                </a:extLst>
               </a:tr>
               <a:tr h="845820">
                 <a:tc>
@@ -9852,6 +9878,11 @@
                     </a:solidFill>
                   </a:tcPr>
                 </a:tc>
+                <a:extLst>
+                  <a:ext uri="{0D108BD9-81ED-4DB2-BD59-A6C34878D82A}">
+                    <a16:rowId xmlns:a16="http://schemas.microsoft.com/office/drawing/2014/main" val="10003"/>
+                  </a:ext>
+                </a:extLst>
               </a:tr>
               <a:tr h="845820">
                 <a:tc>
@@ -9917,6 +9948,11 @@
                     </a:solidFill>
                   </a:tcPr>
                 </a:tc>
+                <a:extLst>
+                  <a:ext uri="{0D108BD9-81ED-4DB2-BD59-A6C34878D82A}">
+                    <a16:rowId xmlns:a16="http://schemas.microsoft.com/office/drawing/2014/main" val="10004"/>
+                  </a:ext>
+                </a:extLst>
               </a:tr>
               <a:tr h="845820">
                 <a:tc>
@@ -9982,6 +10018,11 @@
                     </a:solidFill>
                   </a:tcPr>
                 </a:tc>
+                <a:extLst>
+                  <a:ext uri="{0D108BD9-81ED-4DB2-BD59-A6C34878D82A}">
+                    <a16:rowId xmlns:a16="http://schemas.microsoft.com/office/drawing/2014/main" val="10005"/>
+                  </a:ext>
+                </a:extLst>
               </a:tr>
             </a:tbl>
           </a:graphicData>
@@ -9996,7 +10037,7 @@
 </file>
 
 <file path=ppt/slides/slide25.xml><?xml version="1.0" encoding="utf-8"?>
-<p:sld xmlns:a="http://schemas.openxmlformats.org/drawingml/2006/main" xmlns:p="http://schemas.openxmlformats.org/presentationml/2006/main" xmlns:r="http://schemas.openxmlformats.org/officeDocument/2006/relationships">
+<p:sld xmlns:a="http://schemas.openxmlformats.org/drawingml/2006/main" xmlns:r="http://schemas.openxmlformats.org/officeDocument/2006/relationships" xmlns:p="http://schemas.openxmlformats.org/presentationml/2006/main">
   <p:cSld>
     <p:spTree>
       <p:nvGrpSpPr>
@@ -10004,7 +10045,14 @@
         <p:cNvGrpSpPr/>
         <p:nvPr/>
       </p:nvGrpSpPr>
-      <p:grpSpPr/>
+      <p:grpSpPr>
+        <a:xfrm>
+          <a:off x="0" y="0"/>
+          <a:ext cx="0" cy="0"/>
+          <a:chOff x="0" y="0"/>
+          <a:chExt cx="0" cy="0"/>
+        </a:xfrm>
+      </p:grpSpPr>
       <p:sp>
         <p:nvSpPr>
           <p:cNvPr id="2" name="Rectangle 1"/>
@@ -10046,6 +10094,7 @@
           <a:lstStyle/>
           <a:p>
             <a:pPr algn="ctr"/>
+            <a:endParaRPr/>
           </a:p>
         </p:txBody>
       </p:sp>
@@ -10159,6 +10208,7 @@
           <a:lstStyle/>
           <a:p>
             <a:pPr algn="ctr"/>
+            <a:endParaRPr/>
           </a:p>
         </p:txBody>
       </p:sp>
@@ -10200,9 +10250,6 @@
               </a:rPr>
               <a:t>▸ NS_HOSTNAME — NetStorage upload domain (e.g. mysitelab-nsu.akamaihd.net)</a:t>
             </a:r>
-            <a:r>
-              <a:t/>
-            </a:r>
           </a:p>
           <a:p>
             <a:pPr algn="l">
@@ -10221,9 +10268,6 @@
               </a:rPr>
               <a:t>▸ NS_KEYNAME / NS_KEY — NetStorage API key credentials (HMAC-signed requests, never sent to the browser)</a:t>
             </a:r>
-            <a:r>
-              <a:t/>
-            </a:r>
           </a:p>
           <a:p>
             <a:pPr algn="l">
@@ -10242,9 +10286,6 @@
               </a:rPr>
               <a:t>▸ NS_CP_CODE — the CP code that scopes every remote path</a:t>
             </a:r>
-            <a:r>
-              <a:t/>
-            </a:r>
           </a:p>
           <a:p>
             <a:pPr algn="l">
@@ -10263,9 +10304,6 @@
               </a:rPr>
               <a:t>▸ NS_BASE_PATH — the LIVE base path segment (staticSiteContent)</a:t>
             </a:r>
-            <a:r>
-              <a:t/>
-            </a:r>
           </a:p>
           <a:p>
             <a:pPr algn="l">
@@ -10284,9 +10322,6 @@
               </a:rPr>
               <a:t>▸ All read via get_ns_config() — a single function, so there's one place to see every NetStorage-related setting</a:t>
             </a:r>
-            <a:r>
-              <a:t/>
-            </a:r>
           </a:p>
           <a:p>
             <a:pPr algn="l">
@@ -10304,9 +10339,6 @@
                 </a:solidFill>
               </a:rPr>
               <a:t>▸ Set only in .env.server (backend, server-side) — never in the frontend's .env, and never committed to git</a:t>
-            </a:r>
-            <a:r>
-              <a:t/>
             </a:r>
           </a:p>
         </p:txBody>
@@ -10320,7 +10352,7 @@
 </file>
 
 <file path=ppt/slides/slide26.xml><?xml version="1.0" encoding="utf-8"?>
-<p:sld xmlns:a="http://schemas.openxmlformats.org/drawingml/2006/main" xmlns:p="http://schemas.openxmlformats.org/presentationml/2006/main" xmlns:r="http://schemas.openxmlformats.org/officeDocument/2006/relationships">
+<p:sld xmlns:a="http://schemas.openxmlformats.org/drawingml/2006/main" xmlns:r="http://schemas.openxmlformats.org/officeDocument/2006/relationships" xmlns:p="http://schemas.openxmlformats.org/presentationml/2006/main">
   <p:cSld>
     <p:spTree>
       <p:nvGrpSpPr>
@@ -10328,7 +10360,14 @@
         <p:cNvGrpSpPr/>
         <p:nvPr/>
       </p:nvGrpSpPr>
-      <p:grpSpPr/>
+      <p:grpSpPr>
+        <a:xfrm>
+          <a:off x="0" y="0"/>
+          <a:ext cx="0" cy="0"/>
+          <a:chOff x="0" y="0"/>
+          <a:chExt cx="0" cy="0"/>
+        </a:xfrm>
+      </p:grpSpPr>
       <p:sp>
         <p:nvSpPr>
           <p:cNvPr id="2" name="Rectangle 1"/>
@@ -10370,6 +10409,7 @@
           <a:lstStyle/>
           <a:p>
             <a:pPr algn="ctr"/>
+            <a:endParaRPr/>
           </a:p>
         </p:txBody>
       </p:sp>
@@ -10483,6 +10523,7 @@
           <a:lstStyle/>
           <a:p>
             <a:pPr algn="ctr"/>
+            <a:endParaRPr/>
           </a:p>
         </p:txBody>
       </p:sp>
@@ -10524,9 +10565,6 @@
               </a:rPr>
               <a:t>▸ Summary &amp; Account Detail pages: NetStorage (preferred, live/archive) → Google Sheets (fetchSummaryDashboardData / fetchAccountDashboardData) → bundled mock data, with a visible "Data source" banner explaining which path served the page</a:t>
             </a:r>
-            <a:r>
-              <a:t/>
-            </a:r>
           </a:p>
           <a:p>
             <a:pPr algn="l">
@@ -10545,9 +10583,6 @@
               </a:rPr>
               <a:t>▸ Account mapping (load_account_id_map): NetStorage account_mapping.json → local backend/account_id_map.json fallback</a:t>
             </a:r>
-            <a:r>
-              <a:t/>
-            </a:r>
           </a:p>
           <a:p>
             <a:pPr algn="l">
@@ -10566,9 +10601,6 @@
               </a:rPr>
               <a:t>▸ Perf Matrix: CrUX field data → PageSpeed Insights synthetic lab fallback on 404 (per-hostname, not page-level)</a:t>
             </a:r>
-            <a:r>
-              <a:t/>
-            </a:r>
           </a:p>
           <a:p>
             <a:pPr algn="l">
@@ -10587,9 +10619,6 @@
               </a:rPr>
               <a:t>▸ Every NetStorage call wraps failures into a structured {source, data, error} response so the frontend can render a clear message instead of a blank page</a:t>
             </a:r>
-            <a:r>
-              <a:t/>
-            </a:r>
           </a:p>
           <a:p>
             <a:pPr algn="l">
@@ -10607,9 +10636,6 @@
                 </a:solidFill>
               </a:rPr>
               <a:t>▸ This layered design means the demo/dev experience (no NetStorage creds) still works end-to-end against mock data — useful for onboarding new engineers before they get production credentials</a:t>
-            </a:r>
-            <a:r>
-              <a:t/>
             </a:r>
           </a:p>
         </p:txBody>
@@ -10623,7 +10649,7 @@
 </file>
 
 <file path=ppt/slides/slide27.xml><?xml version="1.0" encoding="utf-8"?>
-<p:sld xmlns:a="http://schemas.openxmlformats.org/drawingml/2006/main" xmlns:p="http://schemas.openxmlformats.org/presentationml/2006/main" xmlns:r="http://schemas.openxmlformats.org/officeDocument/2006/relationships">
+<p:sld xmlns:a="http://schemas.openxmlformats.org/drawingml/2006/main" xmlns:r="http://schemas.openxmlformats.org/officeDocument/2006/relationships" xmlns:p="http://schemas.openxmlformats.org/presentationml/2006/main">
   <p:cSld>
     <p:spTree>
       <p:nvGrpSpPr>
@@ -10631,7 +10657,14 @@
         <p:cNvGrpSpPr/>
         <p:nvPr/>
       </p:nvGrpSpPr>
-      <p:grpSpPr/>
+      <p:grpSpPr>
+        <a:xfrm>
+          <a:off x="0" y="0"/>
+          <a:ext cx="0" cy="0"/>
+          <a:chOff x="0" y="0"/>
+          <a:chExt cx="0" cy="0"/>
+        </a:xfrm>
+      </p:grpSpPr>
       <p:sp>
         <p:nvSpPr>
           <p:cNvPr id="2" name="Rectangle 1"/>
@@ -10673,6 +10706,7 @@
           <a:lstStyle/>
           <a:p>
             <a:pPr algn="ctr"/>
+            <a:endParaRPr/>
           </a:p>
         </p:txBody>
       </p:sp>
@@ -10786,6 +10820,7 @@
           <a:lstStyle/>
           <a:p>
             <a:pPr algn="ctr"/>
+            <a:endParaRPr/>
           </a:p>
         </p:txBody>
       </p:sp>
@@ -10808,9 +10843,27 @@
                 <a:tableStyleId>{5C22544A-7EE6-4342-B048-85BDC9FD1C3A}</a:tableStyleId>
               </a:tblPr>
               <a:tblGrid>
-                <a:gridCol w="3136392"/>
-                <a:gridCol w="5376672"/>
-                <a:gridCol w="2688336"/>
+                <a:gridCol w="3136392">
+                  <a:extLst>
+                    <a:ext uri="{9D8B030D-6E8A-4147-A177-3AD203B41FA5}">
+                      <a16:colId xmlns:a16="http://schemas.microsoft.com/office/drawing/2014/main" val="20000"/>
+                    </a:ext>
+                  </a:extLst>
+                </a:gridCol>
+                <a:gridCol w="5376672">
+                  <a:extLst>
+                    <a:ext uri="{9D8B030D-6E8A-4147-A177-3AD203B41FA5}">
+                      <a16:colId xmlns:a16="http://schemas.microsoft.com/office/drawing/2014/main" val="20001"/>
+                    </a:ext>
+                  </a:extLst>
+                </a:gridCol>
+                <a:gridCol w="2688336">
+                  <a:extLst>
+                    <a:ext uri="{9D8B030D-6E8A-4147-A177-3AD203B41FA5}">
+                      <a16:colId xmlns:a16="http://schemas.microsoft.com/office/drawing/2014/main" val="20002"/>
+                    </a:ext>
+                  </a:extLst>
+                </a:gridCol>
               </a:tblGrid>
               <a:tr h="845820">
                 <a:tc>
@@ -10820,7 +10873,7 @@
                     <a:p>
                       <a:pPr algn="l"/>
                       <a:r>
-                        <a:rPr b="1" sz="1300">
+                        <a:rPr sz="1300" b="1">
                           <a:solidFill>
                             <a:srgbClr val="FFFFFF"/>
                           </a:solidFill>
@@ -10842,7 +10895,7 @@
                     <a:p>
                       <a:pPr algn="l"/>
                       <a:r>
-                        <a:rPr b="1" sz="1300">
+                        <a:rPr sz="1300" b="1">
                           <a:solidFill>
                             <a:srgbClr val="FFFFFF"/>
                           </a:solidFill>
@@ -10864,7 +10917,7 @@
                     <a:p>
                       <a:pPr algn="l"/>
                       <a:r>
-                        <a:rPr b="1" sz="1300">
+                        <a:rPr sz="1300" b="1">
                           <a:solidFill>
                             <a:srgbClr val="FFFFFF"/>
                           </a:solidFill>
@@ -10879,6 +10932,11 @@
                     </a:solidFill>
                   </a:tcPr>
                 </a:tc>
+                <a:extLst>
+                  <a:ext uri="{0D108BD9-81ED-4DB2-BD59-A6C34878D82A}">
+                    <a16:rowId xmlns:a16="http://schemas.microsoft.com/office/drawing/2014/main" val="10000"/>
+                  </a:ext>
+                </a:extLst>
               </a:tr>
               <a:tr h="845820">
                 <a:tc>
@@ -10944,6 +11002,11 @@
                     </a:solidFill>
                   </a:tcPr>
                 </a:tc>
+                <a:extLst>
+                  <a:ext uri="{0D108BD9-81ED-4DB2-BD59-A6C34878D82A}">
+                    <a16:rowId xmlns:a16="http://schemas.microsoft.com/office/drawing/2014/main" val="10001"/>
+                  </a:ext>
+                </a:extLst>
               </a:tr>
               <a:tr h="845820">
                 <a:tc>
@@ -11009,6 +11072,11 @@
                     </a:solidFill>
                   </a:tcPr>
                 </a:tc>
+                <a:extLst>
+                  <a:ext uri="{0D108BD9-81ED-4DB2-BD59-A6C34878D82A}">
+                    <a16:rowId xmlns:a16="http://schemas.microsoft.com/office/drawing/2014/main" val="10002"/>
+                  </a:ext>
+                </a:extLst>
               </a:tr>
               <a:tr h="845820">
                 <a:tc>
@@ -11074,6 +11142,11 @@
                     </a:solidFill>
                   </a:tcPr>
                 </a:tc>
+                <a:extLst>
+                  <a:ext uri="{0D108BD9-81ED-4DB2-BD59-A6C34878D82A}">
+                    <a16:rowId xmlns:a16="http://schemas.microsoft.com/office/drawing/2014/main" val="10003"/>
+                  </a:ext>
+                </a:extLst>
               </a:tr>
               <a:tr h="845820">
                 <a:tc>
@@ -11139,6 +11212,11 @@
                     </a:solidFill>
                   </a:tcPr>
                 </a:tc>
+                <a:extLst>
+                  <a:ext uri="{0D108BD9-81ED-4DB2-BD59-A6C34878D82A}">
+                    <a16:rowId xmlns:a16="http://schemas.microsoft.com/office/drawing/2014/main" val="10004"/>
+                  </a:ext>
+                </a:extLst>
               </a:tr>
               <a:tr h="845820">
                 <a:tc>
@@ -11204,6 +11282,11 @@
                     </a:solidFill>
                   </a:tcPr>
                 </a:tc>
+                <a:extLst>
+                  <a:ext uri="{0D108BD9-81ED-4DB2-BD59-A6C34878D82A}">
+                    <a16:rowId xmlns:a16="http://schemas.microsoft.com/office/drawing/2014/main" val="10005"/>
+                  </a:ext>
+                </a:extLst>
               </a:tr>
             </a:tbl>
           </a:graphicData>
@@ -11218,7 +11301,7 @@
 </file>
 
 <file path=ppt/slides/slide28.xml><?xml version="1.0" encoding="utf-8"?>
-<p:sld xmlns:a="http://schemas.openxmlformats.org/drawingml/2006/main" xmlns:p="http://schemas.openxmlformats.org/presentationml/2006/main" xmlns:r="http://schemas.openxmlformats.org/officeDocument/2006/relationships">
+<p:sld xmlns:a="http://schemas.openxmlformats.org/drawingml/2006/main" xmlns:r="http://schemas.openxmlformats.org/officeDocument/2006/relationships" xmlns:p="http://schemas.openxmlformats.org/presentationml/2006/main">
   <p:cSld>
     <p:spTree>
       <p:nvGrpSpPr>
@@ -11226,7 +11309,14 @@
         <p:cNvGrpSpPr/>
         <p:nvPr/>
       </p:nvGrpSpPr>
-      <p:grpSpPr/>
+      <p:grpSpPr>
+        <a:xfrm>
+          <a:off x="0" y="0"/>
+          <a:ext cx="0" cy="0"/>
+          <a:chOff x="0" y="0"/>
+          <a:chExt cx="0" cy="0"/>
+        </a:xfrm>
+      </p:grpSpPr>
       <p:sp>
         <p:nvSpPr>
           <p:cNvPr id="2" name="Rectangle 1"/>
@@ -11268,6 +11358,7 @@
           <a:lstStyle/>
           <a:p>
             <a:pPr algn="ctr"/>
+            <a:endParaRPr/>
           </a:p>
         </p:txBody>
       </p:sp>
@@ -11381,6 +11472,7 @@
           <a:lstStyle/>
           <a:p>
             <a:pPr algn="ctr"/>
+            <a:endParaRPr/>
           </a:p>
         </p:txBody>
       </p:sp>
@@ -11422,9 +11514,6 @@
               </a:rPr>
               <a:t>▸ Backend integration: backend/data_service.py using a Google service-account credential (GOOGLE_SERVICE_ACCOUNT_EMAIL / GOOGLE_PRIVATE_KEY / GOOGLE_SHEETS_SPREADSHEET_ID)</a:t>
             </a:r>
-            <a:r>
-              <a:t/>
-            </a:r>
           </a:p>
           <a:p>
             <a:pPr algn="l">
@@ -11443,9 +11532,6 @@
               </a:rPr>
               <a:t>▸ Browser-side alternative also exists (src/services/googleData.ts + VITE_GOOGLE_API_KEY) — NOT recommended for internal secrets, kept mainly for quick local prototyping</a:t>
             </a:r>
-            <a:r>
-              <a:t/>
-            </a:r>
           </a:p>
           <a:p>
             <a:pPr algn="l">
@@ -11464,9 +11550,6 @@
               </a:rPr>
               <a:t>▸ docId column (optional): when present, the linked Google Doc's text OVERRIDES the sheet cell value — lets non-engineers edit longer narrative text without touching the sheet</a:t>
             </a:r>
-            <a:r>
-              <a:t/>
-            </a:r>
           </a:p>
           <a:p>
             <a:pPr algn="l">
@@ -11485,9 +11568,6 @@
               </a:rPr>
               <a:t>▸ tone values are constrained to healthy / watch / risk / neutral and drive every colored badge in the UI via tone.ts</a:t>
             </a:r>
-            <a:r>
-              <a:t/>
-            </a:r>
           </a:p>
           <a:p>
             <a:pPr algn="l">
@@ -11505,9 +11585,6 @@
                 </a:solidFill>
               </a:rPr>
               <a:t>▸ This was the ORIGINAL data source before NetStorage was added — now serves purely as the fallback layer</a:t>
-            </a:r>
-            <a:r>
-              <a:t/>
             </a:r>
           </a:p>
         </p:txBody>
@@ -11521,7 +11598,7 @@
 </file>
 
 <file path=ppt/slides/slide29.xml><?xml version="1.0" encoding="utf-8"?>
-<p:sld xmlns:a="http://schemas.openxmlformats.org/drawingml/2006/main" xmlns:p="http://schemas.openxmlformats.org/presentationml/2006/main" xmlns:r="http://schemas.openxmlformats.org/officeDocument/2006/relationships">
+<p:sld xmlns:a="http://schemas.openxmlformats.org/drawingml/2006/main" xmlns:r="http://schemas.openxmlformats.org/officeDocument/2006/relationships" xmlns:p="http://schemas.openxmlformats.org/presentationml/2006/main">
   <p:cSld>
     <p:spTree>
       <p:nvGrpSpPr>
@@ -11529,7 +11606,14 @@
         <p:cNvGrpSpPr/>
         <p:nvPr/>
       </p:nvGrpSpPr>
-      <p:grpSpPr/>
+      <p:grpSpPr>
+        <a:xfrm>
+          <a:off x="0" y="0"/>
+          <a:ext cx="0" cy="0"/>
+          <a:chOff x="0" y="0"/>
+          <a:chExt cx="0" cy="0"/>
+        </a:xfrm>
+      </p:grpSpPr>
       <p:sp>
         <p:nvSpPr>
           <p:cNvPr id="2" name="Rectangle 1"/>
@@ -11571,6 +11655,7 @@
           <a:lstStyle/>
           <a:p>
             <a:pPr algn="ctr"/>
+            <a:endParaRPr/>
           </a:p>
         </p:txBody>
       </p:sp>
@@ -11684,6 +11769,7 @@
           <a:lstStyle/>
           <a:p>
             <a:pPr algn="ctr"/>
+            <a:endParaRPr/>
           </a:p>
         </p:txBody>
       </p:sp>
@@ -11725,9 +11811,6 @@
               </a:rPr>
               <a:t>▸ The ONE feature in the app that calls live Akamai management APIs directly, using EdgeGrid authentication (~/.edgerc)</a:t>
             </a:r>
-            <a:r>
-              <a:t/>
-            </a:r>
           </a:p>
           <a:p>
             <a:pPr algn="l">
@@ -11746,9 +11829,6 @@
               </a:rPr>
               <a:t>▸ create_akamai_session(): builds a requests.Session with EdgeGridAuth.from_edgerc(), scoped to EDGE_RC_SECTION</a:t>
             </a:r>
-            <a:r>
-              <a:t/>
-            </a:r>
           </a:p>
           <a:p>
             <a:pPr algn="l">
@@ -11767,9 +11847,6 @@
               </a:rPr>
               <a:t>▸ Step 1 — Identity API: GET identity-management/v3/api-clients/self/account-switch-keys?search={accountId} resolves an accountSwitchKey for the target account</a:t>
             </a:r>
-            <a:r>
-              <a:t/>
-            </a:r>
           </a:p>
           <a:p>
             <a:pPr algn="l">
@@ -11788,9 +11865,6 @@
               </a:rPr>
               <a:t>▸ resolve_account_switch_key(): handles 0/1/many matches, disambiguating on exact accountName match when needed</a:t>
             </a:r>
-            <a:r>
-              <a:t/>
-            </a:r>
           </a:p>
           <a:p>
             <a:pPr algn="l">
@@ -11809,9 +11883,6 @@
               </a:rPr>
               <a:t>▸ Step 2 — AppSec API: GET appsec/v1/hostname-coverage (with accountSwitchKey applied to every subsequent request) returns covered/not_covered/unknown per hostname, plus security config + policy names</a:t>
             </a:r>
-            <a:r>
-              <a:t/>
-            </a:r>
           </a:p>
           <a:p>
             <a:pPr algn="l">
@@ -11830,9 +11901,6 @@
               </a:rPr>
               <a:t>▸ Both calls are rate-limited (100 calls/60s) via the ratelimit package's @sleep_and_retry/@limits decorators</a:t>
             </a:r>
-            <a:r>
-              <a:t/>
-            </a:r>
           </a:p>
           <a:p>
             <a:pPr algn="l">
@@ -11850,9 +11918,6 @@
                 </a:solidFill>
               </a:rPr>
               <a:t>▸ Powers the Covered/Not Covered/Unknown counters on the Account Detail page's tool box header</a:t>
-            </a:r>
-            <a:r>
-              <a:t/>
             </a:r>
           </a:p>
         </p:txBody>
@@ -11866,7 +11931,7 @@
 </file>
 
 <file path=ppt/slides/slide3.xml><?xml version="1.0" encoding="utf-8"?>
-<p:sld xmlns:a="http://schemas.openxmlformats.org/drawingml/2006/main" xmlns:p="http://schemas.openxmlformats.org/presentationml/2006/main" xmlns:r="http://schemas.openxmlformats.org/officeDocument/2006/relationships">
+<p:sld xmlns:a="http://schemas.openxmlformats.org/drawingml/2006/main" xmlns:r="http://schemas.openxmlformats.org/officeDocument/2006/relationships" xmlns:p="http://schemas.openxmlformats.org/presentationml/2006/main">
   <p:cSld>
     <p:spTree>
       <p:nvGrpSpPr>
@@ -11874,7 +11939,14 @@
         <p:cNvGrpSpPr/>
         <p:nvPr/>
       </p:nvGrpSpPr>
-      <p:grpSpPr/>
+      <p:grpSpPr>
+        <a:xfrm>
+          <a:off x="0" y="0"/>
+          <a:ext cx="0" cy="0"/>
+          <a:chOff x="0" y="0"/>
+          <a:chExt cx="0" cy="0"/>
+        </a:xfrm>
+      </p:grpSpPr>
       <p:sp>
         <p:nvSpPr>
           <p:cNvPr id="2" name="Rectangle 1"/>
@@ -11916,6 +11988,7 @@
           <a:lstStyle/>
           <a:p>
             <a:pPr algn="ctr"/>
+            <a:endParaRPr/>
           </a:p>
         </p:txBody>
       </p:sp>
@@ -12029,6 +12102,7 @@
           <a:lstStyle/>
           <a:p>
             <a:pPr algn="ctr"/>
+            <a:endParaRPr/>
           </a:p>
         </p:txBody>
       </p:sp>
@@ -12070,9 +12144,6 @@
               </a:rPr>
               <a:t>▸ Internal stakeholder dashboard summarizing account health across Akamai-managed web properties</a:t>
             </a:r>
-            <a:r>
-              <a:t/>
-            </a:r>
           </a:p>
           <a:p>
             <a:pPr algn="l">
@@ -12091,9 +12162,6 @@
               </a:rPr>
               <a:t>▸ Started as a 2-page app (Summary + Account Detail) and grew into a full "health diagnosis" suite</a:t>
             </a:r>
-            <a:r>
-              <a:t/>
-            </a:r>
           </a:p>
           <a:p>
             <a:pPr algn="l">
@@ -12112,9 +12180,6 @@
               </a:rPr>
               <a:t>▸ Answers questions like: Is this account's traffic healthy? Are hostnames covered by security configs? How are Core Web Vitals trending? Which properties have risky feature configs?</a:t>
             </a:r>
-            <a:r>
-              <a:t/>
-            </a:r>
           </a:p>
           <a:p>
             <a:pPr algn="l">
@@ -12133,9 +12198,6 @@
               </a:rPr>
               <a:t>•  Summary Page — KPI strip, account list with renewal-risk/expansion signals, risk/opportunity panels</a:t>
             </a:r>
-            <a:r>
-              <a:t/>
-            </a:r>
           </a:p>
           <a:p>
             <a:pPr algn="l">
@@ -12154,9 +12216,6 @@
               </a:rPr>
               <a:t>•  Account Detail Page — hero metrics, highlights, recommended actions, and a "tool box" of health widgets</a:t>
             </a:r>
-            <a:r>
-              <a:t/>
-            </a:r>
           </a:p>
           <a:p>
             <a:pPr algn="l">
@@ -12175,9 +12234,6 @@
               </a:rPr>
               <a:t>•  Matrix pages — deep, filterable tables + summaries + scorecards per technical dimension (features, hostnames, traffic, performance, security)</a:t>
             </a:r>
-            <a:r>
-              <a:t/>
-            </a:r>
           </a:p>
           <a:p>
             <a:pPr algn="l">
@@ -12195,9 +12251,6 @@
                 </a:solidFill>
               </a:rPr>
               <a:t>▸ Audience: internal account teams / stakeholders, not end customers — no auth layer, deployed behind internal network access</a:t>
-            </a:r>
-            <a:r>
-              <a:t/>
             </a:r>
           </a:p>
         </p:txBody>
@@ -12211,7 +12264,7 @@
 </file>
 
 <file path=ppt/slides/slide30.xml><?xml version="1.0" encoding="utf-8"?>
-<p:sld xmlns:a="http://schemas.openxmlformats.org/drawingml/2006/main" xmlns:p="http://schemas.openxmlformats.org/presentationml/2006/main" xmlns:r="http://schemas.openxmlformats.org/officeDocument/2006/relationships">
+<p:sld xmlns:a="http://schemas.openxmlformats.org/drawingml/2006/main" xmlns:r="http://schemas.openxmlformats.org/officeDocument/2006/relationships" xmlns:p="http://schemas.openxmlformats.org/presentationml/2006/main">
   <p:cSld>
     <p:spTree>
       <p:nvGrpSpPr>
@@ -12219,7 +12272,14 @@
         <p:cNvGrpSpPr/>
         <p:nvPr/>
       </p:nvGrpSpPr>
-      <p:grpSpPr/>
+      <p:grpSpPr>
+        <a:xfrm>
+          <a:off x="0" y="0"/>
+          <a:ext cx="0" cy="0"/>
+          <a:chOff x="0" y="0"/>
+          <a:chExt cx="0" cy="0"/>
+        </a:xfrm>
+      </p:grpSpPr>
       <p:sp>
         <p:nvSpPr>
           <p:cNvPr id="2" name="Rectangle 1"/>
@@ -12261,6 +12321,7 @@
           <a:lstStyle/>
           <a:p>
             <a:pPr algn="ctr"/>
+            <a:endParaRPr/>
           </a:p>
         </p:txBody>
       </p:sp>
@@ -12374,6 +12435,7 @@
           <a:lstStyle/>
           <a:p>
             <a:pPr algn="ctr"/>
+            <a:endParaRPr/>
           </a:p>
         </p:txBody>
       </p:sp>
@@ -12396,9 +12458,27 @@
                 <a:tableStyleId>{5C22544A-7EE6-4342-B048-85BDC9FD1C3A}</a:tableStyleId>
               </a:tblPr>
               <a:tblGrid>
-                <a:gridCol w="4308230"/>
-                <a:gridCol w="1723292"/>
-                <a:gridCol w="5169876"/>
+                <a:gridCol w="4308230">
+                  <a:extLst>
+                    <a:ext uri="{9D8B030D-6E8A-4147-A177-3AD203B41FA5}">
+                      <a16:colId xmlns:a16="http://schemas.microsoft.com/office/drawing/2014/main" val="20000"/>
+                    </a:ext>
+                  </a:extLst>
+                </a:gridCol>
+                <a:gridCol w="1723292">
+                  <a:extLst>
+                    <a:ext uri="{9D8B030D-6E8A-4147-A177-3AD203B41FA5}">
+                      <a16:colId xmlns:a16="http://schemas.microsoft.com/office/drawing/2014/main" val="20001"/>
+                    </a:ext>
+                  </a:extLst>
+                </a:gridCol>
+                <a:gridCol w="5169876">
+                  <a:extLst>
+                    <a:ext uri="{9D8B030D-6E8A-4147-A177-3AD203B41FA5}">
+                      <a16:colId xmlns:a16="http://schemas.microsoft.com/office/drawing/2014/main" val="20002"/>
+                    </a:ext>
+                  </a:extLst>
+                </a:gridCol>
               </a:tblGrid>
               <a:tr h="563880">
                 <a:tc>
@@ -12408,7 +12488,7 @@
                     <a:p>
                       <a:pPr algn="l"/>
                       <a:r>
-                        <a:rPr b="1" sz="1200">
+                        <a:rPr sz="1200" b="1">
                           <a:solidFill>
                             <a:srgbClr val="FFFFFF"/>
                           </a:solidFill>
@@ -12430,7 +12510,7 @@
                     <a:p>
                       <a:pPr algn="l"/>
                       <a:r>
-                        <a:rPr b="1" sz="1200">
+                        <a:rPr sz="1200" b="1">
                           <a:solidFill>
                             <a:srgbClr val="FFFFFF"/>
                           </a:solidFill>
@@ -12452,7 +12532,7 @@
                     <a:p>
                       <a:pPr algn="l"/>
                       <a:r>
-                        <a:rPr b="1" sz="1200">
+                        <a:rPr sz="1200" b="1">
                           <a:solidFill>
                             <a:srgbClr val="FFFFFF"/>
                           </a:solidFill>
@@ -12467,6 +12547,11 @@
                     </a:solidFill>
                   </a:tcPr>
                 </a:tc>
+                <a:extLst>
+                  <a:ext uri="{0D108BD9-81ED-4DB2-BD59-A6C34878D82A}">
+                    <a16:rowId xmlns:a16="http://schemas.microsoft.com/office/drawing/2014/main" val="10000"/>
+                  </a:ext>
+                </a:extLst>
               </a:tr>
               <a:tr h="563880">
                 <a:tc>
@@ -12532,6 +12617,11 @@
                     </a:solidFill>
                   </a:tcPr>
                 </a:tc>
+                <a:extLst>
+                  <a:ext uri="{0D108BD9-81ED-4DB2-BD59-A6C34878D82A}">
+                    <a16:rowId xmlns:a16="http://schemas.microsoft.com/office/drawing/2014/main" val="10001"/>
+                  </a:ext>
+                </a:extLst>
               </a:tr>
               <a:tr h="563880">
                 <a:tc>
@@ -12597,6 +12687,11 @@
                     </a:solidFill>
                   </a:tcPr>
                 </a:tc>
+                <a:extLst>
+                  <a:ext uri="{0D108BD9-81ED-4DB2-BD59-A6C34878D82A}">
+                    <a16:rowId xmlns:a16="http://schemas.microsoft.com/office/drawing/2014/main" val="10002"/>
+                  </a:ext>
+                </a:extLst>
               </a:tr>
               <a:tr h="563880">
                 <a:tc>
@@ -12662,6 +12757,11 @@
                     </a:solidFill>
                   </a:tcPr>
                 </a:tc>
+                <a:extLst>
+                  <a:ext uri="{0D108BD9-81ED-4DB2-BD59-A6C34878D82A}">
+                    <a16:rowId xmlns:a16="http://schemas.microsoft.com/office/drawing/2014/main" val="10003"/>
+                  </a:ext>
+                </a:extLst>
               </a:tr>
               <a:tr h="563880">
                 <a:tc>
@@ -12727,6 +12827,11 @@
                     </a:solidFill>
                   </a:tcPr>
                 </a:tc>
+                <a:extLst>
+                  <a:ext uri="{0D108BD9-81ED-4DB2-BD59-A6C34878D82A}">
+                    <a16:rowId xmlns:a16="http://schemas.microsoft.com/office/drawing/2014/main" val="10004"/>
+                  </a:ext>
+                </a:extLst>
               </a:tr>
               <a:tr h="563880">
                 <a:tc>
@@ -12792,6 +12897,11 @@
                     </a:solidFill>
                   </a:tcPr>
                 </a:tc>
+                <a:extLst>
+                  <a:ext uri="{0D108BD9-81ED-4DB2-BD59-A6C34878D82A}">
+                    <a16:rowId xmlns:a16="http://schemas.microsoft.com/office/drawing/2014/main" val="10005"/>
+                  </a:ext>
+                </a:extLst>
               </a:tr>
               <a:tr h="563880">
                 <a:tc>
@@ -12857,6 +12967,11 @@
                     </a:solidFill>
                   </a:tcPr>
                 </a:tc>
+                <a:extLst>
+                  <a:ext uri="{0D108BD9-81ED-4DB2-BD59-A6C34878D82A}">
+                    <a16:rowId xmlns:a16="http://schemas.microsoft.com/office/drawing/2014/main" val="10006"/>
+                  </a:ext>
+                </a:extLst>
               </a:tr>
               <a:tr h="563880">
                 <a:tc>
@@ -12922,6 +13037,11 @@
                     </a:solidFill>
                   </a:tcPr>
                 </a:tc>
+                <a:extLst>
+                  <a:ext uri="{0D108BD9-81ED-4DB2-BD59-A6C34878D82A}">
+                    <a16:rowId xmlns:a16="http://schemas.microsoft.com/office/drawing/2014/main" val="10007"/>
+                  </a:ext>
+                </a:extLst>
               </a:tr>
               <a:tr h="563880">
                 <a:tc>
@@ -12987,6 +13107,11 @@
                     </a:solidFill>
                   </a:tcPr>
                 </a:tc>
+                <a:extLst>
+                  <a:ext uri="{0D108BD9-81ED-4DB2-BD59-A6C34878D82A}">
+                    <a16:rowId xmlns:a16="http://schemas.microsoft.com/office/drawing/2014/main" val="10008"/>
+                  </a:ext>
+                </a:extLst>
               </a:tr>
             </a:tbl>
           </a:graphicData>
@@ -13001,7 +13126,7 @@
 </file>
 
 <file path=ppt/slides/slide31.xml><?xml version="1.0" encoding="utf-8"?>
-<p:sld xmlns:a="http://schemas.openxmlformats.org/drawingml/2006/main" xmlns:p="http://schemas.openxmlformats.org/presentationml/2006/main" xmlns:r="http://schemas.openxmlformats.org/officeDocument/2006/relationships">
+<p:sld xmlns:a="http://schemas.openxmlformats.org/drawingml/2006/main" xmlns:r="http://schemas.openxmlformats.org/officeDocument/2006/relationships" xmlns:p="http://schemas.openxmlformats.org/presentationml/2006/main">
   <p:cSld>
     <p:spTree>
       <p:nvGrpSpPr>
@@ -13009,7 +13134,14 @@
         <p:cNvGrpSpPr/>
         <p:nvPr/>
       </p:nvGrpSpPr>
-      <p:grpSpPr/>
+      <p:grpSpPr>
+        <a:xfrm>
+          <a:off x="0" y="0"/>
+          <a:ext cx="0" cy="0"/>
+          <a:chOff x="0" y="0"/>
+          <a:chExt cx="0" cy="0"/>
+        </a:xfrm>
+      </p:grpSpPr>
       <p:sp>
         <p:nvSpPr>
           <p:cNvPr id="2" name="Rectangle 1"/>
@@ -13051,6 +13183,7 @@
           <a:lstStyle/>
           <a:p>
             <a:pPr algn="ctr"/>
+            <a:endParaRPr/>
           </a:p>
         </p:txBody>
       </p:sp>
@@ -13164,6 +13297,7 @@
           <a:lstStyle/>
           <a:p>
             <a:pPr algn="ctr"/>
+            <a:endParaRPr/>
           </a:p>
         </p:txBody>
       </p:sp>
@@ -13205,9 +13339,6 @@
               </a:rPr>
               <a:t>▸ One FastAPI app, one router file (main.py) — all business logic lives in data_service.py, main.py just wires HTTP → functions</a:t>
             </a:r>
-            <a:r>
-              <a:t/>
-            </a:r>
           </a:p>
           <a:p>
             <a:pPr algn="l">
@@ -13226,9 +13357,6 @@
               </a:rPr>
               <a:t>▸ APP_BASE_PATH env var is normalized once (normalize_base_path) and prefixed onto every route via API_PREFIX — supports both root-hosted ("/") and prefixed cloud hosting ("/account-health") from the same code</a:t>
             </a:r>
-            <a:r>
-              <a:t/>
-            </a:r>
           </a:p>
           <a:p>
             <a:pPr algn="l">
@@ -13247,9 +13375,6 @@
               </a:rPr>
               <a:t>▸ CORS restricted to a single FRONTEND_ORIGIN (default http://localhost:5173) — not a wildcard</a:t>
             </a:r>
-            <a:r>
-              <a:t/>
-            </a:r>
           </a:p>
           <a:p>
             <a:pPr algn="l">
@@ -13268,9 +13393,6 @@
               </a:rPr>
               <a:t>▸ Per-Matrix-feature endpoint quartet: POST .../jobs (start, SSE-driven) · GET .../jobs/{id}/events (SSE stream) · GET .../summary or /scoreCard (synchronous JSON, no job) · GET .../download (raw CSV as file attachment)</a:t>
             </a:r>
-            <a:r>
-              <a:t/>
-            </a:r>
           </a:p>
           <a:p>
             <a:pPr algn="l">
@@ -13289,9 +13411,6 @@
               </a:rPr>
               <a:t>▸ context query param (archive override) and data query param (data source mode, currently always csv_data_remote) are consistent across every Matrix endpoint</a:t>
             </a:r>
-            <a:r>
-              <a:t/>
-            </a:r>
           </a:p>
           <a:p>
             <a:pPr algn="l">
@@ -13309,9 +13428,6 @@
                 </a:solidFill>
               </a:rPr>
               <a:t>▸ Static SPA hosting: FastAPI mounts dist/assets and serves index.html for any unmatched path under APP_BASE_PATH — one container serves both the API and the built React app</a:t>
-            </a:r>
-            <a:r>
-              <a:t/>
             </a:r>
           </a:p>
         </p:txBody>
@@ -13325,7 +13441,7 @@
 </file>
 
 <file path=ppt/slides/slide32.xml><?xml version="1.0" encoding="utf-8"?>
-<p:sld xmlns:a="http://schemas.openxmlformats.org/drawingml/2006/main" xmlns:p="http://schemas.openxmlformats.org/presentationml/2006/main" xmlns:r="http://schemas.openxmlformats.org/officeDocument/2006/relationships">
+<p:sld xmlns:a="http://schemas.openxmlformats.org/drawingml/2006/main" xmlns:r="http://schemas.openxmlformats.org/officeDocument/2006/relationships" xmlns:p="http://schemas.openxmlformats.org/presentationml/2006/main">
   <p:cSld>
     <p:spTree>
       <p:nvGrpSpPr>
@@ -13333,7 +13449,14 @@
         <p:cNvGrpSpPr/>
         <p:nvPr/>
       </p:nvGrpSpPr>
-      <p:grpSpPr/>
+      <p:grpSpPr>
+        <a:xfrm>
+          <a:off x="0" y="0"/>
+          <a:ext cx="0" cy="0"/>
+          <a:chOff x="0" y="0"/>
+          <a:chExt cx="0" cy="0"/>
+        </a:xfrm>
+      </p:grpSpPr>
       <p:sp>
         <p:nvSpPr>
           <p:cNvPr id="2" name="Rectangle 1"/>
@@ -13375,6 +13498,7 @@
           <a:lstStyle/>
           <a:p>
             <a:pPr algn="ctr"/>
+            <a:endParaRPr/>
           </a:p>
         </p:txBody>
       </p:sp>
@@ -13488,6 +13612,7 @@
           <a:lstStyle/>
           <a:p>
             <a:pPr algn="ctr"/>
+            <a:endParaRPr/>
           </a:p>
         </p:txBody>
       </p:sp>
@@ -13510,8 +13635,20 @@
                 <a:tableStyleId>{5C22544A-7EE6-4342-B048-85BDC9FD1C3A}</a:tableStyleId>
               </a:tblPr>
               <a:tblGrid>
-                <a:gridCol w="5169876"/>
-                <a:gridCol w="6031523"/>
+                <a:gridCol w="5169876">
+                  <a:extLst>
+                    <a:ext uri="{9D8B030D-6E8A-4147-A177-3AD203B41FA5}">
+                      <a16:colId xmlns:a16="http://schemas.microsoft.com/office/drawing/2014/main" val="20000"/>
+                    </a:ext>
+                  </a:extLst>
+                </a:gridCol>
+                <a:gridCol w="6031523">
+                  <a:extLst>
+                    <a:ext uri="{9D8B030D-6E8A-4147-A177-3AD203B41FA5}">
+                      <a16:colId xmlns:a16="http://schemas.microsoft.com/office/drawing/2014/main" val="20001"/>
+                    </a:ext>
+                  </a:extLst>
+                </a:gridCol>
               </a:tblGrid>
               <a:tr h="563880">
                 <a:tc>
@@ -13521,7 +13658,7 @@
                     <a:p>
                       <a:pPr algn="l"/>
                       <a:r>
-                        <a:rPr b="1" sz="1300">
+                        <a:rPr sz="1300" b="1">
                           <a:solidFill>
                             <a:srgbClr val="FFFFFF"/>
                           </a:solidFill>
@@ -13543,7 +13680,7 @@
                     <a:p>
                       <a:pPr algn="l"/>
                       <a:r>
-                        <a:rPr b="1" sz="1300">
+                        <a:rPr sz="1300" b="1">
                           <a:solidFill>
                             <a:srgbClr val="FFFFFF"/>
                           </a:solidFill>
@@ -13558,6 +13695,11 @@
                     </a:solidFill>
                   </a:tcPr>
                 </a:tc>
+                <a:extLst>
+                  <a:ext uri="{0D108BD9-81ED-4DB2-BD59-A6C34878D82A}">
+                    <a16:rowId xmlns:a16="http://schemas.microsoft.com/office/drawing/2014/main" val="10000"/>
+                  </a:ext>
+                </a:extLst>
               </a:tr>
               <a:tr h="563880">
                 <a:tc>
@@ -13602,6 +13744,11 @@
                     </a:solidFill>
                   </a:tcPr>
                 </a:tc>
+                <a:extLst>
+                  <a:ext uri="{0D108BD9-81ED-4DB2-BD59-A6C34878D82A}">
+                    <a16:rowId xmlns:a16="http://schemas.microsoft.com/office/drawing/2014/main" val="10001"/>
+                  </a:ext>
+                </a:extLst>
               </a:tr>
               <a:tr h="563880">
                 <a:tc>
@@ -13646,6 +13793,11 @@
                     </a:solidFill>
                   </a:tcPr>
                 </a:tc>
+                <a:extLst>
+                  <a:ext uri="{0D108BD9-81ED-4DB2-BD59-A6C34878D82A}">
+                    <a16:rowId xmlns:a16="http://schemas.microsoft.com/office/drawing/2014/main" val="10002"/>
+                  </a:ext>
+                </a:extLst>
               </a:tr>
               <a:tr h="563880">
                 <a:tc>
@@ -13690,6 +13842,11 @@
                     </a:solidFill>
                   </a:tcPr>
                 </a:tc>
+                <a:extLst>
+                  <a:ext uri="{0D108BD9-81ED-4DB2-BD59-A6C34878D82A}">
+                    <a16:rowId xmlns:a16="http://schemas.microsoft.com/office/drawing/2014/main" val="10003"/>
+                  </a:ext>
+                </a:extLst>
               </a:tr>
               <a:tr h="563880">
                 <a:tc>
@@ -13734,6 +13891,11 @@
                     </a:solidFill>
                   </a:tcPr>
                 </a:tc>
+                <a:extLst>
+                  <a:ext uri="{0D108BD9-81ED-4DB2-BD59-A6C34878D82A}">
+                    <a16:rowId xmlns:a16="http://schemas.microsoft.com/office/drawing/2014/main" val="10004"/>
+                  </a:ext>
+                </a:extLst>
               </a:tr>
               <a:tr h="563880">
                 <a:tc>
@@ -13778,6 +13940,11 @@
                     </a:solidFill>
                   </a:tcPr>
                 </a:tc>
+                <a:extLst>
+                  <a:ext uri="{0D108BD9-81ED-4DB2-BD59-A6C34878D82A}">
+                    <a16:rowId xmlns:a16="http://schemas.microsoft.com/office/drawing/2014/main" val="10005"/>
+                  </a:ext>
+                </a:extLst>
               </a:tr>
               <a:tr h="563880">
                 <a:tc>
@@ -13822,6 +13989,11 @@
                     </a:solidFill>
                   </a:tcPr>
                 </a:tc>
+                <a:extLst>
+                  <a:ext uri="{0D108BD9-81ED-4DB2-BD59-A6C34878D82A}">
+                    <a16:rowId xmlns:a16="http://schemas.microsoft.com/office/drawing/2014/main" val="10006"/>
+                  </a:ext>
+                </a:extLst>
               </a:tr>
               <a:tr h="563880">
                 <a:tc>
@@ -13866,6 +14038,11 @@
                     </a:solidFill>
                   </a:tcPr>
                 </a:tc>
+                <a:extLst>
+                  <a:ext uri="{0D108BD9-81ED-4DB2-BD59-A6C34878D82A}">
+                    <a16:rowId xmlns:a16="http://schemas.microsoft.com/office/drawing/2014/main" val="10007"/>
+                  </a:ext>
+                </a:extLst>
               </a:tr>
               <a:tr h="563880">
                 <a:tc>
@@ -13910,6 +14087,11 @@
                     </a:solidFill>
                   </a:tcPr>
                 </a:tc>
+                <a:extLst>
+                  <a:ext uri="{0D108BD9-81ED-4DB2-BD59-A6C34878D82A}">
+                    <a16:rowId xmlns:a16="http://schemas.microsoft.com/office/drawing/2014/main" val="10008"/>
+                  </a:ext>
+                </a:extLst>
               </a:tr>
             </a:tbl>
           </a:graphicData>
@@ -13924,7 +14106,7 @@
 </file>
 
 <file path=ppt/slides/slide33.xml><?xml version="1.0" encoding="utf-8"?>
-<p:sld xmlns:a="http://schemas.openxmlformats.org/drawingml/2006/main" xmlns:p="http://schemas.openxmlformats.org/presentationml/2006/main" xmlns:r="http://schemas.openxmlformats.org/officeDocument/2006/relationships">
+<p:sld xmlns:a="http://schemas.openxmlformats.org/drawingml/2006/main" xmlns:r="http://schemas.openxmlformats.org/officeDocument/2006/relationships" xmlns:p="http://schemas.openxmlformats.org/presentationml/2006/main">
   <p:cSld>
     <p:spTree>
       <p:nvGrpSpPr>
@@ -13932,7 +14114,14 @@
         <p:cNvGrpSpPr/>
         <p:nvPr/>
       </p:nvGrpSpPr>
-      <p:grpSpPr/>
+      <p:grpSpPr>
+        <a:xfrm>
+          <a:off x="0" y="0"/>
+          <a:ext cx="0" cy="0"/>
+          <a:chOff x="0" y="0"/>
+          <a:chExt cx="0" cy="0"/>
+        </a:xfrm>
+      </p:grpSpPr>
       <p:sp>
         <p:nvSpPr>
           <p:cNvPr id="2" name="Rectangle 1"/>
@@ -13974,6 +14163,7 @@
           <a:lstStyle/>
           <a:p>
             <a:pPr algn="ctr"/>
+            <a:endParaRPr/>
           </a:p>
         </p:txBody>
       </p:sp>
@@ -14087,6 +14277,7 @@
           <a:lstStyle/>
           <a:p>
             <a:pPr algn="ctr"/>
+            <a:endParaRPr/>
           </a:p>
         </p:txBody>
       </p:sp>
@@ -14128,9 +14319,6 @@
               </a:rPr>
               <a:t>▸ Stage 1 (node:22-alpine) — npm ci, then npm run build with a build-arg VITE_APP_BASE_PATH baked into the compiled JS (frontend env vars are compile-time, not runtime)</a:t>
             </a:r>
-            <a:r>
-              <a:t/>
-            </a:r>
           </a:p>
           <a:p>
             <a:pPr algn="l">
@@ -14149,9 +14337,6 @@
               </a:rPr>
               <a:t>▸ Stage 2 (python:3.12-slim) — pip install -r requirements.txt, copies backend/ source + the built dist/ from stage 1</a:t>
             </a:r>
-            <a:r>
-              <a:t/>
-            </a:r>
           </a:p>
           <a:p>
             <a:pPr algn="l">
@@ -14170,9 +14355,6 @@
               </a:rPr>
               <a:t>▸ Final image only contains: Python runtime + backend code + compiled static frontend — no Node/npm in the shipped image</a:t>
             </a:r>
-            <a:r>
-              <a:t/>
-            </a:r>
           </a:p>
           <a:p>
             <a:pPr algn="l">
@@ -14191,9 +14373,6 @@
               </a:rPr>
               <a:t>▸ Runtime configuration is 100% environment variables (APP_BASE_PATH, SERVER_DATA_MODE, NS_*, GOOGLE_*, CRUX_API_KEY, X_API_KEY) — no secrets baked into the image, so the same image can be promoted across environments</a:t>
             </a:r>
-            <a:r>
-              <a:t/>
-            </a:r>
           </a:p>
           <a:p>
             <a:pPr algn="l">
@@ -14212,9 +14391,6 @@
               </a:rPr>
               <a:t>▸ Container command: python -m uvicorn backend.main:app --host 0.0.0.0 --port ${PORT:-4000}</a:t>
             </a:r>
-            <a:r>
-              <a:t/>
-            </a:r>
           </a:p>
           <a:p>
             <a:pPr algn="l">
@@ -14232,9 +14408,6 @@
                 </a:solidFill>
               </a:rPr>
               <a:t>▸ Typical run: docker run --rm -p 4000:4000 --env-file .env.server -e APP_BASE_PATH=/account-health account-health:latest</a:t>
-            </a:r>
-            <a:r>
-              <a:t/>
             </a:r>
           </a:p>
         </p:txBody>
@@ -14248,7 +14421,7 @@
 </file>
 
 <file path=ppt/slides/slide34.xml><?xml version="1.0" encoding="utf-8"?>
-<p:sld xmlns:a="http://schemas.openxmlformats.org/drawingml/2006/main" xmlns:p="http://schemas.openxmlformats.org/presentationml/2006/main" xmlns:r="http://schemas.openxmlformats.org/officeDocument/2006/relationships">
+<p:sld xmlns:a="http://schemas.openxmlformats.org/drawingml/2006/main" xmlns:r="http://schemas.openxmlformats.org/officeDocument/2006/relationships" xmlns:p="http://schemas.openxmlformats.org/presentationml/2006/main">
   <p:cSld>
     <p:spTree>
       <p:nvGrpSpPr>
@@ -14256,7 +14429,14 @@
         <p:cNvGrpSpPr/>
         <p:nvPr/>
       </p:nvGrpSpPr>
-      <p:grpSpPr/>
+      <p:grpSpPr>
+        <a:xfrm>
+          <a:off x="0" y="0"/>
+          <a:ext cx="0" cy="0"/>
+          <a:chOff x="0" y="0"/>
+          <a:chExt cx="0" cy="0"/>
+        </a:xfrm>
+      </p:grpSpPr>
       <p:sp>
         <p:nvSpPr>
           <p:cNvPr id="2" name="Rectangle 1"/>
@@ -14298,6 +14478,7 @@
           <a:lstStyle/>
           <a:p>
             <a:pPr algn="ctr"/>
+            <a:endParaRPr/>
           </a:p>
         </p:txBody>
       </p:sp>
@@ -14411,6 +14592,7 @@
           <a:lstStyle/>
           <a:p>
             <a:pPr algn="ctr"/>
+            <a:endParaRPr/>
           </a:p>
         </p:txBody>
       </p:sp>
@@ -14452,9 +14634,6 @@
               </a:rPr>
               <a:t>▸ As of today, the repo has NO GitHub Actions workflows configured (.github/ only contains an editor copilot-instructions.md, no .github/workflows/*.yml)</a:t>
             </a:r>
-            <a:r>
-              <a:t/>
-            </a:r>
           </a:p>
           <a:p>
             <a:pPr algn="l">
@@ -14473,9 +14652,6 @@
               </a:rPr>
               <a:t>▸ Everything currently described as "the workflow" is a manual/local developer workflow: npm run build, docker build, then a manual docker run / deploy to the target platform</a:t>
             </a:r>
-            <a:r>
-              <a:t/>
-            </a:r>
           </a:p>
           <a:p>
             <a:pPr algn="l">
@@ -14494,9 +14670,6 @@
               </a:rPr>
               <a:t>▸ Recommended pipeline stages to add (suggested for discussion, not yet implemented):</a:t>
             </a:r>
-            <a:r>
-              <a:t/>
-            </a:r>
           </a:p>
           <a:p>
             <a:pPr algn="l">
@@ -14515,9 +14688,6 @@
               </a:rPr>
               <a:t>•  Lint + type-check: npm run lint, tsc -b</a:t>
             </a:r>
-            <a:r>
-              <a:t/>
-            </a:r>
           </a:p>
           <a:p>
             <a:pPr algn="l">
@@ -14536,9 +14706,6 @@
               </a:rPr>
               <a:t>•  Frontend build verification: npm run build</a:t>
             </a:r>
-            <a:r>
-              <a:t/>
-            </a:r>
           </a:p>
           <a:p>
             <a:pPr algn="l">
@@ -14557,9 +14724,6 @@
               </a:rPr>
               <a:t>•  Backend smoke import / basic pytest (none exist yet — no automated backend tests today)</a:t>
             </a:r>
-            <a:r>
-              <a:t/>
-            </a:r>
           </a:p>
           <a:p>
             <a:pPr algn="l">
@@ -14578,9 +14742,6 @@
               </a:rPr>
               <a:t>•  docker build (multi-stage) as a build-verification gate on PRs</a:t>
             </a:r>
-            <a:r>
-              <a:t/>
-            </a:r>
           </a:p>
           <a:p>
             <a:pPr algn="l">
@@ -14599,9 +14760,6 @@
               </a:rPr>
               <a:t>•  Optional: push to a registry + deploy step for main-branch merges</a:t>
             </a:r>
-            <a:r>
-              <a:t/>
-            </a:r>
           </a:p>
           <a:p>
             <a:pPr algn="l">
@@ -14619,9 +14777,6 @@
                 </a:solidFill>
               </a:rPr>
               <a:t>▸ Flagging this gap explicitly so new team members don't assume CI gates exist today — code review is currently the only gate</a:t>
-            </a:r>
-            <a:r>
-              <a:t/>
             </a:r>
           </a:p>
         </p:txBody>
@@ -14635,7 +14790,7 @@
 </file>
 
 <file path=ppt/slides/slide35.xml><?xml version="1.0" encoding="utf-8"?>
-<p:sld xmlns:a="http://schemas.openxmlformats.org/drawingml/2006/main" xmlns:p="http://schemas.openxmlformats.org/presentationml/2006/main" xmlns:r="http://schemas.openxmlformats.org/officeDocument/2006/relationships">
+<p:sld xmlns:a="http://schemas.openxmlformats.org/drawingml/2006/main" xmlns:r="http://schemas.openxmlformats.org/officeDocument/2006/relationships" xmlns:p="http://schemas.openxmlformats.org/presentationml/2006/main">
   <p:cSld>
     <p:spTree>
       <p:nvGrpSpPr>
@@ -14643,7 +14798,14 @@
         <p:cNvGrpSpPr/>
         <p:nvPr/>
       </p:nvGrpSpPr>
-      <p:grpSpPr/>
+      <p:grpSpPr>
+        <a:xfrm>
+          <a:off x="0" y="0"/>
+          <a:ext cx="0" cy="0"/>
+          <a:chOff x="0" y="0"/>
+          <a:chExt cx="0" cy="0"/>
+        </a:xfrm>
+      </p:grpSpPr>
       <p:sp>
         <p:nvSpPr>
           <p:cNvPr id="2" name="Rectangle 1"/>
@@ -14685,6 +14847,7 @@
           <a:lstStyle/>
           <a:p>
             <a:pPr algn="ctr"/>
+            <a:endParaRPr/>
           </a:p>
         </p:txBody>
       </p:sp>
@@ -14798,6 +14961,7 @@
           <a:lstStyle/>
           <a:p>
             <a:pPr algn="ctr"/>
+            <a:endParaRPr/>
           </a:p>
         </p:txBody>
       </p:sp>
@@ -14839,9 +15003,6 @@
               </a:rPr>
               <a:t>▸ Secrets only via environment variables, loaded with python-dotenv from .env.server — never hardcoded, never committed (.env.server.example / account_id_map.example.json are the checked-in templates)</a:t>
             </a:r>
-            <a:r>
-              <a:t/>
-            </a:r>
           </a:p>
           <a:p>
             <a:pPr algn="l">
@@ -14860,9 +15021,6 @@
               </a:rPr>
               <a:t>▸ NetStorage/Akamai/Grover credentials never reach the browser — every external call is proxied through the FastAPI backend</a:t>
             </a:r>
-            <a:r>
-              <a:t/>
-            </a:r>
           </a:p>
           <a:p>
             <a:pPr algn="l">
@@ -14881,9 +15039,6 @@
               </a:rPr>
               <a:t>▸ CORS locked to a single configured FRONTEND_ORIGIN, not a wildcard</a:t>
             </a:r>
-            <a:r>
-              <a:t/>
-            </a:r>
           </a:p>
           <a:p>
             <a:pPr algn="l">
@@ -14902,9 +15057,6 @@
               </a:rPr>
               <a:t>▸ Outbound API calls (Akamai identity/AppSec, CrUX, PageSpeed, Grover) are all rate-limited via @sleep_and_retry/@limits</a:t>
             </a:r>
-            <a:r>
-              <a:t/>
-            </a:r>
           </a:p>
           <a:p>
             <a:pPr algn="l">
@@ -14923,9 +15075,6 @@
               </a:rPr>
               <a:t>▸ Defensive numeric parsing everywhere third-party JSON is involved (CrUX CLS-as-string, Grover metrics-as-string) — never a bare cast, always try/except float()</a:t>
             </a:r>
-            <a:r>
-              <a:t/>
-            </a:r>
           </a:p>
           <a:p>
             <a:pPr algn="l">
@@ -14944,9 +15093,6 @@
               </a:rPr>
               <a:t>▸ Multi-layer fallback chains (NetStorage → Google → mock) mean a single integration outage degrades gracefully instead of breaking the page</a:t>
             </a:r>
-            <a:r>
-              <a:t/>
-            </a:r>
           </a:p>
           <a:p>
             <a:pPr algn="l">
@@ -14964,9 +15110,6 @@
                 </a:solidFill>
               </a:rPr>
               <a:t>▸ SSE job client auto-recovers from backend restarts (404-triggered retry with backoff) instead of leaving the UI stuck</a:t>
-            </a:r>
-            <a:r>
-              <a:t/>
             </a:r>
           </a:p>
         </p:txBody>
@@ -14980,7 +15123,7 @@
 </file>
 
 <file path=ppt/slides/slide36.xml><?xml version="1.0" encoding="utf-8"?>
-<p:sld xmlns:a="http://schemas.openxmlformats.org/drawingml/2006/main" xmlns:p="http://schemas.openxmlformats.org/presentationml/2006/main" xmlns:r="http://schemas.openxmlformats.org/officeDocument/2006/relationships">
+<p:sld xmlns:a="http://schemas.openxmlformats.org/drawingml/2006/main" xmlns:r="http://schemas.openxmlformats.org/officeDocument/2006/relationships" xmlns:p="http://schemas.openxmlformats.org/presentationml/2006/main">
   <p:cSld>
     <p:spTree>
       <p:nvGrpSpPr>
@@ -14988,7 +15131,14 @@
         <p:cNvGrpSpPr/>
         <p:nvPr/>
       </p:nvGrpSpPr>
-      <p:grpSpPr/>
+      <p:grpSpPr>
+        <a:xfrm>
+          <a:off x="0" y="0"/>
+          <a:ext cx="0" cy="0"/>
+          <a:chOff x="0" y="0"/>
+          <a:chExt cx="0" cy="0"/>
+        </a:xfrm>
+      </p:grpSpPr>
       <p:sp>
         <p:nvSpPr>
           <p:cNvPr id="2" name="Rectangle 1"/>
@@ -15030,6 +15180,7 @@
           <a:lstStyle/>
           <a:p>
             <a:pPr algn="ctr"/>
+            <a:endParaRPr/>
           </a:p>
         </p:txBody>
       </p:sp>
@@ -15143,6 +15294,7 @@
           <a:lstStyle/>
           <a:p>
             <a:pPr algn="ctr"/>
+            <a:endParaRPr/>
           </a:p>
         </p:txBody>
       </p:sp>
@@ -15184,9 +15336,6 @@
               </a:rPr>
               <a:t>▸ 1. Backend (data_service.py): define RELATIVE_PATH constant for the new CSV, then 3 functions — get_account_&lt;x&gt;_matrix / _summary / _scorecard, each calling resolve_report_csv_path() + parsing rows</a:t>
             </a:r>
-            <a:r>
-              <a:t/>
-            </a:r>
           </a:p>
           <a:p>
             <a:pPr algn="l">
@@ -15205,9 +15354,6 @@
               </a:rPr>
               <a:t>▸ 2. Backend (main.py): add the endpoint quartet — POST jobs, GET jobs/{id}/events, GET summary/scoreCard (sync JSON), GET download — for the table page AND the summary/scoreCard variants</a:t>
             </a:r>
-            <a:r>
-              <a:t/>
-            </a:r>
           </a:p>
           <a:p>
             <a:pPr algn="l">
@@ -15226,9 +15372,6 @@
               </a:rPr>
               <a:t>▸ 3. Frontend (services/&lt;x&gt;Jobs.ts): mirror an existing Jobs.ts file — startJob/runJob (SSE) + fetch&lt;X&gt;Summary/ScoreCard (sync) + download URL helper</a:t>
             </a:r>
-            <a:r>
-              <a:t/>
-            </a:r>
           </a:p>
           <a:p>
             <a:pPr algn="l">
@@ -15247,9 +15390,6 @@
               </a:rPr>
               <a:t>▸ 4. Frontend (types/dashboard.ts): add the result/row/progress-event interfaces for the new feature</a:t>
             </a:r>
-            <a:r>
-              <a:t/>
-            </a:r>
           </a:p>
           <a:p>
             <a:pPr algn="l">
@@ -15268,9 +15408,6 @@
               </a:rPr>
               <a:t>▸ 5. Frontend (pages/): copy an existing 3-page family (Page/Summary/ScoreCard) as a template — swap the service import, result type, and domain-specific columns/filters; keep the shared useArchive()/DashboardLayout/Scan-Progress pattern intact</a:t>
             </a:r>
-            <a:r>
-              <a:t/>
-            </a:r>
           </a:p>
           <a:p>
             <a:pPr algn="l">
@@ -15289,9 +15426,6 @@
               </a:rPr>
               <a:t>▸ 6. src/App.tsx: add the 3 new routes (table / summary / scoreCard)</a:t>
             </a:r>
-            <a:r>
-              <a:t/>
-            </a:r>
           </a:p>
           <a:p>
             <a:pPr algn="l">
@@ -15310,9 +15444,6 @@
               </a:rPr>
               <a:t>▸ 7. AccountDetailPage.tsx: add a new HealthWidgetLink group (or extend an existing one) so users can discover the feature</a:t>
             </a:r>
-            <a:r>
-              <a:t/>
-            </a:r>
           </a:p>
           <a:p>
             <a:pPr algn="l">
@@ -15330,9 +15461,6 @@
                 </a:solidFill>
               </a:rPr>
               <a:t>▸ Because every family follows the identical pattern, a new Matrix feature is mostly copy-adapt, not net-new architecture</a:t>
-            </a:r>
-            <a:r>
-              <a:t/>
             </a:r>
           </a:p>
         </p:txBody>
@@ -15346,7 +15474,7 @@
 </file>
 
 <file path=ppt/slides/slide37.xml><?xml version="1.0" encoding="utf-8"?>
-<p:sld xmlns:a="http://schemas.openxmlformats.org/drawingml/2006/main" xmlns:p="http://schemas.openxmlformats.org/presentationml/2006/main" xmlns:r="http://schemas.openxmlformats.org/officeDocument/2006/relationships">
+<p:sld xmlns:a="http://schemas.openxmlformats.org/drawingml/2006/main" xmlns:r="http://schemas.openxmlformats.org/officeDocument/2006/relationships" xmlns:p="http://schemas.openxmlformats.org/presentationml/2006/main">
   <p:cSld>
     <p:spTree>
       <p:nvGrpSpPr>
@@ -15354,7 +15482,14 @@
         <p:cNvGrpSpPr/>
         <p:nvPr/>
       </p:nvGrpSpPr>
-      <p:grpSpPr/>
+      <p:grpSpPr>
+        <a:xfrm>
+          <a:off x="0" y="0"/>
+          <a:ext cx="0" cy="0"/>
+          <a:chOff x="0" y="0"/>
+          <a:chExt cx="0" cy="0"/>
+        </a:xfrm>
+      </p:grpSpPr>
       <p:sp>
         <p:nvSpPr>
           <p:cNvPr id="2" name="Rectangle 1"/>
@@ -15396,6 +15531,7 @@
           <a:lstStyle/>
           <a:p>
             <a:pPr algn="ctr"/>
+            <a:endParaRPr/>
           </a:p>
         </p:txBody>
       </p:sp>
@@ -15509,6 +15645,7 @@
           <a:lstStyle/>
           <a:p>
             <a:pPr algn="ctr"/>
+            <a:endParaRPr/>
           </a:p>
         </p:txBody>
       </p:sp>
@@ -15531,8 +15668,20 @@
                 <a:tableStyleId>{5C22544A-7EE6-4342-B048-85BDC9FD1C3A}</a:tableStyleId>
               </a:tblPr>
               <a:tblGrid>
-                <a:gridCol w="3877407"/>
-                <a:gridCol w="7323992"/>
+                <a:gridCol w="3877407">
+                  <a:extLst>
+                    <a:ext uri="{9D8B030D-6E8A-4147-A177-3AD203B41FA5}">
+                      <a16:colId xmlns:a16="http://schemas.microsoft.com/office/drawing/2014/main" val="20000"/>
+                    </a:ext>
+                  </a:extLst>
+                </a:gridCol>
+                <a:gridCol w="7323992">
+                  <a:extLst>
+                    <a:ext uri="{9D8B030D-6E8A-4147-A177-3AD203B41FA5}">
+                      <a16:colId xmlns:a16="http://schemas.microsoft.com/office/drawing/2014/main" val="20001"/>
+                    </a:ext>
+                  </a:extLst>
+                </a:gridCol>
               </a:tblGrid>
               <a:tr h="422910">
                 <a:tc>
@@ -15542,7 +15691,7 @@
                     <a:p>
                       <a:pPr algn="l"/>
                       <a:r>
-                        <a:rPr b="1" sz="1200">
+                        <a:rPr sz="1200" b="1">
                           <a:solidFill>
                             <a:srgbClr val="FFFFFF"/>
                           </a:solidFill>
@@ -15564,7 +15713,7 @@
                     <a:p>
                       <a:pPr algn="l"/>
                       <a:r>
-                        <a:rPr b="1" sz="1200">
+                        <a:rPr sz="1200" b="1">
                           <a:solidFill>
                             <a:srgbClr val="FFFFFF"/>
                           </a:solidFill>
@@ -15579,6 +15728,11 @@
                     </a:solidFill>
                   </a:tcPr>
                 </a:tc>
+                <a:extLst>
+                  <a:ext uri="{0D108BD9-81ED-4DB2-BD59-A6C34878D82A}">
+                    <a16:rowId xmlns:a16="http://schemas.microsoft.com/office/drawing/2014/main" val="10000"/>
+                  </a:ext>
+                </a:extLst>
               </a:tr>
               <a:tr h="422910">
                 <a:tc>
@@ -15623,6 +15777,11 @@
                     </a:solidFill>
                   </a:tcPr>
                 </a:tc>
+                <a:extLst>
+                  <a:ext uri="{0D108BD9-81ED-4DB2-BD59-A6C34878D82A}">
+                    <a16:rowId xmlns:a16="http://schemas.microsoft.com/office/drawing/2014/main" val="10001"/>
+                  </a:ext>
+                </a:extLst>
               </a:tr>
               <a:tr h="422910">
                 <a:tc>
@@ -15667,6 +15826,11 @@
                     </a:solidFill>
                   </a:tcPr>
                 </a:tc>
+                <a:extLst>
+                  <a:ext uri="{0D108BD9-81ED-4DB2-BD59-A6C34878D82A}">
+                    <a16:rowId xmlns:a16="http://schemas.microsoft.com/office/drawing/2014/main" val="10002"/>
+                  </a:ext>
+                </a:extLst>
               </a:tr>
               <a:tr h="422910">
                 <a:tc>
@@ -15711,6 +15875,11 @@
                     </a:solidFill>
                   </a:tcPr>
                 </a:tc>
+                <a:extLst>
+                  <a:ext uri="{0D108BD9-81ED-4DB2-BD59-A6C34878D82A}">
+                    <a16:rowId xmlns:a16="http://schemas.microsoft.com/office/drawing/2014/main" val="10003"/>
+                  </a:ext>
+                </a:extLst>
               </a:tr>
               <a:tr h="422910">
                 <a:tc>
@@ -15755,6 +15924,11 @@
                     </a:solidFill>
                   </a:tcPr>
                 </a:tc>
+                <a:extLst>
+                  <a:ext uri="{0D108BD9-81ED-4DB2-BD59-A6C34878D82A}">
+                    <a16:rowId xmlns:a16="http://schemas.microsoft.com/office/drawing/2014/main" val="10004"/>
+                  </a:ext>
+                </a:extLst>
               </a:tr>
               <a:tr h="422910">
                 <a:tc>
@@ -15799,6 +15973,11 @@
                     </a:solidFill>
                   </a:tcPr>
                 </a:tc>
+                <a:extLst>
+                  <a:ext uri="{0D108BD9-81ED-4DB2-BD59-A6C34878D82A}">
+                    <a16:rowId xmlns:a16="http://schemas.microsoft.com/office/drawing/2014/main" val="10005"/>
+                  </a:ext>
+                </a:extLst>
               </a:tr>
               <a:tr h="422910">
                 <a:tc>
@@ -15843,6 +16022,11 @@
                     </a:solidFill>
                   </a:tcPr>
                 </a:tc>
+                <a:extLst>
+                  <a:ext uri="{0D108BD9-81ED-4DB2-BD59-A6C34878D82A}">
+                    <a16:rowId xmlns:a16="http://schemas.microsoft.com/office/drawing/2014/main" val="10006"/>
+                  </a:ext>
+                </a:extLst>
               </a:tr>
               <a:tr h="422910">
                 <a:tc>
@@ -15887,6 +16071,11 @@
                     </a:solidFill>
                   </a:tcPr>
                 </a:tc>
+                <a:extLst>
+                  <a:ext uri="{0D108BD9-81ED-4DB2-BD59-A6C34878D82A}">
+                    <a16:rowId xmlns:a16="http://schemas.microsoft.com/office/drawing/2014/main" val="10007"/>
+                  </a:ext>
+                </a:extLst>
               </a:tr>
               <a:tr h="422910">
                 <a:tc>
@@ -15931,6 +16120,11 @@
                     </a:solidFill>
                   </a:tcPr>
                 </a:tc>
+                <a:extLst>
+                  <a:ext uri="{0D108BD9-81ED-4DB2-BD59-A6C34878D82A}">
+                    <a16:rowId xmlns:a16="http://schemas.microsoft.com/office/drawing/2014/main" val="10008"/>
+                  </a:ext>
+                </a:extLst>
               </a:tr>
               <a:tr h="422910">
                 <a:tc>
@@ -15975,6 +16169,11 @@
                     </a:solidFill>
                   </a:tcPr>
                 </a:tc>
+                <a:extLst>
+                  <a:ext uri="{0D108BD9-81ED-4DB2-BD59-A6C34878D82A}">
+                    <a16:rowId xmlns:a16="http://schemas.microsoft.com/office/drawing/2014/main" val="10009"/>
+                  </a:ext>
+                </a:extLst>
               </a:tr>
               <a:tr h="422910">
                 <a:tc>
@@ -16019,6 +16218,11 @@
                     </a:solidFill>
                   </a:tcPr>
                 </a:tc>
+                <a:extLst>
+                  <a:ext uri="{0D108BD9-81ED-4DB2-BD59-A6C34878D82A}">
+                    <a16:rowId xmlns:a16="http://schemas.microsoft.com/office/drawing/2014/main" val="10010"/>
+                  </a:ext>
+                </a:extLst>
               </a:tr>
               <a:tr h="422910">
                 <a:tc>
@@ -16063,6 +16267,11 @@
                     </a:solidFill>
                   </a:tcPr>
                 </a:tc>
+                <a:extLst>
+                  <a:ext uri="{0D108BD9-81ED-4DB2-BD59-A6C34878D82A}">
+                    <a16:rowId xmlns:a16="http://schemas.microsoft.com/office/drawing/2014/main" val="10011"/>
+                  </a:ext>
+                </a:extLst>
               </a:tr>
             </a:tbl>
           </a:graphicData>
@@ -16077,7 +16286,7 @@
 </file>
 
 <file path=ppt/slides/slide38.xml><?xml version="1.0" encoding="utf-8"?>
-<p:sld xmlns:a="http://schemas.openxmlformats.org/drawingml/2006/main" xmlns:p="http://schemas.openxmlformats.org/presentationml/2006/main" xmlns:r="http://schemas.openxmlformats.org/officeDocument/2006/relationships">
+<p:sld xmlns:a="http://schemas.openxmlformats.org/drawingml/2006/main" xmlns:r="http://schemas.openxmlformats.org/officeDocument/2006/relationships" xmlns:p="http://schemas.openxmlformats.org/presentationml/2006/main">
   <p:cSld>
     <p:spTree>
       <p:nvGrpSpPr>
@@ -16085,7 +16294,14 @@
         <p:cNvGrpSpPr/>
         <p:nvPr/>
       </p:nvGrpSpPr>
-      <p:grpSpPr/>
+      <p:grpSpPr>
+        <a:xfrm>
+          <a:off x="0" y="0"/>
+          <a:ext cx="0" cy="0"/>
+          <a:chOff x="0" y="0"/>
+          <a:chExt cx="0" cy="0"/>
+        </a:xfrm>
+      </p:grpSpPr>
       <p:sp>
         <p:nvSpPr>
           <p:cNvPr id="2" name="Rectangle 1"/>
@@ -16127,6 +16343,7 @@
           <a:lstStyle/>
           <a:p>
             <a:pPr algn="ctr"/>
+            <a:endParaRPr/>
           </a:p>
         </p:txBody>
       </p:sp>
@@ -16203,9 +16420,6 @@
               </a:rPr>
               <a:t>▸ One consistent Matrix pattern (Table / Summary / ScoreCard) powers six different technical dimensions</a:t>
             </a:r>
-            <a:r>
-              <a:t/>
-            </a:r>
           </a:p>
           <a:p>
             <a:pPr algn="l">
@@ -16224,9 +16438,6 @@
               </a:rPr>
               <a:t>▸ One SSE job engine + one archive-context system are shared across the entire app — learn them once</a:t>
             </a:r>
-            <a:r>
-              <a:t/>
-            </a:r>
           </a:p>
           <a:p>
             <a:pPr algn="l">
@@ -16245,9 +16456,6 @@
               </a:rPr>
               <a:t>▸ NetStorage is the primary data source; Google Sheets and mock data are graceful fallbacks, never silent failures</a:t>
             </a:r>
-            <a:r>
-              <a:t/>
-            </a:r>
           </a:p>
           <a:p>
             <a:pPr algn="l">
@@ -16266,9 +16474,6 @@
               </a:rPr>
               <a:t>▸ Multiple live external integrations (Akamai identity/AppSec, CrUX/PSI, Grover) all follow the same defensive patterns: rate limiting, safe numeric coercion, and clear error surfacing</a:t>
             </a:r>
-            <a:r>
-              <a:t/>
-            </a:r>
           </a:p>
           <a:p>
             <a:pPr algn="l">
@@ -16287,9 +16492,6 @@
               </a:rPr>
               <a:t>▸ No CI/CD pipeline exists yet — an open opportunity for the team</a:t>
             </a:r>
-            <a:r>
-              <a:t/>
-            </a:r>
           </a:p>
           <a:p>
             <a:pPr algn="l">
@@ -16307,9 +16509,6 @@
                 </a:solidFill>
               </a:rPr>
               <a:t>▸ Adding a new Matrix feature is a well-trodden recipe, not a fresh design exercise</a:t>
-            </a:r>
-            <a:r>
-              <a:t/>
             </a:r>
           </a:p>
         </p:txBody>
@@ -16358,7 +16557,7 @@
 </file>
 
 <file path=ppt/slides/slide4.xml><?xml version="1.0" encoding="utf-8"?>
-<p:sld xmlns:a="http://schemas.openxmlformats.org/drawingml/2006/main" xmlns:p="http://schemas.openxmlformats.org/presentationml/2006/main" xmlns:r="http://schemas.openxmlformats.org/officeDocument/2006/relationships">
+<p:sld xmlns:a="http://schemas.openxmlformats.org/drawingml/2006/main" xmlns:r="http://schemas.openxmlformats.org/officeDocument/2006/relationships" xmlns:p="http://schemas.openxmlformats.org/presentationml/2006/main">
   <p:cSld>
     <p:spTree>
       <p:nvGrpSpPr>
@@ -16366,7 +16565,14 @@
         <p:cNvGrpSpPr/>
         <p:nvPr/>
       </p:nvGrpSpPr>
-      <p:grpSpPr/>
+      <p:grpSpPr>
+        <a:xfrm>
+          <a:off x="0" y="0"/>
+          <a:ext cx="0" cy="0"/>
+          <a:chOff x="0" y="0"/>
+          <a:chExt cx="0" cy="0"/>
+        </a:xfrm>
+      </p:grpSpPr>
       <p:sp>
         <p:nvSpPr>
           <p:cNvPr id="2" name="Rectangle 1"/>
@@ -16408,6 +16614,7 @@
           <a:lstStyle/>
           <a:p>
             <a:pPr algn="ctr"/>
+            <a:endParaRPr/>
           </a:p>
         </p:txBody>
       </p:sp>
@@ -16521,6 +16728,7 @@
           <a:lstStyle/>
           <a:p>
             <a:pPr algn="ctr"/>
+            <a:endParaRPr/>
           </a:p>
         </p:txBody>
       </p:sp>
@@ -16543,9 +16751,27 @@
                 <a:tableStyleId>{5C22544A-7EE6-4342-B048-85BDC9FD1C3A}</a:tableStyleId>
               </a:tblPr>
               <a:tblGrid>
-                <a:gridCol w="1828799"/>
-                <a:gridCol w="3657599"/>
-                <a:gridCol w="5715000"/>
+                <a:gridCol w="1828799">
+                  <a:extLst>
+                    <a:ext uri="{9D8B030D-6E8A-4147-A177-3AD203B41FA5}">
+                      <a16:colId xmlns:a16="http://schemas.microsoft.com/office/drawing/2014/main" val="20000"/>
+                    </a:ext>
+                  </a:extLst>
+                </a:gridCol>
+                <a:gridCol w="3657599">
+                  <a:extLst>
+                    <a:ext uri="{9D8B030D-6E8A-4147-A177-3AD203B41FA5}">
+                      <a16:colId xmlns:a16="http://schemas.microsoft.com/office/drawing/2014/main" val="20001"/>
+                    </a:ext>
+                  </a:extLst>
+                </a:gridCol>
+                <a:gridCol w="5715000">
+                  <a:extLst>
+                    <a:ext uri="{9D8B030D-6E8A-4147-A177-3AD203B41FA5}">
+                      <a16:colId xmlns:a16="http://schemas.microsoft.com/office/drawing/2014/main" val="20002"/>
+                    </a:ext>
+                  </a:extLst>
+                </a:gridCol>
               </a:tblGrid>
               <a:tr h="563880">
                 <a:tc>
@@ -16555,7 +16781,7 @@
                     <a:p>
                       <a:pPr algn="l"/>
                       <a:r>
-                        <a:rPr b="1" sz="1300">
+                        <a:rPr sz="1300" b="1">
                           <a:solidFill>
                             <a:srgbClr val="FFFFFF"/>
                           </a:solidFill>
@@ -16577,7 +16803,7 @@
                     <a:p>
                       <a:pPr algn="l"/>
                       <a:r>
-                        <a:rPr b="1" sz="1300">
+                        <a:rPr sz="1300" b="1">
                           <a:solidFill>
                             <a:srgbClr val="FFFFFF"/>
                           </a:solidFill>
@@ -16599,7 +16825,7 @@
                     <a:p>
                       <a:pPr algn="l"/>
                       <a:r>
-                        <a:rPr b="1" sz="1300">
+                        <a:rPr sz="1300" b="1">
                           <a:solidFill>
                             <a:srgbClr val="FFFFFF"/>
                           </a:solidFill>
@@ -16614,6 +16840,11 @@
                     </a:solidFill>
                   </a:tcPr>
                 </a:tc>
+                <a:extLst>
+                  <a:ext uri="{0D108BD9-81ED-4DB2-BD59-A6C34878D82A}">
+                    <a16:rowId xmlns:a16="http://schemas.microsoft.com/office/drawing/2014/main" val="10000"/>
+                  </a:ext>
+                </a:extLst>
               </a:tr>
               <a:tr h="563880">
                 <a:tc>
@@ -16679,6 +16910,11 @@
                     </a:solidFill>
                   </a:tcPr>
                 </a:tc>
+                <a:extLst>
+                  <a:ext uri="{0D108BD9-81ED-4DB2-BD59-A6C34878D82A}">
+                    <a16:rowId xmlns:a16="http://schemas.microsoft.com/office/drawing/2014/main" val="10001"/>
+                  </a:ext>
+                </a:extLst>
               </a:tr>
               <a:tr h="563880">
                 <a:tc>
@@ -16744,6 +16980,11 @@
                     </a:solidFill>
                   </a:tcPr>
                 </a:tc>
+                <a:extLst>
+                  <a:ext uri="{0D108BD9-81ED-4DB2-BD59-A6C34878D82A}">
+                    <a16:rowId xmlns:a16="http://schemas.microsoft.com/office/drawing/2014/main" val="10002"/>
+                  </a:ext>
+                </a:extLst>
               </a:tr>
               <a:tr h="563880">
                 <a:tc>
@@ -16809,6 +17050,11 @@
                     </a:solidFill>
                   </a:tcPr>
                 </a:tc>
+                <a:extLst>
+                  <a:ext uri="{0D108BD9-81ED-4DB2-BD59-A6C34878D82A}">
+                    <a16:rowId xmlns:a16="http://schemas.microsoft.com/office/drawing/2014/main" val="10003"/>
+                  </a:ext>
+                </a:extLst>
               </a:tr>
               <a:tr h="563880">
                 <a:tc>
@@ -16874,6 +17120,11 @@
                     </a:solidFill>
                   </a:tcPr>
                 </a:tc>
+                <a:extLst>
+                  <a:ext uri="{0D108BD9-81ED-4DB2-BD59-A6C34878D82A}">
+                    <a16:rowId xmlns:a16="http://schemas.microsoft.com/office/drawing/2014/main" val="10004"/>
+                  </a:ext>
+                </a:extLst>
               </a:tr>
               <a:tr h="563880">
                 <a:tc>
@@ -16939,6 +17190,11 @@
                     </a:solidFill>
                   </a:tcPr>
                 </a:tc>
+                <a:extLst>
+                  <a:ext uri="{0D108BD9-81ED-4DB2-BD59-A6C34878D82A}">
+                    <a16:rowId xmlns:a16="http://schemas.microsoft.com/office/drawing/2014/main" val="10005"/>
+                  </a:ext>
+                </a:extLst>
               </a:tr>
               <a:tr h="563880">
                 <a:tc>
@@ -17004,6 +17260,11 @@
                     </a:solidFill>
                   </a:tcPr>
                 </a:tc>
+                <a:extLst>
+                  <a:ext uri="{0D108BD9-81ED-4DB2-BD59-A6C34878D82A}">
+                    <a16:rowId xmlns:a16="http://schemas.microsoft.com/office/drawing/2014/main" val="10006"/>
+                  </a:ext>
+                </a:extLst>
               </a:tr>
               <a:tr h="563880">
                 <a:tc>
@@ -17069,6 +17330,11 @@
                     </a:solidFill>
                   </a:tcPr>
                 </a:tc>
+                <a:extLst>
+                  <a:ext uri="{0D108BD9-81ED-4DB2-BD59-A6C34878D82A}">
+                    <a16:rowId xmlns:a16="http://schemas.microsoft.com/office/drawing/2014/main" val="10007"/>
+                  </a:ext>
+                </a:extLst>
               </a:tr>
               <a:tr h="563880">
                 <a:tc>
@@ -17134,6 +17400,11 @@
                     </a:solidFill>
                   </a:tcPr>
                 </a:tc>
+                <a:extLst>
+                  <a:ext uri="{0D108BD9-81ED-4DB2-BD59-A6C34878D82A}">
+                    <a16:rowId xmlns:a16="http://schemas.microsoft.com/office/drawing/2014/main" val="10008"/>
+                  </a:ext>
+                </a:extLst>
               </a:tr>
             </a:tbl>
           </a:graphicData>
@@ -17148,7 +17419,7 @@
 </file>
 
 <file path=ppt/slides/slide5.xml><?xml version="1.0" encoding="utf-8"?>
-<p:sld xmlns:a="http://schemas.openxmlformats.org/drawingml/2006/main" xmlns:p="http://schemas.openxmlformats.org/presentationml/2006/main" xmlns:r="http://schemas.openxmlformats.org/officeDocument/2006/relationships">
+<p:sld xmlns:a="http://schemas.openxmlformats.org/drawingml/2006/main" xmlns:r="http://schemas.openxmlformats.org/officeDocument/2006/relationships" xmlns:p="http://schemas.openxmlformats.org/presentationml/2006/main">
   <p:cSld>
     <p:spTree>
       <p:nvGrpSpPr>
@@ -17156,7 +17427,14 @@
         <p:cNvGrpSpPr/>
         <p:nvPr/>
       </p:nvGrpSpPr>
-      <p:grpSpPr/>
+      <p:grpSpPr>
+        <a:xfrm>
+          <a:off x="0" y="0"/>
+          <a:ext cx="0" cy="0"/>
+          <a:chOff x="0" y="0"/>
+          <a:chExt cx="0" cy="0"/>
+        </a:xfrm>
+      </p:grpSpPr>
       <p:sp>
         <p:nvSpPr>
           <p:cNvPr id="2" name="Rectangle 1"/>
@@ -17198,6 +17476,7 @@
           <a:lstStyle/>
           <a:p>
             <a:pPr algn="ctr"/>
+            <a:endParaRPr/>
           </a:p>
         </p:txBody>
       </p:sp>
@@ -17311,6 +17590,7 @@
           <a:lstStyle/>
           <a:p>
             <a:pPr algn="ctr"/>
+            <a:endParaRPr/>
           </a:p>
         </p:txBody>
       </p:sp>
@@ -17352,7 +17632,7 @@
           </a:fontRef>
         </p:style>
         <p:txBody>
-          <a:bodyPr rtlCol="0" anchor="ctr" wrap="square"/>
+          <a:bodyPr wrap="square" rtlCol="0" anchor="ctr"/>
           <a:lstStyle/>
           <a:p>
             <a:pPr algn="ctr"/>
@@ -17408,6 +17688,7 @@
           <a:lstStyle/>
           <a:p>
             <a:pPr algn="ctr"/>
+            <a:endParaRPr/>
           </a:p>
         </p:txBody>
       </p:sp>
@@ -17449,7 +17730,7 @@
           </a:fontRef>
         </p:style>
         <p:txBody>
-          <a:bodyPr rtlCol="0" anchor="ctr" wrap="square"/>
+          <a:bodyPr wrap="square" rtlCol="0" anchor="ctr"/>
           <a:lstStyle/>
           <a:p>
             <a:pPr algn="ctr"/>
@@ -17505,6 +17786,7 @@
           <a:lstStyle/>
           <a:p>
             <a:pPr algn="ctr"/>
+            <a:endParaRPr/>
           </a:p>
         </p:txBody>
       </p:sp>
@@ -17546,7 +17828,7 @@
           </a:fontRef>
         </p:style>
         <p:txBody>
-          <a:bodyPr rtlCol="0" anchor="ctr" wrap="square"/>
+          <a:bodyPr wrap="square" rtlCol="0" anchor="ctr"/>
           <a:lstStyle/>
           <a:p>
             <a:pPr algn="ctr"/>
@@ -17599,7 +17881,7 @@
           </a:fontRef>
         </p:style>
         <p:txBody>
-          <a:bodyPr rtlCol="0" anchor="ctr" wrap="square"/>
+          <a:bodyPr wrap="square" rtlCol="0" anchor="ctr"/>
           <a:lstStyle/>
           <a:p>
             <a:pPr algn="ctr"/>
@@ -17652,7 +17934,7 @@
           </a:fontRef>
         </p:style>
         <p:txBody>
-          <a:bodyPr rtlCol="0" anchor="ctr" wrap="square"/>
+          <a:bodyPr wrap="square" rtlCol="0" anchor="ctr"/>
           <a:lstStyle/>
           <a:p>
             <a:pPr algn="ctr"/>
@@ -17705,7 +17987,7 @@
           </a:fontRef>
         </p:style>
         <p:txBody>
-          <a:bodyPr rtlCol="0" anchor="ctr" wrap="square"/>
+          <a:bodyPr wrap="square" rtlCol="0" anchor="ctr"/>
           <a:lstStyle/>
           <a:p>
             <a:pPr algn="ctr"/>
@@ -17758,7 +18040,7 @@
           </a:fontRef>
         </p:style>
         <p:txBody>
-          <a:bodyPr rtlCol="0" anchor="ctr" wrap="square"/>
+          <a:bodyPr wrap="square" rtlCol="0" anchor="ctr"/>
           <a:lstStyle/>
           <a:p>
             <a:pPr algn="ctr"/>
@@ -17811,7 +18093,7 @@
           </a:fontRef>
         </p:style>
         <p:txBody>
-          <a:bodyPr rtlCol="0" anchor="ctr" wrap="square"/>
+          <a:bodyPr wrap="square" rtlCol="0" anchor="ctr"/>
           <a:lstStyle/>
           <a:p>
             <a:pPr algn="ctr"/>
@@ -17867,6 +18149,7 @@
           <a:lstStyle/>
           <a:p>
             <a:pPr algn="ctr"/>
+            <a:endParaRPr/>
           </a:p>
         </p:txBody>
       </p:sp>
@@ -17908,7 +18191,7 @@
           </a:fontRef>
         </p:style>
         <p:txBody>
-          <a:bodyPr rtlCol="0" anchor="ctr" wrap="square"/>
+          <a:bodyPr wrap="square" rtlCol="0" anchor="ctr"/>
           <a:lstStyle/>
           <a:p>
             <a:pPr algn="ctr"/>
@@ -17964,6 +18247,7 @@
           <a:lstStyle/>
           <a:p>
             <a:pPr algn="ctr"/>
+            <a:endParaRPr/>
           </a:p>
         </p:txBody>
       </p:sp>
@@ -18005,9 +18289,6 @@
               </a:rPr>
               <a:t>▸ Single Docker image: Node build stage compiles the React app into /dist; Python runtime stage serves the API and the compiled SPA together</a:t>
             </a:r>
-            <a:r>
-              <a:t/>
-            </a:r>
           </a:p>
           <a:p>
             <a:pPr algn="l">
@@ -18026,9 +18307,6 @@
               </a:rPr>
               <a:t>▸ Frontend talks only to the FastAPI backend — no direct browser calls to NetStorage/Akamai/Grover (keeps API keys &amp; NS credentials server-side)</a:t>
             </a:r>
-            <a:r>
-              <a:t/>
-            </a:r>
           </a:p>
           <a:p>
             <a:pPr algn="l">
@@ -18047,9 +18325,6 @@
               </a:rPr>
               <a:t>▸ Long-running scans (Matrix jobs, security charts) run in background threads and stream progress back over Server-Sent Events (SSE)</a:t>
             </a:r>
-            <a:r>
-              <a:t/>
-            </a:r>
           </a:p>
           <a:p>
             <a:pPr algn="l">
@@ -18067,9 +18342,6 @@
                 </a:solidFill>
               </a:rPr>
               <a:t>▸ Data-source resolution follows a fallback chain per page: NetStorage (preferred) → Google Sheets → bundled mock data</a:t>
-            </a:r>
-            <a:r>
-              <a:t/>
             </a:r>
           </a:p>
         </p:txBody>
@@ -18083,7 +18355,7 @@
 </file>
 
 <file path=ppt/slides/slide6.xml><?xml version="1.0" encoding="utf-8"?>
-<p:sld xmlns:a="http://schemas.openxmlformats.org/drawingml/2006/main" xmlns:p="http://schemas.openxmlformats.org/presentationml/2006/main" xmlns:r="http://schemas.openxmlformats.org/officeDocument/2006/relationships">
+<p:sld xmlns:a="http://schemas.openxmlformats.org/drawingml/2006/main" xmlns:r="http://schemas.openxmlformats.org/officeDocument/2006/relationships" xmlns:p="http://schemas.openxmlformats.org/presentationml/2006/main">
   <p:cSld>
     <p:spTree>
       <p:nvGrpSpPr>
@@ -18091,7 +18363,14 @@
         <p:cNvGrpSpPr/>
         <p:nvPr/>
       </p:nvGrpSpPr>
-      <p:grpSpPr/>
+      <p:grpSpPr>
+        <a:xfrm>
+          <a:off x="0" y="0"/>
+          <a:ext cx="0" cy="0"/>
+          <a:chOff x="0" y="0"/>
+          <a:chExt cx="0" cy="0"/>
+        </a:xfrm>
+      </p:grpSpPr>
       <p:sp>
         <p:nvSpPr>
           <p:cNvPr id="2" name="Rectangle 1"/>
@@ -18133,6 +18412,7 @@
           <a:lstStyle/>
           <a:p>
             <a:pPr algn="ctr"/>
+            <a:endParaRPr/>
           </a:p>
         </p:txBody>
       </p:sp>
@@ -18246,6 +18526,7 @@
           <a:lstStyle/>
           <a:p>
             <a:pPr algn="ctr"/>
+            <a:endParaRPr/>
           </a:p>
         </p:txBody>
       </p:sp>
@@ -18291,6 +18572,7 @@
           <a:lstStyle/>
           <a:p>
             <a:pPr algn="ctr"/>
+            <a:endParaRPr/>
           </a:p>
         </p:txBody>
       </p:sp>
@@ -18367,9 +18649,6 @@
               </a:rPr>
               <a:t>▸ pages/ — one file per route (20 pages)</a:t>
             </a:r>
-            <a:r>
-              <a:t/>
-            </a:r>
           </a:p>
           <a:p>
             <a:pPr algn="l">
@@ -18388,9 +18667,6 @@
               </a:rPr>
               <a:t>▸ components/ — DashboardLayout, tables, charts, dropdowns, tone.ts (status color mapping)</a:t>
             </a:r>
-            <a:r>
-              <a:t/>
-            </a:r>
           </a:p>
           <a:p>
             <a:pPr algn="l">
@@ -18409,9 +18685,6 @@
               </a:rPr>
               <a:t>▸ context/ArchiveContext.tsx — global archive/NS-context state</a:t>
             </a:r>
-            <a:r>
-              <a:t/>
-            </a:r>
           </a:p>
           <a:p>
             <a:pPr algn="l">
@@ -18430,9 +18703,6 @@
               </a:rPr>
               <a:t>▸ services/ — one *Jobs.ts client per Matrix feature + netstorageData.ts, googleData.ts, sseJobClient.ts</a:t>
             </a:r>
-            <a:r>
-              <a:t/>
-            </a:r>
           </a:p>
           <a:p>
             <a:pPr algn="l">
@@ -18451,9 +18721,6 @@
               </a:rPr>
               <a:t>▸ data/mockData.ts — bundled fallback dataset</a:t>
             </a:r>
-            <a:r>
-              <a:t/>
-            </a:r>
           </a:p>
           <a:p>
             <a:pPr algn="l">
@@ -18472,9 +18739,6 @@
               </a:rPr>
               <a:t>▸ types/dashboard.ts — shared TS interfaces for all API payloads</a:t>
             </a:r>
-            <a:r>
-              <a:t/>
-            </a:r>
           </a:p>
         </p:txBody>
       </p:sp>
@@ -18520,6 +18784,7 @@
           <a:lstStyle/>
           <a:p>
             <a:pPr algn="ctr"/>
+            <a:endParaRPr/>
           </a:p>
         </p:txBody>
       </p:sp>
@@ -18596,9 +18861,6 @@
               </a:rPr>
               <a:t>▸ main.py — FastAPI app: every route, CORS, static SPA hosting</a:t>
             </a:r>
-            <a:r>
-              <a:t/>
-            </a:r>
           </a:p>
           <a:p>
             <a:pPr algn="l">
@@ -18617,9 +18879,6 @@
               </a:rPr>
               <a:t>▸ data_service.py (~2500 lines) — all data-fetching/business logic: NetStorage, Google, Akamai, CrUX, Grover</a:t>
             </a:r>
-            <a:r>
-              <a:t/>
-            </a:r>
           </a:p>
           <a:p>
             <a:pPr algn="l">
@@ -18638,9 +18897,6 @@
               </a:rPr>
               <a:t>▸ job_manager.py — Job class + JobManager (thread + SSE pub/sub)</a:t>
             </a:r>
-            <a:r>
-              <a:t/>
-            </a:r>
           </a:p>
           <a:p>
             <a:pPr algn="l">
@@ -18659,9 +18915,6 @@
               </a:rPr>
               <a:t>▸ mock_data.py — fallback dataset for backend endpoints</a:t>
             </a:r>
-            <a:r>
-              <a:t/>
-            </a:r>
           </a:p>
           <a:p>
             <a:pPr algn="l">
@@ -18680,9 +18933,6 @@
               </a:rPr>
               <a:t>▸ account_id_map.json — accountKey → Akamai accountId / csvAccountDir mapping</a:t>
             </a:r>
-            <a:r>
-              <a:t/>
-            </a:r>
           </a:p>
           <a:p>
             <a:pPr algn="l">
@@ -18700,9 +18950,6 @@
                 </a:solidFill>
               </a:rPr>
               <a:t>▸ authHeadersNS.py / cruxVis.py — standalone NetStorage &amp; CrUX prototyping scripts (not imported by the app)</a:t>
-            </a:r>
-            <a:r>
-              <a:t/>
             </a:r>
           </a:p>
         </p:txBody>
@@ -18716,7 +18963,7 @@
 </file>
 
 <file path=ppt/slides/slide7.xml><?xml version="1.0" encoding="utf-8"?>
-<p:sld xmlns:a="http://schemas.openxmlformats.org/drawingml/2006/main" xmlns:p="http://schemas.openxmlformats.org/presentationml/2006/main" xmlns:r="http://schemas.openxmlformats.org/officeDocument/2006/relationships">
+<p:sld xmlns:a="http://schemas.openxmlformats.org/drawingml/2006/main" xmlns:r="http://schemas.openxmlformats.org/officeDocument/2006/relationships" xmlns:p="http://schemas.openxmlformats.org/presentationml/2006/main">
   <p:cSld>
     <p:spTree>
       <p:nvGrpSpPr>
@@ -18724,7 +18971,14 @@
         <p:cNvGrpSpPr/>
         <p:nvPr/>
       </p:nvGrpSpPr>
-      <p:grpSpPr/>
+      <p:grpSpPr>
+        <a:xfrm>
+          <a:off x="0" y="0"/>
+          <a:ext cx="0" cy="0"/>
+          <a:chOff x="0" y="0"/>
+          <a:chExt cx="0" cy="0"/>
+        </a:xfrm>
+      </p:grpSpPr>
       <p:sp>
         <p:nvSpPr>
           <p:cNvPr id="2" name="Rectangle 1"/>
@@ -18766,6 +19020,7 @@
           <a:lstStyle/>
           <a:p>
             <a:pPr algn="ctr"/>
+            <a:endParaRPr/>
           </a:p>
         </p:txBody>
       </p:sp>
@@ -18879,6 +19134,7 @@
           <a:lstStyle/>
           <a:p>
             <a:pPr algn="ctr"/>
+            <a:endParaRPr/>
           </a:p>
         </p:txBody>
       </p:sp>
@@ -18901,9 +19157,27 @@
                 <a:tableStyleId>{5C22544A-7EE6-4342-B048-85BDC9FD1C3A}</a:tableStyleId>
               </a:tblPr>
               <a:tblGrid>
-                <a:gridCol w="3824868"/>
-                <a:gridCol w="2367775"/>
-                <a:gridCol w="5008756"/>
+                <a:gridCol w="3824868">
+                  <a:extLst>
+                    <a:ext uri="{9D8B030D-6E8A-4147-A177-3AD203B41FA5}">
+                      <a16:colId xmlns:a16="http://schemas.microsoft.com/office/drawing/2014/main" val="20000"/>
+                    </a:ext>
+                  </a:extLst>
+                </a:gridCol>
+                <a:gridCol w="2367775">
+                  <a:extLst>
+                    <a:ext uri="{9D8B030D-6E8A-4147-A177-3AD203B41FA5}">
+                      <a16:colId xmlns:a16="http://schemas.microsoft.com/office/drawing/2014/main" val="20001"/>
+                    </a:ext>
+                  </a:extLst>
+                </a:gridCol>
+                <a:gridCol w="5008756">
+                  <a:extLst>
+                    <a:ext uri="{9D8B030D-6E8A-4147-A177-3AD203B41FA5}">
+                      <a16:colId xmlns:a16="http://schemas.microsoft.com/office/drawing/2014/main" val="20002"/>
+                    </a:ext>
+                  </a:extLst>
+                </a:gridCol>
               </a:tblGrid>
               <a:tr h="461356">
                 <a:tc>
@@ -18913,7 +19187,7 @@
                     <a:p>
                       <a:pPr algn="l"/>
                       <a:r>
-                        <a:rPr b="1" sz="1200">
+                        <a:rPr sz="1200" b="1">
                           <a:solidFill>
                             <a:srgbClr val="FFFFFF"/>
                           </a:solidFill>
@@ -18935,7 +19209,7 @@
                     <a:p>
                       <a:pPr algn="l"/>
                       <a:r>
-                        <a:rPr b="1" sz="1200">
+                        <a:rPr sz="1200" b="1">
                           <a:solidFill>
                             <a:srgbClr val="FFFFFF"/>
                           </a:solidFill>
@@ -18957,7 +19231,7 @@
                     <a:p>
                       <a:pPr algn="l"/>
                       <a:r>
-                        <a:rPr b="1" sz="1200">
+                        <a:rPr sz="1200" b="1">
                           <a:solidFill>
                             <a:srgbClr val="FFFFFF"/>
                           </a:solidFill>
@@ -18972,6 +19246,11 @@
                     </a:solidFill>
                   </a:tcPr>
                 </a:tc>
+                <a:extLst>
+                  <a:ext uri="{0D108BD9-81ED-4DB2-BD59-A6C34878D82A}">
+                    <a16:rowId xmlns:a16="http://schemas.microsoft.com/office/drawing/2014/main" val="10000"/>
+                  </a:ext>
+                </a:extLst>
               </a:tr>
               <a:tr h="461356">
                 <a:tc>
@@ -19037,6 +19316,11 @@
                     </a:solidFill>
                   </a:tcPr>
                 </a:tc>
+                <a:extLst>
+                  <a:ext uri="{0D108BD9-81ED-4DB2-BD59-A6C34878D82A}">
+                    <a16:rowId xmlns:a16="http://schemas.microsoft.com/office/drawing/2014/main" val="10001"/>
+                  </a:ext>
+                </a:extLst>
               </a:tr>
               <a:tr h="461356">
                 <a:tc>
@@ -19102,6 +19386,11 @@
                     </a:solidFill>
                   </a:tcPr>
                 </a:tc>
+                <a:extLst>
+                  <a:ext uri="{0D108BD9-81ED-4DB2-BD59-A6C34878D82A}">
+                    <a16:rowId xmlns:a16="http://schemas.microsoft.com/office/drawing/2014/main" val="10002"/>
+                  </a:ext>
+                </a:extLst>
               </a:tr>
               <a:tr h="461356">
                 <a:tc>
@@ -19167,6 +19456,11 @@
                     </a:solidFill>
                   </a:tcPr>
                 </a:tc>
+                <a:extLst>
+                  <a:ext uri="{0D108BD9-81ED-4DB2-BD59-A6C34878D82A}">
+                    <a16:rowId xmlns:a16="http://schemas.microsoft.com/office/drawing/2014/main" val="10003"/>
+                  </a:ext>
+                </a:extLst>
               </a:tr>
               <a:tr h="461356">
                 <a:tc>
@@ -19232,6 +19526,11 @@
                     </a:solidFill>
                   </a:tcPr>
                 </a:tc>
+                <a:extLst>
+                  <a:ext uri="{0D108BD9-81ED-4DB2-BD59-A6C34878D82A}">
+                    <a16:rowId xmlns:a16="http://schemas.microsoft.com/office/drawing/2014/main" val="10004"/>
+                  </a:ext>
+                </a:extLst>
               </a:tr>
               <a:tr h="461356">
                 <a:tc>
@@ -19297,6 +19596,11 @@
                     </a:solidFill>
                   </a:tcPr>
                 </a:tc>
+                <a:extLst>
+                  <a:ext uri="{0D108BD9-81ED-4DB2-BD59-A6C34878D82A}">
+                    <a16:rowId xmlns:a16="http://schemas.microsoft.com/office/drawing/2014/main" val="10005"/>
+                  </a:ext>
+                </a:extLst>
               </a:tr>
               <a:tr h="461356">
                 <a:tc>
@@ -19362,6 +19666,11 @@
                     </a:solidFill>
                   </a:tcPr>
                 </a:tc>
+                <a:extLst>
+                  <a:ext uri="{0D108BD9-81ED-4DB2-BD59-A6C34878D82A}">
+                    <a16:rowId xmlns:a16="http://schemas.microsoft.com/office/drawing/2014/main" val="10006"/>
+                  </a:ext>
+                </a:extLst>
               </a:tr>
               <a:tr h="461356">
                 <a:tc>
@@ -19427,6 +19736,11 @@
                     </a:solidFill>
                   </a:tcPr>
                 </a:tc>
+                <a:extLst>
+                  <a:ext uri="{0D108BD9-81ED-4DB2-BD59-A6C34878D82A}">
+                    <a16:rowId xmlns:a16="http://schemas.microsoft.com/office/drawing/2014/main" val="10007"/>
+                  </a:ext>
+                </a:extLst>
               </a:tr>
               <a:tr h="461356">
                 <a:tc>
@@ -19492,6 +19806,11 @@
                     </a:solidFill>
                   </a:tcPr>
                 </a:tc>
+                <a:extLst>
+                  <a:ext uri="{0D108BD9-81ED-4DB2-BD59-A6C34878D82A}">
+                    <a16:rowId xmlns:a16="http://schemas.microsoft.com/office/drawing/2014/main" val="10008"/>
+                  </a:ext>
+                </a:extLst>
               </a:tr>
               <a:tr h="461356">
                 <a:tc>
@@ -19557,6 +19876,11 @@
                     </a:solidFill>
                   </a:tcPr>
                 </a:tc>
+                <a:extLst>
+                  <a:ext uri="{0D108BD9-81ED-4DB2-BD59-A6C34878D82A}">
+                    <a16:rowId xmlns:a16="http://schemas.microsoft.com/office/drawing/2014/main" val="10009"/>
+                  </a:ext>
+                </a:extLst>
               </a:tr>
               <a:tr h="461360">
                 <a:tc>
@@ -19622,6 +19946,11 @@
                     </a:solidFill>
                   </a:tcPr>
                 </a:tc>
+                <a:extLst>
+                  <a:ext uri="{0D108BD9-81ED-4DB2-BD59-A6C34878D82A}">
+                    <a16:rowId xmlns:a16="http://schemas.microsoft.com/office/drawing/2014/main" val="10010"/>
+                  </a:ext>
+                </a:extLst>
               </a:tr>
             </a:tbl>
           </a:graphicData>
@@ -19636,7 +19965,7 @@
 </file>
 
 <file path=ppt/slides/slide8.xml><?xml version="1.0" encoding="utf-8"?>
-<p:sld xmlns:a="http://schemas.openxmlformats.org/drawingml/2006/main" xmlns:p="http://schemas.openxmlformats.org/presentationml/2006/main" xmlns:r="http://schemas.openxmlformats.org/officeDocument/2006/relationships">
+<p:sld xmlns:a="http://schemas.openxmlformats.org/drawingml/2006/main" xmlns:r="http://schemas.openxmlformats.org/officeDocument/2006/relationships" xmlns:p="http://schemas.openxmlformats.org/presentationml/2006/main">
   <p:cSld>
     <p:spTree>
       <p:nvGrpSpPr>
@@ -19644,7 +19973,14 @@
         <p:cNvGrpSpPr/>
         <p:nvPr/>
       </p:nvGrpSpPr>
-      <p:grpSpPr/>
+      <p:grpSpPr>
+        <a:xfrm>
+          <a:off x="0" y="0"/>
+          <a:ext cx="0" cy="0"/>
+          <a:chOff x="0" y="0"/>
+          <a:chExt cx="0" cy="0"/>
+        </a:xfrm>
+      </p:grpSpPr>
       <p:sp>
         <p:nvSpPr>
           <p:cNvPr id="2" name="Rectangle 1"/>
@@ -19686,6 +20022,7 @@
           <a:lstStyle/>
           <a:p>
             <a:pPr algn="ctr"/>
+            <a:endParaRPr/>
           </a:p>
         </p:txBody>
       </p:sp>
@@ -19799,6 +20136,7 @@
           <a:lstStyle/>
           <a:p>
             <a:pPr algn="ctr"/>
+            <a:endParaRPr/>
           </a:p>
         </p:txBody>
       </p:sp>
@@ -19840,9 +20178,6 @@
               </a:rPr>
               <a:t>▸ DashboardLayout — wraps every page: gradient header, back-to-dashboard link, the global Archive(s) picker, page title + optional account-owner chip</a:t>
             </a:r>
-            <a:r>
-              <a:t/>
-            </a:r>
           </a:p>
           <a:p>
             <a:pPr algn="l">
@@ -19861,9 +20196,6 @@
               </a:rPr>
               <a:t>▸ tone.ts — centralizes status→color mapping (healthy / watch / risk / neutral) reused by MetricTiles, AccountsTable, highlights &amp; actions lists</a:t>
             </a:r>
-            <a:r>
-              <a:t/>
-            </a:r>
           </a:p>
           <a:p>
             <a:pPr algn="l">
@@ -19882,9 +20214,6 @@
               </a:rPr>
               <a:t>▸ MetricTiles — reusable KPI tile grid (used on both Summary and Account Detail pages)</a:t>
             </a:r>
-            <a:r>
-              <a:t/>
-            </a:r>
           </a:p>
           <a:p>
             <a:pPr algn="l">
@@ -19903,9 +20232,6 @@
               </a:rPr>
               <a:t>▸ HealthWidgetLink — the animated "tool box" cards on Account Detail linking into each Matrix feature (SVG micro-animations per feature category)</a:t>
             </a:r>
-            <a:r>
-              <a:t/>
-            </a:r>
           </a:p>
           <a:p>
             <a:pPr algn="l">
@@ -19924,9 +20250,6 @@
               </a:rPr>
               <a:t>▸ AccountSearchDropdown / ArchiveSearchDropdown — same searchable-combobox UX pattern reused for two different pickers (pick an account vs. pick an archive snapshot)</a:t>
             </a:r>
-            <a:r>
-              <a:t/>
-            </a:r>
           </a:p>
           <a:p>
             <a:pPr algn="l">
@@ -19945,9 +20268,6 @@
               </a:rPr>
               <a:t>▸ Every Matrix table page shares one layout: Scan Progress panel (status + progress bar + streaming log) → download-CSV link → filterable data table</a:t>
             </a:r>
-            <a:r>
-              <a:t/>
-            </a:r>
           </a:p>
           <a:p>
             <a:pPr algn="l">
@@ -19965,9 +20285,6 @@
                 </a:solidFill>
               </a:rPr>
               <a:t>▸ Column-filter dropdowns, multi-select property/hostname filters, and deep-link pre-selection (via the URL's last path segment) are consistent across all six Matrix families</a:t>
-            </a:r>
-            <a:r>
-              <a:t/>
             </a:r>
           </a:p>
         </p:txBody>
@@ -19981,7 +20298,7 @@
 </file>
 
 <file path=ppt/slides/slide9.xml><?xml version="1.0" encoding="utf-8"?>
-<p:sld xmlns:a="http://schemas.openxmlformats.org/drawingml/2006/main" xmlns:p="http://schemas.openxmlformats.org/presentationml/2006/main" xmlns:r="http://schemas.openxmlformats.org/officeDocument/2006/relationships">
+<p:sld xmlns:a="http://schemas.openxmlformats.org/drawingml/2006/main" xmlns:r="http://schemas.openxmlformats.org/officeDocument/2006/relationships" xmlns:p="http://schemas.openxmlformats.org/presentationml/2006/main">
   <p:cSld>
     <p:spTree>
       <p:nvGrpSpPr>
@@ -19989,7 +20306,14 @@
         <p:cNvGrpSpPr/>
         <p:nvPr/>
       </p:nvGrpSpPr>
-      <p:grpSpPr/>
+      <p:grpSpPr>
+        <a:xfrm>
+          <a:off x="0" y="0"/>
+          <a:ext cx="0" cy="0"/>
+          <a:chOff x="0" y="0"/>
+          <a:chExt cx="0" cy="0"/>
+        </a:xfrm>
+      </p:grpSpPr>
       <p:sp>
         <p:nvSpPr>
           <p:cNvPr id="2" name="Rectangle 1"/>
@@ -20031,6 +20355,7 @@
           <a:lstStyle/>
           <a:p>
             <a:pPr algn="ctr"/>
+            <a:endParaRPr/>
           </a:p>
         </p:txBody>
       </p:sp>
@@ -20144,6 +20469,7 @@
           <a:lstStyle/>
           <a:p>
             <a:pPr algn="ctr"/>
+            <a:endParaRPr/>
           </a:p>
         </p:txBody>
       </p:sp>
@@ -20185,9 +20511,6 @@
               </a:rPr>
               <a:t>▸ Entry point for stakeholders — answers "how are all my accounts doing at a glance?"</a:t>
             </a:r>
-            <a:r>
-              <a:t/>
-            </a:r>
           </a:p>
           <a:p>
             <a:pPr algn="l">
@@ -20206,9 +20529,6 @@
               </a:rPr>
               <a:t>▸ Loads data via fetchNsSummaryDashboardData(archive) → NetStorage all_accounts_summary.json (LIVE or a selected archive snapshot)</a:t>
             </a:r>
-            <a:r>
-              <a:t/>
-            </a:r>
           </a:p>
           <a:p>
             <a:pPr algn="l">
@@ -20227,9 +20547,6 @@
               </a:rPr>
               <a:t>▸ Falls back to fetchSummaryDashboardData() (Google Sheets) if NetStorage is unavailable, then shows a "Data source" banner explaining which path served the page</a:t>
             </a:r>
-            <a:r>
-              <a:t/>
-            </a:r>
           </a:p>
           <a:p>
             <a:pPr algn="l">
@@ -20248,9 +20565,6 @@
               </a:rPr>
               <a:t>▸ MetricTiles — top-line KPI strip (e.g. total accounts, at-risk count, growth ops)</a:t>
             </a:r>
-            <a:r>
-              <a:t/>
-            </a:r>
           </a:p>
           <a:p>
             <a:pPr algn="l">
@@ -20269,9 +20583,6 @@
               </a:rPr>
               <a:t>▸ AccountsTable — sortable/status-badged list of every account, links into Account Detail</a:t>
             </a:r>
-            <a:r>
-              <a:t/>
-            </a:r>
           </a:p>
           <a:p>
             <a:pPr algn="l">
@@ -20290,9 +20601,6 @@
               </a:rPr>
               <a:t>▸ PanelColumns — risk/opportunity summary panels</a:t>
             </a:r>
-            <a:r>
-              <a:t/>
-            </a:r>
           </a:p>
           <a:p>
             <a:pPr algn="l">
@@ -20311,9 +20619,6 @@
               </a:rPr>
               <a:t>▸ AccountSearchDropdown — type-ahead search over the live account_mapping.json to jump straight to an account</a:t>
             </a:r>
-            <a:r>
-              <a:t/>
-            </a:r>
           </a:p>
           <a:p>
             <a:pPr algn="l">
@@ -20331,9 +20636,6 @@
                 </a:solidFill>
               </a:rPr>
               <a:t>▸ Archive(s) picker (in DashboardLayout) controls which NetStorage snapshot (LIVE or archive/&lt;date&gt;) this page — and every page reachable from it — reads from</a:t>
-            </a:r>
-            <a:r>
-              <a:t/>
             </a:r>
           </a:p>
         </p:txBody>
